--- a/CorrectMe_Apresentacao.pptx
+++ b/CorrectMe_Apresentacao.pptx
@@ -4425,89 +4425,33 @@
           </a:p>
         </p:txBody>
       </p:sp>
-      <p:sp>
-        <p:nvSpPr>
-          <p:cNvPr id="18" name="Rounded Rectangle 17"/>
-          <p:cNvSpPr/>
-          <p:nvPr/>
-        </p:nvSpPr>
+      <p:pic>
+        <p:nvPicPr>
+          <p:cNvPr id="18" name="Picture 17" descr="screenshot_paraphrase_text.png"/>
+          <p:cNvPicPr>
+            <a:picLocks noChangeAspect="1"/>
+          </p:cNvPicPr>
+          <p:nvPr/>
+        </p:nvPicPr>
+        <p:blipFill>
+          <a:blip r:embed="rId2"/>
+          <a:stretch>
+            <a:fillRect/>
+          </a:stretch>
+        </p:blipFill>
         <p:spPr>
           <a:xfrm>
             <a:off x="4572000" y="457200"/>
-            <a:ext cx="4297680" cy="3931920"/>
-          </a:xfrm>
-          <a:prstGeom prst="roundRect">
-            <a:avLst/>
-          </a:prstGeom>
-          <a:solidFill>
-            <a:srgbClr val="372A5C"/>
-          </a:solidFill>
-          <a:ln w="25400">
-            <a:solidFill>
-              <a:srgbClr val="F97316"/>
-            </a:solidFill>
-          </a:ln>
-        </p:spPr>
-        <p:style>
-          <a:lnRef idx="1">
-            <a:schemeClr val="accent1"/>
-          </a:lnRef>
-          <a:fillRef idx="3">
-            <a:schemeClr val="accent1"/>
-          </a:fillRef>
-          <a:effectRef idx="2">
-            <a:schemeClr val="accent1"/>
-          </a:effectRef>
-          <a:fontRef idx="minor">
-            <a:schemeClr val="lt1"/>
-          </a:fontRef>
-        </p:style>
-        <p:txBody>
-          <a:bodyPr rtlCol="0" anchor="ctr"/>
-          <a:lstStyle/>
-          <a:p>
-            <a:pPr algn="ctr"/>
-          </a:p>
-        </p:txBody>
-      </p:sp>
+            <a:ext cx="4297680" cy="4161159"/>
+          </a:xfrm>
+          <a:prstGeom prst="rect">
+            <a:avLst/>
+          </a:prstGeom>
+        </p:spPr>
+      </p:pic>
       <p:sp>
         <p:nvSpPr>
           <p:cNvPr id="19" name="TextBox 18"/>
-          <p:cNvSpPr txBox="1"/>
-          <p:nvPr/>
-        </p:nvSpPr>
-        <p:spPr>
-          <a:xfrm>
-            <a:off x="5029200" y="2103120"/>
-            <a:ext cx="3383280" cy="457200"/>
-          </a:xfrm>
-          <a:prstGeom prst="rect">
-            <a:avLst/>
-          </a:prstGeom>
-          <a:noFill/>
-        </p:spPr>
-        <p:txBody>
-          <a:bodyPr wrap="none">
-            <a:spAutoFit/>
-          </a:bodyPr>
-          <a:lstStyle/>
-          <a:p>
-            <a:pPr algn="ctr">
-              <a:defRPr sz="1400">
-                <a:solidFill>
-                  <a:srgbClr val="9CA3AF"/>
-                </a:solidFill>
-              </a:defRPr>
-            </a:pPr>
-            <a:r>
-              <a:t>[screenshot_paraphrase_text.png]</a:t>
-            </a:r>
-          </a:p>
-        </p:txBody>
-      </p:sp>
-      <p:sp>
-        <p:nvSpPr>
-          <p:cNvPr id="20" name="TextBox 19"/>
           <p:cNvSpPr txBox="1"/>
           <p:nvPr/>
         </p:nvSpPr>
@@ -14520,89 +14464,33 @@
           </a:p>
         </p:txBody>
       </p:sp>
-      <p:sp>
-        <p:nvSpPr>
-          <p:cNvPr id="18" name="Rounded Rectangle 17"/>
-          <p:cNvSpPr/>
-          <p:nvPr/>
-        </p:nvSpPr>
+      <p:pic>
+        <p:nvPicPr>
+          <p:cNvPr id="18" name="Picture 17" descr="screenshot_practice_conversation.png"/>
+          <p:cNvPicPr>
+            <a:picLocks noChangeAspect="1"/>
+          </p:cNvPicPr>
+          <p:nvPr/>
+        </p:nvPicPr>
+        <p:blipFill>
+          <a:blip r:embed="rId2"/>
+          <a:stretch>
+            <a:fillRect/>
+          </a:stretch>
+        </p:blipFill>
         <p:spPr>
           <a:xfrm>
             <a:off x="4572000" y="457200"/>
-            <a:ext cx="4297680" cy="3931920"/>
-          </a:xfrm>
-          <a:prstGeom prst="roundRect">
-            <a:avLst/>
-          </a:prstGeom>
-          <a:solidFill>
-            <a:srgbClr val="372A5C"/>
-          </a:solidFill>
-          <a:ln w="25400">
-            <a:solidFill>
-              <a:srgbClr val="22D3EE"/>
-            </a:solidFill>
-          </a:ln>
-        </p:spPr>
-        <p:style>
-          <a:lnRef idx="1">
-            <a:schemeClr val="accent1"/>
-          </a:lnRef>
-          <a:fillRef idx="3">
-            <a:schemeClr val="accent1"/>
-          </a:fillRef>
-          <a:effectRef idx="2">
-            <a:schemeClr val="accent1"/>
-          </a:effectRef>
-          <a:fontRef idx="minor">
-            <a:schemeClr val="lt1"/>
-          </a:fontRef>
-        </p:style>
-        <p:txBody>
-          <a:bodyPr rtlCol="0" anchor="ctr"/>
-          <a:lstStyle/>
-          <a:p>
-            <a:pPr algn="ctr"/>
-          </a:p>
-        </p:txBody>
-      </p:sp>
+            <a:ext cx="4297680" cy="1864435"/>
+          </a:xfrm>
+          <a:prstGeom prst="rect">
+            <a:avLst/>
+          </a:prstGeom>
+        </p:spPr>
+      </p:pic>
       <p:sp>
         <p:nvSpPr>
           <p:cNvPr id="19" name="TextBox 18"/>
-          <p:cNvSpPr txBox="1"/>
-          <p:nvPr/>
-        </p:nvSpPr>
-        <p:spPr>
-          <a:xfrm>
-            <a:off x="5029200" y="2103120"/>
-            <a:ext cx="3383280" cy="457200"/>
-          </a:xfrm>
-          <a:prstGeom prst="rect">
-            <a:avLst/>
-          </a:prstGeom>
-          <a:noFill/>
-        </p:spPr>
-        <p:txBody>
-          <a:bodyPr wrap="none">
-            <a:spAutoFit/>
-          </a:bodyPr>
-          <a:lstStyle/>
-          <a:p>
-            <a:pPr algn="ctr">
-              <a:defRPr sz="1400">
-                <a:solidFill>
-                  <a:srgbClr val="9CA3AF"/>
-                </a:solidFill>
-              </a:defRPr>
-            </a:pPr>
-            <a:r>
-              <a:t>[screenshot_practice_conversation.png]</a:t>
-            </a:r>
-          </a:p>
-        </p:txBody>
-      </p:sp>
-      <p:sp>
-        <p:nvSpPr>
-          <p:cNvPr id="20" name="TextBox 19"/>
           <p:cNvSpPr txBox="1"/>
           <p:nvPr/>
         </p:nvSpPr>
@@ -15994,89 +15882,33 @@
           </a:p>
         </p:txBody>
       </p:sp>
-      <p:sp>
-        <p:nvSpPr>
-          <p:cNvPr id="18" name="Rounded Rectangle 17"/>
-          <p:cNvSpPr/>
-          <p:nvPr/>
-        </p:nvSpPr>
+      <p:pic>
+        <p:nvPicPr>
+          <p:cNvPr id="18" name="Picture 17" descr="screenshot_flashcards_game.png"/>
+          <p:cNvPicPr>
+            <a:picLocks noChangeAspect="1"/>
+          </p:cNvPicPr>
+          <p:nvPr/>
+        </p:nvPicPr>
+        <p:blipFill>
+          <a:blip r:embed="rId2"/>
+          <a:stretch>
+            <a:fillRect/>
+          </a:stretch>
+        </p:blipFill>
         <p:spPr>
           <a:xfrm>
             <a:off x="4572000" y="457200"/>
-            <a:ext cx="4297680" cy="3931920"/>
-          </a:xfrm>
-          <a:prstGeom prst="roundRect">
-            <a:avLst/>
-          </a:prstGeom>
-          <a:solidFill>
-            <a:srgbClr val="372A5C"/>
-          </a:solidFill>
-          <a:ln w="25400">
-            <a:solidFill>
-              <a:srgbClr val="3B82F6"/>
-            </a:solidFill>
-          </a:ln>
-        </p:spPr>
-        <p:style>
-          <a:lnRef idx="1">
-            <a:schemeClr val="accent1"/>
-          </a:lnRef>
-          <a:fillRef idx="3">
-            <a:schemeClr val="accent1"/>
-          </a:fillRef>
-          <a:effectRef idx="2">
-            <a:schemeClr val="accent1"/>
-          </a:effectRef>
-          <a:fontRef idx="minor">
-            <a:schemeClr val="lt1"/>
-          </a:fontRef>
-        </p:style>
-        <p:txBody>
-          <a:bodyPr rtlCol="0" anchor="ctr"/>
-          <a:lstStyle/>
-          <a:p>
-            <a:pPr algn="ctr"/>
-          </a:p>
-        </p:txBody>
-      </p:sp>
+            <a:ext cx="4297680" cy="2852717"/>
+          </a:xfrm>
+          <a:prstGeom prst="rect">
+            <a:avLst/>
+          </a:prstGeom>
+        </p:spPr>
+      </p:pic>
       <p:sp>
         <p:nvSpPr>
           <p:cNvPr id="19" name="TextBox 18"/>
-          <p:cNvSpPr txBox="1"/>
-          <p:nvPr/>
-        </p:nvSpPr>
-        <p:spPr>
-          <a:xfrm>
-            <a:off x="5029200" y="2103120"/>
-            <a:ext cx="3383280" cy="457200"/>
-          </a:xfrm>
-          <a:prstGeom prst="rect">
-            <a:avLst/>
-          </a:prstGeom>
-          <a:noFill/>
-        </p:spPr>
-        <p:txBody>
-          <a:bodyPr wrap="none">
-            <a:spAutoFit/>
-          </a:bodyPr>
-          <a:lstStyle/>
-          <a:p>
-            <a:pPr algn="ctr">
-              <a:defRPr sz="1400">
-                <a:solidFill>
-                  <a:srgbClr val="9CA3AF"/>
-                </a:solidFill>
-              </a:defRPr>
-            </a:pPr>
-            <a:r>
-              <a:t>[screenshot_flashcards_game.png]</a:t>
-            </a:r>
-          </a:p>
-        </p:txBody>
-      </p:sp>
-      <p:sp>
-        <p:nvSpPr>
-          <p:cNvPr id="20" name="TextBox 19"/>
           <p:cNvSpPr txBox="1"/>
           <p:nvPr/>
         </p:nvSpPr>

--- a/CorrectMe_Apresentacao.pptx
+++ b/CorrectMe_Apresentacao.pptx
@@ -3320,7 +3320,7 @@
               </a:defRPr>
             </a:pPr>
             <a:r>
-              <a:t>Aprendizagem de Alemao com IA</a:t>
+              <a:t>Aprendizagem de Alemão com IA</a:t>
             </a:r>
           </a:p>
         </p:txBody>
@@ -3355,7 +3355,7 @@
               </a:defRPr>
             </a:pPr>
             <a:r>
-              <a:t>Plataforma completa de aprendizado de alemao com inteligencia artificial para brasileiros</a:t>
+              <a:t>Plataforma completa de aprendizado de alemão com inteligência artificial para brasileiros</a:t>
             </a:r>
           </a:p>
         </p:txBody>
@@ -3470,7 +3470,7 @@
               </a:defRPr>
             </a:pPr>
             <a:r>
-              <a:t>Correcao de Textos</a:t>
+              <a:t>Correção de Textos</a:t>
             </a:r>
           </a:p>
         </p:txBody>
@@ -3585,7 +3585,7 @@
               </a:defRPr>
             </a:pPr>
             <a:r>
-              <a:t>Pratica de Conversacao</a:t>
+              <a:t>Prática de Conversação</a:t>
             </a:r>
           </a:p>
         </p:txBody>
@@ -3936,7 +3936,7 @@
               </a:defRPr>
             </a:pPr>
             <a:r>
-              <a:t>Transforme seu texto alemao em diferentes estilos: formal, casual, com emojis, simplificado e mais.</a:t>
+              <a:t>Transforme seu texto alemão em diferentes estilos: formal, casual, com emojis, simplificado e mais.</a:t>
             </a:r>
           </a:p>
         </p:txBody>
@@ -4178,7 +4178,7 @@
               </a:defRPr>
             </a:pPr>
             <a:r>
-              <a:t>Mantem o significado original</a:t>
+              <a:t>Mantém o significado original</a:t>
             </a:r>
           </a:p>
         </p:txBody>
@@ -4299,7 +4299,7 @@
               </a:defRPr>
             </a:pPr>
             <a:r>
-              <a:t>Ideal para aprender sinonimos</a:t>
+              <a:t>Ideal para aprender sinônimos</a:t>
             </a:r>
           </a:p>
         </p:txBody>
@@ -4420,7 +4420,7 @@
               </a:defRPr>
             </a:pPr>
             <a:r>
-              <a:t>Melhore seu vocabulario ativo</a:t>
+              <a:t>Melhore seu vocabulário ativo</a:t>
             </a:r>
           </a:p>
         </p:txBody>
@@ -4803,7 +4803,7 @@
               </a:defRPr>
             </a:pPr>
             <a:r>
-              <a:t>Cole ou digite sua redacao em alemao. Nosso editor inteligente aceita qualquer texto.</a:t>
+              <a:t>Cole ou digite sua redação em alemão. Nosso editor inteligente aceita qualquer texto.</a:t>
             </a:r>
           </a:p>
         </p:txBody>
@@ -4961,7 +4961,7 @@
               </a:defRPr>
             </a:pPr>
             <a:r>
-              <a:t>Receba a analise</a:t>
+              <a:t>Receba a análise</a:t>
             </a:r>
           </a:p>
         </p:txBody>
@@ -4996,7 +4996,7 @@
               </a:defRPr>
             </a:pPr>
             <a:r>
-              <a:t>Nossa IA identifica erros, categoriza por tipo e explica cada correcao em portugues.</a:t>
+              <a:t>Nossa IA identifica erros, categoriza por tipo e explica cada correção em português.</a:t>
             </a:r>
           </a:p>
         </p:txBody>
@@ -5154,7 +5154,7 @@
               </a:defRPr>
             </a:pPr>
             <a:r>
-              <a:t>Acompanhe sua evolucao</a:t>
+              <a:t>Acompanhe sua evolução</a:t>
             </a:r>
           </a:p>
         </p:txBody>
@@ -5390,7 +5390,7 @@
               </a:defRPr>
             </a:pPr>
             <a:r>
-              <a:t>Analise de Custo</a:t>
+              <a:t>Análise de Custo</a:t>
             </a:r>
           </a:p>
         </p:txBody>
@@ -5425,7 +5425,7 @@
               </a:defRPr>
             </a:pPr>
             <a:r>
-              <a:t>Investimento acessivel para um aprendizado de qualidade</a:t>
+              <a:t>Investimento acessível para um aprendizado de qualidade</a:t>
             </a:r>
           </a:p>
         </p:txBody>
@@ -5460,7 +5460,7 @@
               </a:defRPr>
             </a:pPr>
             <a:r>
-              <a:t>Sistema de Creditos</a:t>
+              <a:t>Sistema de Créditos</a:t>
             </a:r>
           </a:p>
         </p:txBody>
@@ -5538,7 +5538,7 @@
               </a:defRPr>
             </a:pPr>
             <a:r>
-              <a:t>100 creditos</a:t>
+              <a:t>100 créditos</a:t>
             </a:r>
           </a:p>
         </p:txBody>
@@ -5573,7 +5573,7 @@
               </a:defRPr>
             </a:pPr>
             <a:r>
-              <a:t>Gratis para novos usuarios</a:t>
+              <a:t>Grátis para novos usuários</a:t>
             </a:r>
           </a:p>
         </p:txBody>
@@ -5651,7 +5651,7 @@
               </a:defRPr>
             </a:pPr>
             <a:r>
-              <a:t>Correcao de texto</a:t>
+              <a:t>Correção de texto</a:t>
             </a:r>
           </a:p>
         </p:txBody>
@@ -5686,7 +5686,7 @@
               </a:defRPr>
             </a:pPr>
             <a:r>
-              <a:t>~1 credito por correcao</a:t>
+              <a:t>~1 crédito por correção</a:t>
             </a:r>
           </a:p>
         </p:txBody>
@@ -5764,7 +5764,7 @@
               </a:defRPr>
             </a:pPr>
             <a:r>
-              <a:t>Pratica de conversacao</a:t>
+              <a:t>Prática de conversação</a:t>
             </a:r>
           </a:p>
         </p:txBody>
@@ -5799,7 +5799,7 @@
               </a:defRPr>
             </a:pPr>
             <a:r>
-              <a:t>10 creditos/minuto</a:t>
+              <a:t>10 créditos/minuto</a:t>
             </a:r>
           </a:p>
         </p:txBody>
@@ -5877,7 +5877,7 @@
               </a:defRPr>
             </a:pPr>
             <a:r>
-              <a:t>Parafrase de texto</a:t>
+              <a:t>Paráfrase de texto</a:t>
             </a:r>
           </a:p>
         </p:txBody>
@@ -5912,7 +5912,7 @@
               </a:defRPr>
             </a:pPr>
             <a:r>
-              <a:t>~1 credito por uso</a:t>
+              <a:t>~1 crédito por uso</a:t>
             </a:r>
           </a:p>
         </p:txBody>
@@ -6286,7 +6286,7 @@
               </a:defRPr>
             </a:pPr>
             <a:r>
-              <a:t>R$ 300-800/mes</a:t>
+              <a:t>R$ 300-800/mês</a:t>
             </a:r>
           </a:p>
         </p:txBody>
@@ -6399,7 +6399,7 @@
               </a:defRPr>
             </a:pPr>
             <a:r>
-              <a:t>R$ 50-100/mes</a:t>
+              <a:t>R$ 50-100/mês</a:t>
             </a:r>
           </a:p>
         </p:txBody>
@@ -6592,7 +6592,7 @@
               </a:defRPr>
             </a:pPr>
             <a:r>
-              <a:t>Comece gratis com 100 creditos - Sem cartao de credito necessario!</a:t>
+              <a:t>Comece grátis com 100 créditos - Sem cartão de crédito necessário!</a:t>
             </a:r>
           </a:p>
         </p:txBody>
@@ -6984,7 +6984,7 @@
               </a:defRPr>
             </a:pPr>
             <a:r>
-              <a:t>Especializado em alemao</a:t>
+              <a:t>Especializado em alemão</a:t>
             </a:r>
           </a:p>
         </p:txBody>
@@ -7124,7 +7124,7 @@
               </a:defRPr>
             </a:pPr>
             <a:r>
-              <a:t>Feedback pedagogico</a:t>
+              <a:t>Feedback pedagógico</a:t>
             </a:r>
           </a:p>
         </p:txBody>
@@ -7194,7 +7194,7 @@
               </a:defRPr>
             </a:pPr>
             <a:r>
-              <a:t>Nao</a:t>
+              <a:t>Não</a:t>
             </a:r>
           </a:p>
         </p:txBody>
@@ -7307,7 +7307,7 @@
               </a:defRPr>
             </a:pPr>
             <a:r>
-              <a:t>Categorizacao de erros</a:t>
+              <a:t>Categorização de erros</a:t>
             </a:r>
           </a:p>
         </p:txBody>
@@ -7377,7 +7377,7 @@
               </a:defRPr>
             </a:pPr>
             <a:r>
-              <a:t>Nao</a:t>
+              <a:t>Não</a:t>
             </a:r>
           </a:p>
         </p:txBody>
@@ -7412,7 +7412,7 @@
               </a:defRPr>
             </a:pPr>
             <a:r>
-              <a:t>Nao</a:t>
+              <a:t>Não</a:t>
             </a:r>
           </a:p>
         </p:txBody>
@@ -7517,7 +7517,7 @@
               </a:defRPr>
             </a:pPr>
             <a:r>
-              <a:t>Nao</a:t>
+              <a:t>Não</a:t>
             </a:r>
           </a:p>
         </p:txBody>
@@ -7552,7 +7552,7 @@
               </a:defRPr>
             </a:pPr>
             <a:r>
-              <a:t>Nao</a:t>
+              <a:t>Não</a:t>
             </a:r>
           </a:p>
         </p:txBody>
@@ -7630,7 +7630,7 @@
               </a:defRPr>
             </a:pPr>
             <a:r>
-              <a:t>Listas de vocabulario</a:t>
+              <a:t>Listas de vocabulário</a:t>
             </a:r>
           </a:p>
         </p:txBody>
@@ -7700,7 +7700,7 @@
               </a:defRPr>
             </a:pPr>
             <a:r>
-              <a:t>Nao</a:t>
+              <a:t>Não</a:t>
             </a:r>
           </a:p>
         </p:txBody>
@@ -7735,7 +7735,7 @@
               </a:defRPr>
             </a:pPr>
             <a:r>
-              <a:t>Nao</a:t>
+              <a:t>Não</a:t>
             </a:r>
           </a:p>
         </p:txBody>
@@ -7770,7 +7770,7 @@
               </a:defRPr>
             </a:pPr>
             <a:r>
-              <a:t>Chatbot para pratica</a:t>
+              <a:t>Chatbot para prática</a:t>
             </a:r>
           </a:p>
         </p:txBody>
@@ -7840,7 +7840,7 @@
               </a:defRPr>
             </a:pPr>
             <a:r>
-              <a:t>Nao</a:t>
+              <a:t>Não</a:t>
             </a:r>
           </a:p>
         </p:txBody>
@@ -7875,7 +7875,7 @@
               </a:defRPr>
             </a:pPr>
             <a:r>
-              <a:t>Nao</a:t>
+              <a:t>Não</a:t>
             </a:r>
           </a:p>
         </p:txBody>
@@ -7953,7 +7953,7 @@
               </a:defRPr>
             </a:pPr>
             <a:r>
-              <a:t>Pratica de conversacao</a:t>
+              <a:t>Prática de conversação</a:t>
             </a:r>
           </a:p>
         </p:txBody>
@@ -8023,7 +8023,7 @@
               </a:defRPr>
             </a:pPr>
             <a:r>
-              <a:t>Nao</a:t>
+              <a:t>Não</a:t>
             </a:r>
           </a:p>
         </p:txBody>
@@ -8058,7 +8058,7 @@
               </a:defRPr>
             </a:pPr>
             <a:r>
-              <a:t>Nao</a:t>
+              <a:t>Não</a:t>
             </a:r>
           </a:p>
         </p:txBody>
@@ -8505,7 +8505,7 @@
               </a:defRPr>
             </a:pPr>
             <a:r>
-              <a:t>Que precisam escrever em alemao no trabalho</a:t>
+              <a:t>Que precisam escrever em alemão no trabalho</a:t>
             </a:r>
           </a:p>
         </p:txBody>
@@ -8663,7 +8663,7 @@
               </a:defRPr>
             </a:pPr>
             <a:r>
-              <a:t>Que querem otimizar correcoes de alunos</a:t>
+              <a:t>Que querem otimizar correções de alunos</a:t>
             </a:r>
           </a:p>
         </p:txBody>
@@ -8821,7 +8821,7 @@
               </a:defRPr>
             </a:pPr>
             <a:r>
-              <a:t>De qualquer nivel, do iniciante ao avancado</a:t>
+              <a:t>De qualquer nível, do iniciante ao avançado</a:t>
             </a:r>
           </a:p>
         </p:txBody>
@@ -9019,7 +9019,7 @@
               </a:defRPr>
             </a:pPr>
             <a:r>
-              <a:t>Comece a dominar o alemao hoje!</a:t>
+              <a:t>Comece a dominar o alemão hoje!</a:t>
             </a:r>
           </a:p>
         </p:txBody>
@@ -9054,7 +9054,7 @@
               </a:defRPr>
             </a:pPr>
             <a:r>
-              <a:t>Experimente gratis - 100 creditos para novos usuarios</a:t>
+              <a:t>Experimente grátis - 100 créditos para novos usuários</a:t>
             </a:r>
           </a:p>
         </p:txBody>
@@ -9300,7 +9300,7 @@
               </a:defRPr>
             </a:pPr>
             <a:r>
-              <a:t>Indice</a:t>
+              <a:t>Índice</a:t>
             </a:r>
           </a:p>
         </p:txBody>
@@ -9553,7 +9553,7 @@
               </a:defRPr>
             </a:pPr>
             <a:r>
-              <a:t>Sistema de Categorizacao de Erros</a:t>
+              <a:t>Sistema de Categorização de Erros</a:t>
             </a:r>
           </a:p>
         </p:txBody>
@@ -9868,7 +9868,7 @@
               </a:defRPr>
             </a:pPr>
             <a:r>
-              <a:t>Analise de Custo</a:t>
+              <a:t>Análise de Custo</a:t>
             </a:r>
           </a:p>
         </p:txBody>
@@ -10078,7 +10078,7 @@
               </a:defRPr>
             </a:pPr>
             <a:r>
-              <a:t>Publico Alvo</a:t>
+              <a:t>Público Alvo</a:t>
             </a:r>
           </a:p>
         </p:txBody>
@@ -10244,7 +10244,7 @@
               </a:defRPr>
             </a:pPr>
             <a:r>
-              <a:t>Por que o CorrectMe e a melhor escolha para aprender alemao</a:t>
+              <a:t>Por que o CorrectMe é a melhor escolha para aprender alemão</a:t>
             </a:r>
           </a:p>
         </p:txBody>
@@ -10402,7 +10402,7 @@
               </a:defRPr>
             </a:pPr>
             <a:r>
-              <a:t>Topicos de Gramatica</a:t>
+              <a:t>Tópicos de Gramática</a:t>
             </a:r>
           </a:p>
         </p:txBody>
@@ -10437,7 +10437,7 @@
               </a:defRPr>
             </a:pPr>
             <a:r>
-              <a:t>Cobertura completa de todos os topicos gramaticais do alemao, do basico ao avancado</a:t>
+              <a:t>Cobertura completa de todos os tópicos gramaticais do alemão, do básico ao avançado</a:t>
             </a:r>
           </a:p>
         </p:txBody>
@@ -10630,7 +10630,7 @@
               </a:defRPr>
             </a:pPr>
             <a:r>
-              <a:t>Pratica com diferentes personagens e contextos do cotidiano alemao</a:t>
+              <a:t>Prática com diferentes personagens e contextos do cotidiano alemão</a:t>
             </a:r>
           </a:p>
         </p:txBody>
@@ -10823,7 +10823,7 @@
               </a:defRPr>
             </a:pPr>
             <a:r>
-              <a:t>Classificacao inteligente que ajuda a focar nos seus pontos fracos</a:t>
+              <a:t>Classificação inteligente que ajuda a focar nos seus pontos fracos</a:t>
             </a:r>
           </a:p>
         </p:txBody>
@@ -10981,7 +10981,7 @@
               </a:defRPr>
             </a:pPr>
             <a:r>
-              <a:t>Disponivel Sempre</a:t>
+              <a:t>Disponível Sempre</a:t>
             </a:r>
           </a:p>
         </p:txBody>
@@ -11016,7 +11016,7 @@
               </a:defRPr>
             </a:pPr>
             <a:r>
-              <a:t>Acesso ilimitado a plataforma, estude quando e onde quiser</a:t>
+              <a:t>Acesso ilimitado à plataforma, estude quando e onde quiser</a:t>
             </a:r>
           </a:p>
         </p:txBody>
@@ -11147,7 +11147,7 @@
               </a:defRPr>
             </a:pPr>
             <a:r>
-              <a:t>Entenda Exatamente Onde Voce Erra</a:t>
+              <a:t>Entenda Exatamente Onde Você Erra</a:t>
             </a:r>
           </a:p>
         </p:txBody>
@@ -11182,11 +11182,11 @@
               </a:defRPr>
             </a:pPr>
             <a:r>
-              <a:t>Nosso sistema exclusivo de categorizacao identifica e classifica cada erro por cor, </a:t>
+              <a:t>Nosso sistema exclusivo de categorização identifica e classifica cada erro por cor, </a:t>
             </a:r>
             <a:br/>
             <a:r>
-              <a:t>permitindo que voce foque exatamente nos pontos que precisa melhorar</a:t>
+              <a:t>permitindo que você foque exatamente nos pontos que precisa melhorar</a:t>
             </a:r>
           </a:p>
         </p:txBody>
@@ -11350,7 +11350,7 @@
               </a:defRPr>
             </a:pPr>
             <a:r>
-              <a:t>Declinacao</a:t>
+              <a:t>Declinação</a:t>
             </a:r>
           </a:p>
         </p:txBody>
@@ -11385,7 +11385,7 @@
               </a:defRPr>
             </a:pPr>
             <a:r>
-              <a:t>Genus, Numerus, Kasus - Os 3 pilares da gramatica alema</a:t>
+              <a:t>Genus, Numerus, Kasus - Os 3 pilares da gramática alemã</a:t>
             </a:r>
           </a:p>
         </p:txBody>
@@ -11584,7 +11584,7 @@
               </a:defRPr>
             </a:pPr>
             <a:r>
-              <a:t>Conjugacao</a:t>
+              <a:t>Conjugação</a:t>
             </a:r>
           </a:p>
         </p:txBody>
@@ -11818,7 +11818,7 @@
               </a:defRPr>
             </a:pPr>
             <a:r>
-              <a:t>Preposicoes</a:t>
+              <a:t>Preposições</a:t>
             </a:r>
           </a:p>
         </p:txBody>
@@ -11888,7 +11888,7 @@
               </a:defRPr>
             </a:pPr>
             <a:r>
-              <a:t>Saiba qual preposicao usar e com qual caso</a:t>
+              <a:t>Saiba qual preposição usar e com qual caso</a:t>
             </a:r>
           </a:p>
         </p:txBody>
@@ -12122,7 +12122,7 @@
               </a:defRPr>
             </a:pPr>
             <a:r>
-              <a:t>Construa frases com a ordem correta alemao</a:t>
+              <a:t>Construa frases com a ordem correta do alemão</a:t>
             </a:r>
           </a:p>
         </p:txBody>
@@ -12286,7 +12286,7 @@
               </a:defRPr>
             </a:pPr>
             <a:r>
-              <a:t>Vocabulario</a:t>
+              <a:t>Vocabulário</a:t>
             </a:r>
           </a:p>
         </p:txBody>
@@ -12321,7 +12321,7 @@
               </a:defRPr>
             </a:pPr>
             <a:r>
-              <a:t>Escolha de palavras e expressoes</a:t>
+              <a:t>Escolha de palavras e expressões</a:t>
             </a:r>
           </a:p>
         </p:txBody>
@@ -12487,7 +12487,7 @@
               </a:defRPr>
             </a:pPr>
             <a:r>
-              <a:t>CORRECAO INTELIGENTE</a:t>
+              <a:t>CORREÇÃO INTELIGENTE</a:t>
             </a:r>
           </a:p>
         </p:txBody>
@@ -12557,7 +12557,7 @@
               </a:defRPr>
             </a:pPr>
             <a:r>
-              <a:t>Nossa IA identifica erros de declinacao, conjugacao, sintaxe, preposicoes e vocabulario, destacando cada um com cores diferentes para facilitar o aprendizado.</a:t>
+              <a:t>Nossa IA identifica erros de declinação, conjugação, sintaxe, preposições e vocabulário, destacando cada um com cores diferentes para facilitar o aprendizado.</a:t>
             </a:r>
           </a:p>
         </p:txBody>
@@ -12678,7 +12678,7 @@
               </a:defRPr>
             </a:pPr>
             <a:r>
-              <a:t>Correcao gramatical e ortografica em tempo real</a:t>
+              <a:t>Correção gramatical e ortográfica em tempo real</a:t>
             </a:r>
           </a:p>
         </p:txBody>
@@ -12799,7 +12799,7 @@
               </a:defRPr>
             </a:pPr>
             <a:r>
-              <a:t>Feedback pedagogico que explica o 'porque' de cada erro</a:t>
+              <a:t>Feedback pedagógico que explica o 'porquê' de cada erro</a:t>
             </a:r>
           </a:p>
         </p:txBody>
@@ -13041,7 +13041,7 @@
               </a:defRPr>
             </a:pPr>
             <a:r>
-              <a:t>Exportacao do texto corrigido</a:t>
+              <a:t>Exportação do texto corrigido</a:t>
             </a:r>
           </a:p>
         </p:txBody>
@@ -13231,7 +13231,7 @@
               </a:defRPr>
             </a:pPr>
             <a:r>
-              <a:t>Visualize sua evolucao em tempo real</a:t>
+              <a:t>Visualize sua evolução em tempo real</a:t>
             </a:r>
           </a:p>
         </p:txBody>
@@ -13266,7 +13266,7 @@
               </a:defRPr>
             </a:pPr>
             <a:r>
-              <a:t>Dashboard completo com graficos e estatisticas detalhadas para acompanhar seu desenvolvimento no alemao.</a:t>
+              <a:t>Dashboard completo com gráficos e estatísticas detalhadas para acompanhar seu desenvolvimento no alemão.</a:t>
             </a:r>
           </a:p>
         </p:txBody>
@@ -13387,7 +13387,7 @@
               </a:defRPr>
             </a:pPr>
             <a:r>
-              <a:t>Grafico de distribuicao de erros por categoria</a:t>
+              <a:t>Gráfico de distribuição de erros por categoria</a:t>
             </a:r>
           </a:p>
         </p:txBody>
@@ -13508,7 +13508,7 @@
               </a:defRPr>
             </a:pPr>
             <a:r>
-              <a:t>Historico de erros por redacao</a:t>
+              <a:t>Histórico de erros por redação</a:t>
             </a:r>
           </a:p>
         </p:txBody>
@@ -13629,7 +13629,7 @@
               </a:defRPr>
             </a:pPr>
             <a:r>
-              <a:t>Estatisticas gerais de performance</a:t>
+              <a:t>Estatísticas gerais de performance</a:t>
             </a:r>
           </a:p>
         </p:txBody>
@@ -13750,7 +13750,7 @@
               </a:defRPr>
             </a:pPr>
             <a:r>
-              <a:t>Tracking de evolucao ao longo do tempo</a:t>
+              <a:t>Tracking de evolução ao longo do tempo</a:t>
             </a:r>
           </a:p>
         </p:txBody>
@@ -13905,7 +13905,7 @@
               </a:defRPr>
             </a:pPr>
             <a:r>
-              <a:t>PRATICA DE CONVERSACAO</a:t>
+              <a:t>PRÁTICA DE CONVERSAÇÃO</a:t>
             </a:r>
           </a:p>
         </p:txBody>
@@ -13940,7 +13940,7 @@
               </a:defRPr>
             </a:pPr>
             <a:r>
-              <a:t>Pratique alemao falado com IA</a:t>
+              <a:t>Pratique alemão falado com IA</a:t>
             </a:r>
           </a:p>
         </p:txBody>
@@ -14096,7 +14096,7 @@
               </a:defRPr>
             </a:pPr>
             <a:r>
-              <a:t>10 personagens com diferentes profissoes</a:t>
+              <a:t>10 personagens com diferentes profissões</a:t>
             </a:r>
           </a:p>
         </p:txBody>
@@ -14217,7 +14217,7 @@
               </a:defRPr>
             </a:pPr>
             <a:r>
-              <a:t>Reconhecimento de voz em alemao</a:t>
+              <a:t>Reconhecimento de voz em alemão</a:t>
             </a:r>
           </a:p>
         </p:txBody>
@@ -14338,7 +14338,7 @@
               </a:defRPr>
             </a:pPr>
             <a:r>
-              <a:t>Analise de erros apos a conversa</a:t>
+              <a:t>Análise de erros após a conversa</a:t>
             </a:r>
           </a:p>
         </p:txBody>
@@ -14459,7 +14459,7 @@
               </a:defRPr>
             </a:pPr>
             <a:r>
-              <a:t>Pratica de escuta e pronuncia</a:t>
+              <a:t>Prática de escuta e pronúncia</a:t>
             </a:r>
           </a:p>
         </p:txBody>
@@ -14614,7 +14614,7 @@
               </a:defRPr>
             </a:pPr>
             <a:r>
-              <a:t>LISTAS DE VOCABULARIO</a:t>
+              <a:t>LISTAS DE VOCABULÁRIO</a:t>
             </a:r>
           </a:p>
         </p:txBody>
@@ -14649,7 +14649,7 @@
               </a:defRPr>
             </a:pPr>
             <a:r>
-              <a:t>Organize e pratique seu vocabulario</a:t>
+              <a:t>Organize e pratique seu vocabulário</a:t>
             </a:r>
           </a:p>
         </p:txBody>
@@ -14684,7 +14684,7 @@
               </a:defRPr>
             </a:pPr>
             <a:r>
-              <a:t>Crie listas personalizadas, importe palavras via CSV e classifique por nivel de dificuldade.</a:t>
+              <a:t>Crie listas personalizadas, importe palavras via CSV e classifique por nível de dificuldade.</a:t>
             </a:r>
           </a:p>
         </p:txBody>
@@ -14805,7 +14805,7 @@
               </a:defRPr>
             </a:pPr>
             <a:r>
-              <a:t>Multiplas listas organizadas por tema</a:t>
+              <a:t>Múltiplas listas organizadas por tema</a:t>
             </a:r>
           </a:p>
         </p:txBody>
@@ -14926,7 +14926,7 @@
               </a:defRPr>
             </a:pPr>
             <a:r>
-              <a:t>Importacao de CSV</a:t>
+              <a:t>Importação de CSV</a:t>
             </a:r>
           </a:p>
         </p:txBody>
@@ -15047,7 +15047,7 @@
               </a:defRPr>
             </a:pPr>
             <a:r>
-              <a:t>Classificacao por dificuldade (vermelho/amarelo/verde)</a:t>
+              <a:t>Classificação por dificuldade (vermelho/amarelo/verde)</a:t>
             </a:r>
           </a:p>
         </p:txBody>
@@ -15168,7 +15168,7 @@
               </a:defRPr>
             </a:pPr>
             <a:r>
-              <a:t>Traducao automatica para portugues</a:t>
+              <a:t>Tradução automática para português</a:t>
             </a:r>
           </a:p>
         </p:txBody>
@@ -15393,7 +15393,7 @@
               </a:defRPr>
             </a:pPr>
             <a:r>
-              <a:t>Teste seu conhecimento com flashcards interativos e jogos como o jogo da forca alemao.</a:t>
+              <a:t>Teste seu conhecimento com flashcards interativos e jogos como o jogo da forca alemão.</a:t>
             </a:r>
           </a:p>
         </p:txBody>
@@ -15514,7 +15514,7 @@
               </a:defRPr>
             </a:pPr>
             <a:r>
-              <a:t>Flashcards automaticos a partir das redacoes</a:t>
+              <a:t>Flashcards automáticos a partir das redações</a:t>
             </a:r>
           </a:p>
         </p:txBody>
@@ -15756,7 +15756,7 @@
               </a:defRPr>
             </a:pPr>
             <a:r>
-              <a:t>Filtro por nivel de dificuldade</a:t>
+              <a:t>Filtro por nível de dificuldade</a:t>
             </a:r>
           </a:p>
         </p:txBody>
@@ -15877,7 +15877,7 @@
               </a:defRPr>
             </a:pPr>
             <a:r>
-              <a:t>Pratica de artigos (der/die/das)</a:t>
+              <a:t>Prática de artigos (der/die/das)</a:t>
             </a:r>
           </a:p>
         </p:txBody>

--- a/CorrectMe_Apresentacao.pptx
+++ b/CorrectMe_Apresentacao.pptx
@@ -20,6 +20,8 @@
     <p:sldId id="268" r:id="rId19"/>
     <p:sldId id="269" r:id="rId20"/>
     <p:sldId id="270" r:id="rId21"/>
+    <p:sldId id="271" r:id="rId22"/>
+    <p:sldId id="272" r:id="rId23"/>
   </p:sldIdLst>
   <p:sldSz cx="9144000" cy="5143500" type="screen4x3"/>
   <p:notesSz cx="6858000" cy="9144000"/>
@@ -4425,33 +4427,89 @@
           </a:p>
         </p:txBody>
       </p:sp>
-      <p:pic>
-        <p:nvPicPr>
-          <p:cNvPr id="18" name="Picture 17" descr="screenshot_paraphrase_text.png"/>
-          <p:cNvPicPr>
-            <a:picLocks noChangeAspect="1"/>
-          </p:cNvPicPr>
-          <p:nvPr/>
-        </p:nvPicPr>
-        <p:blipFill>
-          <a:blip r:embed="rId2"/>
-          <a:stretch>
-            <a:fillRect/>
-          </a:stretch>
-        </p:blipFill>
+      <p:sp>
+        <p:nvSpPr>
+          <p:cNvPr id="18" name="Rounded Rectangle 17"/>
+          <p:cNvSpPr/>
+          <p:nvPr/>
+        </p:nvSpPr>
         <p:spPr>
           <a:xfrm>
             <a:off x="4572000" y="457200"/>
-            <a:ext cx="4297680" cy="4161159"/>
-          </a:xfrm>
-          <a:prstGeom prst="rect">
-            <a:avLst/>
-          </a:prstGeom>
-        </p:spPr>
-      </p:pic>
+            <a:ext cx="4297680" cy="3931920"/>
+          </a:xfrm>
+          <a:prstGeom prst="roundRect">
+            <a:avLst/>
+          </a:prstGeom>
+          <a:solidFill>
+            <a:srgbClr val="372A5C"/>
+          </a:solidFill>
+          <a:ln w="25400">
+            <a:solidFill>
+              <a:srgbClr val="F97316"/>
+            </a:solidFill>
+          </a:ln>
+        </p:spPr>
+        <p:style>
+          <a:lnRef idx="1">
+            <a:schemeClr val="accent1"/>
+          </a:lnRef>
+          <a:fillRef idx="3">
+            <a:schemeClr val="accent1"/>
+          </a:fillRef>
+          <a:effectRef idx="2">
+            <a:schemeClr val="accent1"/>
+          </a:effectRef>
+          <a:fontRef idx="minor">
+            <a:schemeClr val="lt1"/>
+          </a:fontRef>
+        </p:style>
+        <p:txBody>
+          <a:bodyPr rtlCol="0" anchor="ctr"/>
+          <a:lstStyle/>
+          <a:p>
+            <a:pPr algn="ctr"/>
+          </a:p>
+        </p:txBody>
+      </p:sp>
       <p:sp>
         <p:nvSpPr>
           <p:cNvPr id="19" name="TextBox 18"/>
+          <p:cNvSpPr txBox="1"/>
+          <p:nvPr/>
+        </p:nvSpPr>
+        <p:spPr>
+          <a:xfrm>
+            <a:off x="5029200" y="2103120"/>
+            <a:ext cx="3383280" cy="457200"/>
+          </a:xfrm>
+          <a:prstGeom prst="rect">
+            <a:avLst/>
+          </a:prstGeom>
+          <a:noFill/>
+        </p:spPr>
+        <p:txBody>
+          <a:bodyPr wrap="none">
+            <a:spAutoFit/>
+          </a:bodyPr>
+          <a:lstStyle/>
+          <a:p>
+            <a:pPr algn="ctr">
+              <a:defRPr sz="1400">
+                <a:solidFill>
+                  <a:srgbClr val="9CA3AF"/>
+                </a:solidFill>
+              </a:defRPr>
+            </a:pPr>
+            <a:r>
+              <a:t>[parafrasear.png]</a:t>
+            </a:r>
+          </a:p>
+        </p:txBody>
+      </p:sp>
+      <p:sp>
+        <p:nvSpPr>
+          <p:cNvPr id="20" name="TextBox 19"/>
           <p:cNvSpPr txBox="1"/>
           <p:nvPr/>
         </p:nvSpPr>
@@ -4553,8 +4611,8 @@
         </p:nvSpPr>
         <p:spPr>
           <a:xfrm>
-            <a:off x="457200" y="182880"/>
-            <a:ext cx="8229600" cy="640080"/>
+            <a:off x="457200" y="228600"/>
+            <a:ext cx="3657600" cy="320040"/>
           </a:xfrm>
           <a:prstGeom prst="rect">
             <a:avLst/>
@@ -4567,70 +4625,589 @@
           </a:bodyPr>
           <a:lstStyle/>
           <a:p>
-            <a:pPr algn="ctr">
-              <a:defRPr sz="3600" b="1">
+            <a:pPr>
+              <a:defRPr sz="1100" b="1">
+                <a:solidFill>
+                  <a:srgbClr val="EC4899"/>
+                </a:solidFill>
+              </a:defRPr>
+            </a:pPr>
+            <a:r>
+              <a:t>CHATBOT DE CONVERSAÇÃO</a:t>
+            </a:r>
+          </a:p>
+        </p:txBody>
+      </p:sp>
+      <p:sp>
+        <p:nvSpPr>
+          <p:cNvPr id="4" name="TextBox 3"/>
+          <p:cNvSpPr txBox="1"/>
+          <p:nvPr/>
+        </p:nvSpPr>
+        <p:spPr>
+          <a:xfrm>
+            <a:off x="457200" y="502920"/>
+            <a:ext cx="4114800" cy="822960"/>
+          </a:xfrm>
+          <a:prstGeom prst="rect">
+            <a:avLst/>
+          </a:prstGeom>
+          <a:noFill/>
+        </p:spPr>
+        <p:txBody>
+          <a:bodyPr wrap="square">
+            <a:spAutoFit/>
+          </a:bodyPr>
+          <a:lstStyle/>
+          <a:p>
+            <a:pPr>
+              <a:defRPr sz="2600" b="1">
                 <a:solidFill>
                   <a:srgbClr val="FFFFFF"/>
                 </a:solidFill>
               </a:defRPr>
             </a:pPr>
             <a:r>
-              <a:t>Como Funciona</a:t>
-            </a:r>
-          </a:p>
-        </p:txBody>
-      </p:sp>
-      <p:sp>
-        <p:nvSpPr>
-          <p:cNvPr id="4" name="TextBox 3"/>
-          <p:cNvSpPr txBox="1"/>
-          <p:nvPr/>
-        </p:nvSpPr>
-        <p:spPr>
-          <a:xfrm>
-            <a:off x="457200" y="777240"/>
-            <a:ext cx="8229600" cy="365760"/>
-          </a:xfrm>
-          <a:prstGeom prst="rect">
-            <a:avLst/>
-          </a:prstGeom>
-          <a:noFill/>
-        </p:spPr>
-        <p:txBody>
-          <a:bodyPr wrap="none">
-            <a:spAutoFit/>
-          </a:bodyPr>
-          <a:lstStyle/>
-          <a:p>
-            <a:pPr algn="ctr">
-              <a:defRPr sz="1600">
-                <a:solidFill>
-                  <a:srgbClr val="A855F7"/>
-                </a:solidFill>
-              </a:defRPr>
-            </a:pPr>
-            <a:r>
-              <a:t>Comece a aprender em 3 passos simples</a:t>
-            </a:r>
-          </a:p>
-        </p:txBody>
-      </p:sp>
-      <p:sp>
-        <p:nvSpPr>
-          <p:cNvPr id="5" name="Rounded Rectangle 4"/>
+              <a:t>Pratique escrita com correção em tempo real</a:t>
+            </a:r>
+          </a:p>
+        </p:txBody>
+      </p:sp>
+      <p:sp>
+        <p:nvSpPr>
+          <p:cNvPr id="5" name="TextBox 4"/>
+          <p:cNvSpPr txBox="1"/>
+          <p:nvPr/>
+        </p:nvSpPr>
+        <p:spPr>
+          <a:xfrm>
+            <a:off x="457200" y="1325880"/>
+            <a:ext cx="3931920" cy="822960"/>
+          </a:xfrm>
+          <a:prstGeom prst="rect">
+            <a:avLst/>
+          </a:prstGeom>
+          <a:noFill/>
+        </p:spPr>
+        <p:txBody>
+          <a:bodyPr wrap="square">
+            <a:spAutoFit/>
+          </a:bodyPr>
+          <a:lstStyle/>
+          <a:p>
+            <a:pPr>
+              <a:defRPr sz="1200">
+                <a:solidFill>
+                  <a:srgbClr val="9CA3AF"/>
+                </a:solidFill>
+              </a:defRPr>
+            </a:pPr>
+            <a:r>
+              <a:t>Converse por escrito com o chatbot e receba correções instantâneas de cada frase que você escreve.</a:t>
+            </a:r>
+          </a:p>
+        </p:txBody>
+      </p:sp>
+      <p:sp>
+        <p:nvSpPr>
+          <p:cNvPr id="6" name="Rounded Rectangle 5"/>
           <p:cNvSpPr/>
           <p:nvPr/>
         </p:nvSpPr>
         <p:spPr>
           <a:xfrm>
-            <a:off x="502920" y="1463040"/>
-            <a:ext cx="2651760" cy="2926080"/>
+            <a:off x="457200" y="2194560"/>
+            <a:ext cx="3931920" cy="548640"/>
           </a:xfrm>
           <a:prstGeom prst="roundRect">
             <a:avLst/>
           </a:prstGeom>
           <a:solidFill>
             <a:srgbClr val="251C45"/>
+          </a:solidFill>
+          <a:ln>
+            <a:noFill/>
+          </a:ln>
+        </p:spPr>
+        <p:style>
+          <a:lnRef idx="1">
+            <a:schemeClr val="accent1"/>
+          </a:lnRef>
+          <a:fillRef idx="3">
+            <a:schemeClr val="accent1"/>
+          </a:fillRef>
+          <a:effectRef idx="2">
+            <a:schemeClr val="accent1"/>
+          </a:effectRef>
+          <a:fontRef idx="minor">
+            <a:schemeClr val="lt1"/>
+          </a:fontRef>
+        </p:style>
+        <p:txBody>
+          <a:bodyPr rtlCol="0" anchor="ctr"/>
+          <a:lstStyle/>
+          <a:p>
+            <a:pPr algn="ctr"/>
+          </a:p>
+        </p:txBody>
+      </p:sp>
+      <p:sp>
+        <p:nvSpPr>
+          <p:cNvPr id="7" name="Oval 6"/>
+          <p:cNvSpPr/>
+          <p:nvPr/>
+        </p:nvSpPr>
+        <p:spPr>
+          <a:xfrm>
+            <a:off x="640080" y="2377440"/>
+            <a:ext cx="182880" cy="182880"/>
+          </a:xfrm>
+          <a:prstGeom prst="ellipse">
+            <a:avLst/>
+          </a:prstGeom>
+          <a:solidFill>
+            <a:srgbClr val="EC4899"/>
+          </a:solidFill>
+          <a:ln>
+            <a:noFill/>
+          </a:ln>
+        </p:spPr>
+        <p:style>
+          <a:lnRef idx="1">
+            <a:schemeClr val="accent1"/>
+          </a:lnRef>
+          <a:fillRef idx="3">
+            <a:schemeClr val="accent1"/>
+          </a:fillRef>
+          <a:effectRef idx="2">
+            <a:schemeClr val="accent1"/>
+          </a:effectRef>
+          <a:fontRef idx="minor">
+            <a:schemeClr val="lt1"/>
+          </a:fontRef>
+        </p:style>
+        <p:txBody>
+          <a:bodyPr rtlCol="0" anchor="ctr"/>
+          <a:lstStyle/>
+          <a:p>
+            <a:pPr algn="ctr"/>
+          </a:p>
+        </p:txBody>
+      </p:sp>
+      <p:sp>
+        <p:nvSpPr>
+          <p:cNvPr id="8" name="TextBox 7"/>
+          <p:cNvSpPr txBox="1"/>
+          <p:nvPr/>
+        </p:nvSpPr>
+        <p:spPr>
+          <a:xfrm>
+            <a:off x="960120" y="2304288"/>
+            <a:ext cx="3200400" cy="365760"/>
+          </a:xfrm>
+          <a:prstGeom prst="rect">
+            <a:avLst/>
+          </a:prstGeom>
+          <a:noFill/>
+        </p:spPr>
+        <p:txBody>
+          <a:bodyPr wrap="square">
+            <a:spAutoFit/>
+          </a:bodyPr>
+          <a:lstStyle/>
+          <a:p>
+            <a:pPr>
+              <a:defRPr sz="1100">
+                <a:solidFill>
+                  <a:srgbClr val="FFFFFF"/>
+                </a:solidFill>
+              </a:defRPr>
+            </a:pPr>
+            <a:r>
+              <a:t>Correção imediata de cada frase</a:t>
+            </a:r>
+          </a:p>
+        </p:txBody>
+      </p:sp>
+      <p:sp>
+        <p:nvSpPr>
+          <p:cNvPr id="9" name="Rounded Rectangle 8"/>
+          <p:cNvSpPr/>
+          <p:nvPr/>
+        </p:nvSpPr>
+        <p:spPr>
+          <a:xfrm>
+            <a:off x="457200" y="2834640"/>
+            <a:ext cx="3931920" cy="548640"/>
+          </a:xfrm>
+          <a:prstGeom prst="roundRect">
+            <a:avLst/>
+          </a:prstGeom>
+          <a:solidFill>
+            <a:srgbClr val="251C45"/>
+          </a:solidFill>
+          <a:ln>
+            <a:noFill/>
+          </a:ln>
+        </p:spPr>
+        <p:style>
+          <a:lnRef idx="1">
+            <a:schemeClr val="accent1"/>
+          </a:lnRef>
+          <a:fillRef idx="3">
+            <a:schemeClr val="accent1"/>
+          </a:fillRef>
+          <a:effectRef idx="2">
+            <a:schemeClr val="accent1"/>
+          </a:effectRef>
+          <a:fontRef idx="minor">
+            <a:schemeClr val="lt1"/>
+          </a:fontRef>
+        </p:style>
+        <p:txBody>
+          <a:bodyPr rtlCol="0" anchor="ctr"/>
+          <a:lstStyle/>
+          <a:p>
+            <a:pPr algn="ctr"/>
+          </a:p>
+        </p:txBody>
+      </p:sp>
+      <p:sp>
+        <p:nvSpPr>
+          <p:cNvPr id="10" name="Oval 9"/>
+          <p:cNvSpPr/>
+          <p:nvPr/>
+        </p:nvSpPr>
+        <p:spPr>
+          <a:xfrm>
+            <a:off x="640080" y="3017520"/>
+            <a:ext cx="182880" cy="182880"/>
+          </a:xfrm>
+          <a:prstGeom prst="ellipse">
+            <a:avLst/>
+          </a:prstGeom>
+          <a:solidFill>
+            <a:srgbClr val="EC4899"/>
+          </a:solidFill>
+          <a:ln>
+            <a:noFill/>
+          </a:ln>
+        </p:spPr>
+        <p:style>
+          <a:lnRef idx="1">
+            <a:schemeClr val="accent1"/>
+          </a:lnRef>
+          <a:fillRef idx="3">
+            <a:schemeClr val="accent1"/>
+          </a:fillRef>
+          <a:effectRef idx="2">
+            <a:schemeClr val="accent1"/>
+          </a:effectRef>
+          <a:fontRef idx="minor">
+            <a:schemeClr val="lt1"/>
+          </a:fontRef>
+        </p:style>
+        <p:txBody>
+          <a:bodyPr rtlCol="0" anchor="ctr"/>
+          <a:lstStyle/>
+          <a:p>
+            <a:pPr algn="ctr"/>
+          </a:p>
+        </p:txBody>
+      </p:sp>
+      <p:sp>
+        <p:nvSpPr>
+          <p:cNvPr id="11" name="TextBox 10"/>
+          <p:cNvSpPr txBox="1"/>
+          <p:nvPr/>
+        </p:nvSpPr>
+        <p:spPr>
+          <a:xfrm>
+            <a:off x="960120" y="2944368"/>
+            <a:ext cx="3200400" cy="365760"/>
+          </a:xfrm>
+          <a:prstGeom prst="rect">
+            <a:avLst/>
+          </a:prstGeom>
+          <a:noFill/>
+        </p:spPr>
+        <p:txBody>
+          <a:bodyPr wrap="square">
+            <a:spAutoFit/>
+          </a:bodyPr>
+          <a:lstStyle/>
+          <a:p>
+            <a:pPr>
+              <a:defRPr sz="1100">
+                <a:solidFill>
+                  <a:srgbClr val="FFFFFF"/>
+                </a:solidFill>
+              </a:defRPr>
+            </a:pPr>
+            <a:r>
+              <a:t>Feedback detalhado sobre erros</a:t>
+            </a:r>
+          </a:p>
+        </p:txBody>
+      </p:sp>
+      <p:sp>
+        <p:nvSpPr>
+          <p:cNvPr id="12" name="Rounded Rectangle 11"/>
+          <p:cNvSpPr/>
+          <p:nvPr/>
+        </p:nvSpPr>
+        <p:spPr>
+          <a:xfrm>
+            <a:off x="457200" y="3474720"/>
+            <a:ext cx="3931920" cy="548640"/>
+          </a:xfrm>
+          <a:prstGeom prst="roundRect">
+            <a:avLst/>
+          </a:prstGeom>
+          <a:solidFill>
+            <a:srgbClr val="251C45"/>
+          </a:solidFill>
+          <a:ln>
+            <a:noFill/>
+          </a:ln>
+        </p:spPr>
+        <p:style>
+          <a:lnRef idx="1">
+            <a:schemeClr val="accent1"/>
+          </a:lnRef>
+          <a:fillRef idx="3">
+            <a:schemeClr val="accent1"/>
+          </a:fillRef>
+          <a:effectRef idx="2">
+            <a:schemeClr val="accent1"/>
+          </a:effectRef>
+          <a:fontRef idx="minor">
+            <a:schemeClr val="lt1"/>
+          </a:fontRef>
+        </p:style>
+        <p:txBody>
+          <a:bodyPr rtlCol="0" anchor="ctr"/>
+          <a:lstStyle/>
+          <a:p>
+            <a:pPr algn="ctr"/>
+          </a:p>
+        </p:txBody>
+      </p:sp>
+      <p:sp>
+        <p:nvSpPr>
+          <p:cNvPr id="13" name="Oval 12"/>
+          <p:cNvSpPr/>
+          <p:nvPr/>
+        </p:nvSpPr>
+        <p:spPr>
+          <a:xfrm>
+            <a:off x="640080" y="3657600"/>
+            <a:ext cx="182880" cy="182880"/>
+          </a:xfrm>
+          <a:prstGeom prst="ellipse">
+            <a:avLst/>
+          </a:prstGeom>
+          <a:solidFill>
+            <a:srgbClr val="EC4899"/>
+          </a:solidFill>
+          <a:ln>
+            <a:noFill/>
+          </a:ln>
+        </p:spPr>
+        <p:style>
+          <a:lnRef idx="1">
+            <a:schemeClr val="accent1"/>
+          </a:lnRef>
+          <a:fillRef idx="3">
+            <a:schemeClr val="accent1"/>
+          </a:fillRef>
+          <a:effectRef idx="2">
+            <a:schemeClr val="accent1"/>
+          </a:effectRef>
+          <a:fontRef idx="minor">
+            <a:schemeClr val="lt1"/>
+          </a:fontRef>
+        </p:style>
+        <p:txBody>
+          <a:bodyPr rtlCol="0" anchor="ctr"/>
+          <a:lstStyle/>
+          <a:p>
+            <a:pPr algn="ctr"/>
+          </a:p>
+        </p:txBody>
+      </p:sp>
+      <p:sp>
+        <p:nvSpPr>
+          <p:cNvPr id="14" name="TextBox 13"/>
+          <p:cNvSpPr txBox="1"/>
+          <p:nvPr/>
+        </p:nvSpPr>
+        <p:spPr>
+          <a:xfrm>
+            <a:off x="960120" y="3584448"/>
+            <a:ext cx="3200400" cy="365760"/>
+          </a:xfrm>
+          <a:prstGeom prst="rect">
+            <a:avLst/>
+          </a:prstGeom>
+          <a:noFill/>
+        </p:spPr>
+        <p:txBody>
+          <a:bodyPr wrap="square">
+            <a:spAutoFit/>
+          </a:bodyPr>
+          <a:lstStyle/>
+          <a:p>
+            <a:pPr>
+              <a:defRPr sz="1100">
+                <a:solidFill>
+                  <a:srgbClr val="FFFFFF"/>
+                </a:solidFill>
+              </a:defRPr>
+            </a:pPr>
+            <a:r>
+              <a:t>Prática de escrita contextualizada</a:t>
+            </a:r>
+          </a:p>
+        </p:txBody>
+      </p:sp>
+      <p:sp>
+        <p:nvSpPr>
+          <p:cNvPr id="15" name="Rounded Rectangle 14"/>
+          <p:cNvSpPr/>
+          <p:nvPr/>
+        </p:nvSpPr>
+        <p:spPr>
+          <a:xfrm>
+            <a:off x="457200" y="4114800"/>
+            <a:ext cx="3931920" cy="548640"/>
+          </a:xfrm>
+          <a:prstGeom prst="roundRect">
+            <a:avLst/>
+          </a:prstGeom>
+          <a:solidFill>
+            <a:srgbClr val="251C45"/>
+          </a:solidFill>
+          <a:ln>
+            <a:noFill/>
+          </a:ln>
+        </p:spPr>
+        <p:style>
+          <a:lnRef idx="1">
+            <a:schemeClr val="accent1"/>
+          </a:lnRef>
+          <a:fillRef idx="3">
+            <a:schemeClr val="accent1"/>
+          </a:fillRef>
+          <a:effectRef idx="2">
+            <a:schemeClr val="accent1"/>
+          </a:effectRef>
+          <a:fontRef idx="minor">
+            <a:schemeClr val="lt1"/>
+          </a:fontRef>
+        </p:style>
+        <p:txBody>
+          <a:bodyPr rtlCol="0" anchor="ctr"/>
+          <a:lstStyle/>
+          <a:p>
+            <a:pPr algn="ctr"/>
+          </a:p>
+        </p:txBody>
+      </p:sp>
+      <p:sp>
+        <p:nvSpPr>
+          <p:cNvPr id="16" name="Oval 15"/>
+          <p:cNvSpPr/>
+          <p:nvPr/>
+        </p:nvSpPr>
+        <p:spPr>
+          <a:xfrm>
+            <a:off x="640080" y="4297680"/>
+            <a:ext cx="182880" cy="182880"/>
+          </a:xfrm>
+          <a:prstGeom prst="ellipse">
+            <a:avLst/>
+          </a:prstGeom>
+          <a:solidFill>
+            <a:srgbClr val="EC4899"/>
+          </a:solidFill>
+          <a:ln>
+            <a:noFill/>
+          </a:ln>
+        </p:spPr>
+        <p:style>
+          <a:lnRef idx="1">
+            <a:schemeClr val="accent1"/>
+          </a:lnRef>
+          <a:fillRef idx="3">
+            <a:schemeClr val="accent1"/>
+          </a:fillRef>
+          <a:effectRef idx="2">
+            <a:schemeClr val="accent1"/>
+          </a:effectRef>
+          <a:fontRef idx="minor">
+            <a:schemeClr val="lt1"/>
+          </a:fontRef>
+        </p:style>
+        <p:txBody>
+          <a:bodyPr rtlCol="0" anchor="ctr"/>
+          <a:lstStyle/>
+          <a:p>
+            <a:pPr algn="ctr"/>
+          </a:p>
+        </p:txBody>
+      </p:sp>
+      <p:sp>
+        <p:nvSpPr>
+          <p:cNvPr id="17" name="TextBox 16"/>
+          <p:cNvSpPr txBox="1"/>
+          <p:nvPr/>
+        </p:nvSpPr>
+        <p:spPr>
+          <a:xfrm>
+            <a:off x="960120" y="4224528"/>
+            <a:ext cx="3200400" cy="365760"/>
+          </a:xfrm>
+          <a:prstGeom prst="rect">
+            <a:avLst/>
+          </a:prstGeom>
+          <a:noFill/>
+        </p:spPr>
+        <p:txBody>
+          <a:bodyPr wrap="square">
+            <a:spAutoFit/>
+          </a:bodyPr>
+          <a:lstStyle/>
+          <a:p>
+            <a:pPr>
+              <a:defRPr sz="1100">
+                <a:solidFill>
+                  <a:srgbClr val="FFFFFF"/>
+                </a:solidFill>
+              </a:defRPr>
+            </a:pPr>
+            <a:r>
+              <a:t>Apenas 2,5 créditos por frase</a:t>
+            </a:r>
+          </a:p>
+        </p:txBody>
+      </p:sp>
+      <p:sp>
+        <p:nvSpPr>
+          <p:cNvPr id="18" name="Rounded Rectangle 17"/>
+          <p:cNvSpPr/>
+          <p:nvPr/>
+        </p:nvSpPr>
+        <p:spPr>
+          <a:xfrm>
+            <a:off x="4572000" y="457200"/>
+            <a:ext cx="4297680" cy="3931920"/>
+          </a:xfrm>
+          <a:prstGeom prst="roundRect">
+            <a:avLst/>
+          </a:prstGeom>
+          <a:solidFill>
+            <a:srgbClr val="372A5C"/>
           </a:solidFill>
           <a:ln w="25400">
             <a:solidFill>
@@ -4662,57 +5239,14 @@
       </p:sp>
       <p:sp>
         <p:nvSpPr>
-          <p:cNvPr id="6" name="Oval 5"/>
-          <p:cNvSpPr/>
-          <p:nvPr/>
-        </p:nvSpPr>
-        <p:spPr>
-          <a:xfrm>
-            <a:off x="1417320" y="1737360"/>
-            <a:ext cx="822960" cy="822960"/>
-          </a:xfrm>
-          <a:prstGeom prst="ellipse">
-            <a:avLst/>
-          </a:prstGeom>
-          <a:solidFill>
-            <a:srgbClr val="EC4899"/>
-          </a:solidFill>
-          <a:ln>
-            <a:noFill/>
-          </a:ln>
-        </p:spPr>
-        <p:style>
-          <a:lnRef idx="1">
-            <a:schemeClr val="accent1"/>
-          </a:lnRef>
-          <a:fillRef idx="3">
-            <a:schemeClr val="accent1"/>
-          </a:fillRef>
-          <a:effectRef idx="2">
-            <a:schemeClr val="accent1"/>
-          </a:effectRef>
-          <a:fontRef idx="minor">
-            <a:schemeClr val="lt1"/>
-          </a:fontRef>
-        </p:style>
-        <p:txBody>
-          <a:bodyPr rtlCol="0" anchor="ctr"/>
-          <a:lstStyle/>
-          <a:p>
-            <a:pPr algn="ctr"/>
-          </a:p>
-        </p:txBody>
-      </p:sp>
-      <p:sp>
-        <p:nvSpPr>
-          <p:cNvPr id="7" name="TextBox 6"/>
-          <p:cNvSpPr txBox="1"/>
-          <p:nvPr/>
-        </p:nvSpPr>
-        <p:spPr>
-          <a:xfrm>
-            <a:off x="1417320" y="1828800"/>
-            <a:ext cx="822960" cy="640080"/>
+          <p:cNvPr id="19" name="TextBox 18"/>
+          <p:cNvSpPr txBox="1"/>
+          <p:nvPr/>
+        </p:nvSpPr>
+        <p:spPr>
+          <a:xfrm>
+            <a:off x="5029200" y="2103120"/>
+            <a:ext cx="3383280" cy="457200"/>
           </a:xfrm>
           <a:prstGeom prst="rect">
             <a:avLst/>
@@ -4726,470 +5260,14 @@
           <a:lstStyle/>
           <a:p>
             <a:pPr algn="ctr">
-              <a:defRPr sz="3600" b="1">
-                <a:solidFill>
-                  <a:srgbClr val="FFFFFF"/>
-                </a:solidFill>
-              </a:defRPr>
-            </a:pPr>
-            <a:r>
-              <a:t>1</a:t>
-            </a:r>
-          </a:p>
-        </p:txBody>
-      </p:sp>
-      <p:sp>
-        <p:nvSpPr>
-          <p:cNvPr id="8" name="TextBox 7"/>
-          <p:cNvSpPr txBox="1"/>
-          <p:nvPr/>
-        </p:nvSpPr>
-        <p:spPr>
-          <a:xfrm>
-            <a:off x="640080" y="2697480"/>
-            <a:ext cx="2377440" cy="457200"/>
-          </a:xfrm>
-          <a:prstGeom prst="rect">
-            <a:avLst/>
-          </a:prstGeom>
-          <a:noFill/>
-        </p:spPr>
-        <p:txBody>
-          <a:bodyPr wrap="square">
-            <a:spAutoFit/>
-          </a:bodyPr>
-          <a:lstStyle/>
-          <a:p>
-            <a:pPr algn="ctr">
-              <a:defRPr sz="1800" b="1">
-                <a:solidFill>
-                  <a:srgbClr val="FFFFFF"/>
-                </a:solidFill>
-              </a:defRPr>
-            </a:pPr>
-            <a:r>
-              <a:t>Escreva seu texto</a:t>
-            </a:r>
-          </a:p>
-        </p:txBody>
-      </p:sp>
-      <p:sp>
-        <p:nvSpPr>
-          <p:cNvPr id="9" name="TextBox 8"/>
-          <p:cNvSpPr txBox="1"/>
-          <p:nvPr/>
-        </p:nvSpPr>
-        <p:spPr>
-          <a:xfrm>
-            <a:off x="640080" y="3200400"/>
-            <a:ext cx="2377440" cy="1097280"/>
-          </a:xfrm>
-          <a:prstGeom prst="rect">
-            <a:avLst/>
-          </a:prstGeom>
-          <a:noFill/>
-        </p:spPr>
-        <p:txBody>
-          <a:bodyPr wrap="square">
-            <a:spAutoFit/>
-          </a:bodyPr>
-          <a:lstStyle/>
-          <a:p>
-            <a:pPr algn="ctr">
-              <a:defRPr sz="1200">
+              <a:defRPr sz="1400">
                 <a:solidFill>
                   <a:srgbClr val="9CA3AF"/>
                 </a:solidFill>
               </a:defRPr>
             </a:pPr>
             <a:r>
-              <a:t>Cole ou digite sua redação em alemão. Nosso editor inteligente aceita qualquer texto.</a:t>
-            </a:r>
-          </a:p>
-        </p:txBody>
-      </p:sp>
-      <p:sp>
-        <p:nvSpPr>
-          <p:cNvPr id="10" name="Rounded Rectangle 9"/>
-          <p:cNvSpPr/>
-          <p:nvPr/>
-        </p:nvSpPr>
-        <p:spPr>
-          <a:xfrm>
-            <a:off x="3383280" y="1463040"/>
-            <a:ext cx="2651760" cy="2926080"/>
-          </a:xfrm>
-          <a:prstGeom prst="roundRect">
-            <a:avLst/>
-          </a:prstGeom>
-          <a:solidFill>
-            <a:srgbClr val="251C45"/>
-          </a:solidFill>
-          <a:ln w="25400">
-            <a:solidFill>
-              <a:srgbClr val="A855F7"/>
-            </a:solidFill>
-          </a:ln>
-        </p:spPr>
-        <p:style>
-          <a:lnRef idx="1">
-            <a:schemeClr val="accent1"/>
-          </a:lnRef>
-          <a:fillRef idx="3">
-            <a:schemeClr val="accent1"/>
-          </a:fillRef>
-          <a:effectRef idx="2">
-            <a:schemeClr val="accent1"/>
-          </a:effectRef>
-          <a:fontRef idx="minor">
-            <a:schemeClr val="lt1"/>
-          </a:fontRef>
-        </p:style>
-        <p:txBody>
-          <a:bodyPr rtlCol="0" anchor="ctr"/>
-          <a:lstStyle/>
-          <a:p>
-            <a:pPr algn="ctr"/>
-          </a:p>
-        </p:txBody>
-      </p:sp>
-      <p:sp>
-        <p:nvSpPr>
-          <p:cNvPr id="11" name="Oval 10"/>
-          <p:cNvSpPr/>
-          <p:nvPr/>
-        </p:nvSpPr>
-        <p:spPr>
-          <a:xfrm>
-            <a:off x="4297680" y="1737360"/>
-            <a:ext cx="822960" cy="822960"/>
-          </a:xfrm>
-          <a:prstGeom prst="ellipse">
-            <a:avLst/>
-          </a:prstGeom>
-          <a:solidFill>
-            <a:srgbClr val="A855F7"/>
-          </a:solidFill>
-          <a:ln>
-            <a:noFill/>
-          </a:ln>
-        </p:spPr>
-        <p:style>
-          <a:lnRef idx="1">
-            <a:schemeClr val="accent1"/>
-          </a:lnRef>
-          <a:fillRef idx="3">
-            <a:schemeClr val="accent1"/>
-          </a:fillRef>
-          <a:effectRef idx="2">
-            <a:schemeClr val="accent1"/>
-          </a:effectRef>
-          <a:fontRef idx="minor">
-            <a:schemeClr val="lt1"/>
-          </a:fontRef>
-        </p:style>
-        <p:txBody>
-          <a:bodyPr rtlCol="0" anchor="ctr"/>
-          <a:lstStyle/>
-          <a:p>
-            <a:pPr algn="ctr"/>
-          </a:p>
-        </p:txBody>
-      </p:sp>
-      <p:sp>
-        <p:nvSpPr>
-          <p:cNvPr id="12" name="TextBox 11"/>
-          <p:cNvSpPr txBox="1"/>
-          <p:nvPr/>
-        </p:nvSpPr>
-        <p:spPr>
-          <a:xfrm>
-            <a:off x="4297680" y="1828800"/>
-            <a:ext cx="822960" cy="640080"/>
-          </a:xfrm>
-          <a:prstGeom prst="rect">
-            <a:avLst/>
-          </a:prstGeom>
-          <a:noFill/>
-        </p:spPr>
-        <p:txBody>
-          <a:bodyPr wrap="none">
-            <a:spAutoFit/>
-          </a:bodyPr>
-          <a:lstStyle/>
-          <a:p>
-            <a:pPr algn="ctr">
-              <a:defRPr sz="3600" b="1">
-                <a:solidFill>
-                  <a:srgbClr val="FFFFFF"/>
-                </a:solidFill>
-              </a:defRPr>
-            </a:pPr>
-            <a:r>
-              <a:t>2</a:t>
-            </a:r>
-          </a:p>
-        </p:txBody>
-      </p:sp>
-      <p:sp>
-        <p:nvSpPr>
-          <p:cNvPr id="13" name="TextBox 12"/>
-          <p:cNvSpPr txBox="1"/>
-          <p:nvPr/>
-        </p:nvSpPr>
-        <p:spPr>
-          <a:xfrm>
-            <a:off x="3520440" y="2697480"/>
-            <a:ext cx="2377440" cy="457200"/>
-          </a:xfrm>
-          <a:prstGeom prst="rect">
-            <a:avLst/>
-          </a:prstGeom>
-          <a:noFill/>
-        </p:spPr>
-        <p:txBody>
-          <a:bodyPr wrap="square">
-            <a:spAutoFit/>
-          </a:bodyPr>
-          <a:lstStyle/>
-          <a:p>
-            <a:pPr algn="ctr">
-              <a:defRPr sz="1800" b="1">
-                <a:solidFill>
-                  <a:srgbClr val="FFFFFF"/>
-                </a:solidFill>
-              </a:defRPr>
-            </a:pPr>
-            <a:r>
-              <a:t>Receba a análise</a:t>
-            </a:r>
-          </a:p>
-        </p:txBody>
-      </p:sp>
-      <p:sp>
-        <p:nvSpPr>
-          <p:cNvPr id="14" name="TextBox 13"/>
-          <p:cNvSpPr txBox="1"/>
-          <p:nvPr/>
-        </p:nvSpPr>
-        <p:spPr>
-          <a:xfrm>
-            <a:off x="3520440" y="3200400"/>
-            <a:ext cx="2377440" cy="1097280"/>
-          </a:xfrm>
-          <a:prstGeom prst="rect">
-            <a:avLst/>
-          </a:prstGeom>
-          <a:noFill/>
-        </p:spPr>
-        <p:txBody>
-          <a:bodyPr wrap="square">
-            <a:spAutoFit/>
-          </a:bodyPr>
-          <a:lstStyle/>
-          <a:p>
-            <a:pPr algn="ctr">
-              <a:defRPr sz="1200">
-                <a:solidFill>
-                  <a:srgbClr val="9CA3AF"/>
-                </a:solidFill>
-              </a:defRPr>
-            </a:pPr>
-            <a:r>
-              <a:t>Nossa IA identifica erros, categoriza por tipo e explica cada correção em português.</a:t>
-            </a:r>
-          </a:p>
-        </p:txBody>
-      </p:sp>
-      <p:sp>
-        <p:nvSpPr>
-          <p:cNvPr id="15" name="Rounded Rectangle 14"/>
-          <p:cNvSpPr/>
-          <p:nvPr/>
-        </p:nvSpPr>
-        <p:spPr>
-          <a:xfrm>
-            <a:off x="6263640" y="1463040"/>
-            <a:ext cx="2651760" cy="2926080"/>
-          </a:xfrm>
-          <a:prstGeom prst="roundRect">
-            <a:avLst/>
-          </a:prstGeom>
-          <a:solidFill>
-            <a:srgbClr val="251C45"/>
-          </a:solidFill>
-          <a:ln w="25400">
-            <a:solidFill>
-              <a:srgbClr val="22C55E"/>
-            </a:solidFill>
-          </a:ln>
-        </p:spPr>
-        <p:style>
-          <a:lnRef idx="1">
-            <a:schemeClr val="accent1"/>
-          </a:lnRef>
-          <a:fillRef idx="3">
-            <a:schemeClr val="accent1"/>
-          </a:fillRef>
-          <a:effectRef idx="2">
-            <a:schemeClr val="accent1"/>
-          </a:effectRef>
-          <a:fontRef idx="minor">
-            <a:schemeClr val="lt1"/>
-          </a:fontRef>
-        </p:style>
-        <p:txBody>
-          <a:bodyPr rtlCol="0" anchor="ctr"/>
-          <a:lstStyle/>
-          <a:p>
-            <a:pPr algn="ctr"/>
-          </a:p>
-        </p:txBody>
-      </p:sp>
-      <p:sp>
-        <p:nvSpPr>
-          <p:cNvPr id="16" name="Oval 15"/>
-          <p:cNvSpPr/>
-          <p:nvPr/>
-        </p:nvSpPr>
-        <p:spPr>
-          <a:xfrm>
-            <a:off x="7178040" y="1737360"/>
-            <a:ext cx="822960" cy="822960"/>
-          </a:xfrm>
-          <a:prstGeom prst="ellipse">
-            <a:avLst/>
-          </a:prstGeom>
-          <a:solidFill>
-            <a:srgbClr val="22C55E"/>
-          </a:solidFill>
-          <a:ln>
-            <a:noFill/>
-          </a:ln>
-        </p:spPr>
-        <p:style>
-          <a:lnRef idx="1">
-            <a:schemeClr val="accent1"/>
-          </a:lnRef>
-          <a:fillRef idx="3">
-            <a:schemeClr val="accent1"/>
-          </a:fillRef>
-          <a:effectRef idx="2">
-            <a:schemeClr val="accent1"/>
-          </a:effectRef>
-          <a:fontRef idx="minor">
-            <a:schemeClr val="lt1"/>
-          </a:fontRef>
-        </p:style>
-        <p:txBody>
-          <a:bodyPr rtlCol="0" anchor="ctr"/>
-          <a:lstStyle/>
-          <a:p>
-            <a:pPr algn="ctr"/>
-          </a:p>
-        </p:txBody>
-      </p:sp>
-      <p:sp>
-        <p:nvSpPr>
-          <p:cNvPr id="17" name="TextBox 16"/>
-          <p:cNvSpPr txBox="1"/>
-          <p:nvPr/>
-        </p:nvSpPr>
-        <p:spPr>
-          <a:xfrm>
-            <a:off x="7178040" y="1828800"/>
-            <a:ext cx="822960" cy="640080"/>
-          </a:xfrm>
-          <a:prstGeom prst="rect">
-            <a:avLst/>
-          </a:prstGeom>
-          <a:noFill/>
-        </p:spPr>
-        <p:txBody>
-          <a:bodyPr wrap="none">
-            <a:spAutoFit/>
-          </a:bodyPr>
-          <a:lstStyle/>
-          <a:p>
-            <a:pPr algn="ctr">
-              <a:defRPr sz="3600" b="1">
-                <a:solidFill>
-                  <a:srgbClr val="FFFFFF"/>
-                </a:solidFill>
-              </a:defRPr>
-            </a:pPr>
-            <a:r>
-              <a:t>3</a:t>
-            </a:r>
-          </a:p>
-        </p:txBody>
-      </p:sp>
-      <p:sp>
-        <p:nvSpPr>
-          <p:cNvPr id="18" name="TextBox 17"/>
-          <p:cNvSpPr txBox="1"/>
-          <p:nvPr/>
-        </p:nvSpPr>
-        <p:spPr>
-          <a:xfrm>
-            <a:off x="6400800" y="2697480"/>
-            <a:ext cx="2377440" cy="457200"/>
-          </a:xfrm>
-          <a:prstGeom prst="rect">
-            <a:avLst/>
-          </a:prstGeom>
-          <a:noFill/>
-        </p:spPr>
-        <p:txBody>
-          <a:bodyPr wrap="square">
-            <a:spAutoFit/>
-          </a:bodyPr>
-          <a:lstStyle/>
-          <a:p>
-            <a:pPr algn="ctr">
-              <a:defRPr sz="1800" b="1">
-                <a:solidFill>
-                  <a:srgbClr val="FFFFFF"/>
-                </a:solidFill>
-              </a:defRPr>
-            </a:pPr>
-            <a:r>
-              <a:t>Acompanhe sua evolução</a:t>
-            </a:r>
-          </a:p>
-        </p:txBody>
-      </p:sp>
-      <p:sp>
-        <p:nvSpPr>
-          <p:cNvPr id="19" name="TextBox 18"/>
-          <p:cNvSpPr txBox="1"/>
-          <p:nvPr/>
-        </p:nvSpPr>
-        <p:spPr>
-          <a:xfrm>
-            <a:off x="6400800" y="3200400"/>
-            <a:ext cx="2377440" cy="1097280"/>
-          </a:xfrm>
-          <a:prstGeom prst="rect">
-            <a:avLst/>
-          </a:prstGeom>
-          <a:noFill/>
-        </p:spPr>
-        <p:txBody>
-          <a:bodyPr wrap="square">
-            <a:spAutoFit/>
-          </a:bodyPr>
-          <a:lstStyle/>
-          <a:p>
-            <a:pPr algn="ctr">
-              <a:defRPr sz="1200">
-                <a:solidFill>
-                  <a:srgbClr val="9CA3AF"/>
-                </a:solidFill>
-              </a:defRPr>
-            </a:pPr>
-            <a:r>
-              <a:t>Visualize seu progresso no dashboard, pratique com flashcards e melhore continuamente.</a:t>
+              <a:t>[Screenshot_chatbot_correcaoconversa.png]</a:t>
             </a:r>
           </a:p>
         </p:txBody>
@@ -5197,76 +5275,6 @@
       <p:sp>
         <p:nvSpPr>
           <p:cNvPr id="20" name="TextBox 19"/>
-          <p:cNvSpPr txBox="1"/>
-          <p:nvPr/>
-        </p:nvSpPr>
-        <p:spPr>
-          <a:xfrm>
-            <a:off x="3108960" y="2834640"/>
-            <a:ext cx="274320" cy="274320"/>
-          </a:xfrm>
-          <a:prstGeom prst="rect">
-            <a:avLst/>
-          </a:prstGeom>
-          <a:noFill/>
-        </p:spPr>
-        <p:txBody>
-          <a:bodyPr wrap="none">
-            <a:spAutoFit/>
-          </a:bodyPr>
-          <a:lstStyle/>
-          <a:p>
-            <a:pPr algn="ctr">
-              <a:defRPr sz="2400" b="1">
-                <a:solidFill>
-                  <a:srgbClr val="A855F7"/>
-                </a:solidFill>
-              </a:defRPr>
-            </a:pPr>
-            <a:r>
-              <a:t>&gt;</a:t>
-            </a:r>
-          </a:p>
-        </p:txBody>
-      </p:sp>
-      <p:sp>
-        <p:nvSpPr>
-          <p:cNvPr id="21" name="TextBox 20"/>
-          <p:cNvSpPr txBox="1"/>
-          <p:nvPr/>
-        </p:nvSpPr>
-        <p:spPr>
-          <a:xfrm>
-            <a:off x="5989320" y="2834640"/>
-            <a:ext cx="274320" cy="274320"/>
-          </a:xfrm>
-          <a:prstGeom prst="rect">
-            <a:avLst/>
-          </a:prstGeom>
-          <a:noFill/>
-        </p:spPr>
-        <p:txBody>
-          <a:bodyPr wrap="none">
-            <a:spAutoFit/>
-          </a:bodyPr>
-          <a:lstStyle/>
-          <a:p>
-            <a:pPr algn="ctr">
-              <a:defRPr sz="2400" b="1">
-                <a:solidFill>
-                  <a:srgbClr val="A855F7"/>
-                </a:solidFill>
-              </a:defRPr>
-            </a:pPr>
-            <a:r>
-              <a:t>&gt;</a:t>
-            </a:r>
-          </a:p>
-        </p:txBody>
-      </p:sp>
-      <p:sp>
-        <p:nvSpPr>
-          <p:cNvPr id="22" name="TextBox 21"/>
           <p:cNvSpPr txBox="1"/>
           <p:nvPr/>
         </p:nvSpPr>
@@ -5368,8 +5376,8 @@
         </p:nvSpPr>
         <p:spPr>
           <a:xfrm>
-            <a:off x="457200" y="182880"/>
-            <a:ext cx="8229600" cy="640080"/>
+            <a:off x="457200" y="228600"/>
+            <a:ext cx="3657600" cy="320040"/>
           </a:xfrm>
           <a:prstGeom prst="rect">
             <a:avLst/>
@@ -5382,50 +5390,50 @@
           </a:bodyPr>
           <a:lstStyle/>
           <a:p>
-            <a:pPr algn="ctr">
-              <a:defRPr sz="3600" b="1">
+            <a:pPr>
+              <a:defRPr sz="1100" b="1">
+                <a:solidFill>
+                  <a:srgbClr val="A855F7"/>
+                </a:solidFill>
+              </a:defRPr>
+            </a:pPr>
+            <a:r>
+              <a:t>CHATBOT DE GRAMÁTICA</a:t>
+            </a:r>
+          </a:p>
+        </p:txBody>
+      </p:sp>
+      <p:sp>
+        <p:nvSpPr>
+          <p:cNvPr id="4" name="TextBox 3"/>
+          <p:cNvSpPr txBox="1"/>
+          <p:nvPr/>
+        </p:nvSpPr>
+        <p:spPr>
+          <a:xfrm>
+            <a:off x="457200" y="502920"/>
+            <a:ext cx="4114800" cy="822960"/>
+          </a:xfrm>
+          <a:prstGeom prst="rect">
+            <a:avLst/>
+          </a:prstGeom>
+          <a:noFill/>
+        </p:spPr>
+        <p:txBody>
+          <a:bodyPr wrap="square">
+            <a:spAutoFit/>
+          </a:bodyPr>
+          <a:lstStyle/>
+          <a:p>
+            <a:pPr>
+              <a:defRPr sz="2600" b="1">
                 <a:solidFill>
                   <a:srgbClr val="FFFFFF"/>
                 </a:solidFill>
               </a:defRPr>
             </a:pPr>
             <a:r>
-              <a:t>Análise de Custo</a:t>
-            </a:r>
-          </a:p>
-        </p:txBody>
-      </p:sp>
-      <p:sp>
-        <p:nvSpPr>
-          <p:cNvPr id="4" name="TextBox 3"/>
-          <p:cNvSpPr txBox="1"/>
-          <p:nvPr/>
-        </p:nvSpPr>
-        <p:spPr>
-          <a:xfrm>
-            <a:off x="457200" y="777240"/>
-            <a:ext cx="8229600" cy="365760"/>
-          </a:xfrm>
-          <a:prstGeom prst="rect">
-            <a:avLst/>
-          </a:prstGeom>
-          <a:noFill/>
-        </p:spPr>
-        <p:txBody>
-          <a:bodyPr wrap="none">
-            <a:spAutoFit/>
-          </a:bodyPr>
-          <a:lstStyle/>
-          <a:p>
-            <a:pPr algn="ctr">
-              <a:defRPr sz="1400">
-                <a:solidFill>
-                  <a:srgbClr val="9CA3AF"/>
-                </a:solidFill>
-              </a:defRPr>
-            </a:pPr>
-            <a:r>
-              <a:t>Investimento acessível para um aprendizado de qualidade</a:t>
+              <a:t>Tire suas dúvidas de gramática</a:t>
             </a:r>
           </a:p>
         </p:txBody>
@@ -5438,129 +5446,16 @@
         </p:nvSpPr>
         <p:spPr>
           <a:xfrm>
-            <a:off x="457200" y="1280160"/>
-            <a:ext cx="4114800" cy="365760"/>
-          </a:xfrm>
-          <a:prstGeom prst="rect">
-            <a:avLst/>
-          </a:prstGeom>
-          <a:noFill/>
-        </p:spPr>
-        <p:txBody>
-          <a:bodyPr wrap="none">
-            <a:spAutoFit/>
-          </a:bodyPr>
-          <a:lstStyle/>
-          <a:p>
-            <a:pPr>
-              <a:defRPr sz="2000" b="1">
-                <a:solidFill>
-                  <a:srgbClr val="22D3EE"/>
-                </a:solidFill>
-              </a:defRPr>
-            </a:pPr>
-            <a:r>
-              <a:t>Sistema de Créditos</a:t>
-            </a:r>
-          </a:p>
-        </p:txBody>
-      </p:sp>
-      <p:sp>
-        <p:nvSpPr>
-          <p:cNvPr id="6" name="Oval 5"/>
-          <p:cNvSpPr/>
-          <p:nvPr/>
-        </p:nvSpPr>
-        <p:spPr>
-          <a:xfrm>
-            <a:off x="640080" y="1828800"/>
-            <a:ext cx="137160" cy="137160"/>
-          </a:xfrm>
-          <a:prstGeom prst="ellipse">
-            <a:avLst/>
-          </a:prstGeom>
-          <a:solidFill>
-            <a:srgbClr val="22D3EE"/>
-          </a:solidFill>
-          <a:ln>
-            <a:noFill/>
-          </a:ln>
-        </p:spPr>
-        <p:style>
-          <a:lnRef idx="1">
-            <a:schemeClr val="accent1"/>
-          </a:lnRef>
-          <a:fillRef idx="3">
-            <a:schemeClr val="accent1"/>
-          </a:fillRef>
-          <a:effectRef idx="2">
-            <a:schemeClr val="accent1"/>
-          </a:effectRef>
-          <a:fontRef idx="minor">
-            <a:schemeClr val="lt1"/>
-          </a:fontRef>
-        </p:style>
-        <p:txBody>
-          <a:bodyPr rtlCol="0" anchor="ctr"/>
-          <a:lstStyle/>
-          <a:p>
-            <a:pPr algn="ctr"/>
-          </a:p>
-        </p:txBody>
-      </p:sp>
-      <p:sp>
-        <p:nvSpPr>
-          <p:cNvPr id="7" name="TextBox 6"/>
-          <p:cNvSpPr txBox="1"/>
-          <p:nvPr/>
-        </p:nvSpPr>
-        <p:spPr>
-          <a:xfrm>
-            <a:off x="914400" y="1737360"/>
-            <a:ext cx="1828800" cy="320040"/>
-          </a:xfrm>
-          <a:prstGeom prst="rect">
-            <a:avLst/>
-          </a:prstGeom>
-          <a:noFill/>
-        </p:spPr>
-        <p:txBody>
-          <a:bodyPr wrap="none">
-            <a:spAutoFit/>
-          </a:bodyPr>
-          <a:lstStyle/>
-          <a:p>
-            <a:pPr>
-              <a:defRPr sz="1300" b="1">
-                <a:solidFill>
-                  <a:srgbClr val="FFFFFF"/>
-                </a:solidFill>
-              </a:defRPr>
-            </a:pPr>
-            <a:r>
-              <a:t>100 créditos</a:t>
-            </a:r>
-          </a:p>
-        </p:txBody>
-      </p:sp>
-      <p:sp>
-        <p:nvSpPr>
-          <p:cNvPr id="8" name="TextBox 7"/>
-          <p:cNvSpPr txBox="1"/>
-          <p:nvPr/>
-        </p:nvSpPr>
-        <p:spPr>
-          <a:xfrm>
-            <a:off x="2743200" y="1737360"/>
-            <a:ext cx="1828800" cy="320040"/>
-          </a:xfrm>
-          <a:prstGeom prst="rect">
-            <a:avLst/>
-          </a:prstGeom>
-          <a:noFill/>
-        </p:spPr>
-        <p:txBody>
-          <a:bodyPr wrap="none">
+            <a:off x="457200" y="1325880"/>
+            <a:ext cx="3931920" cy="822960"/>
+          </a:xfrm>
+          <a:prstGeom prst="rect">
+            <a:avLst/>
+          </a:prstGeom>
+          <a:noFill/>
+        </p:spPr>
+        <p:txBody>
+          <a:bodyPr wrap="square">
             <a:spAutoFit/>
           </a:bodyPr>
           <a:lstStyle/>
@@ -5573,508 +5468,21 @@
               </a:defRPr>
             </a:pPr>
             <a:r>
-              <a:t>Grátis para novos usuários</a:t>
-            </a:r>
-          </a:p>
-        </p:txBody>
-      </p:sp>
-      <p:sp>
-        <p:nvSpPr>
-          <p:cNvPr id="9" name="Oval 8"/>
+              <a:t>Pergunte qualquer dúvida sobre gramática alemã e receba explicações detalhadas e exemplos práticos.</a:t>
+            </a:r>
+          </a:p>
+        </p:txBody>
+      </p:sp>
+      <p:sp>
+        <p:nvSpPr>
+          <p:cNvPr id="6" name="Rounded Rectangle 5"/>
           <p:cNvSpPr/>
           <p:nvPr/>
         </p:nvSpPr>
         <p:spPr>
           <a:xfrm>
-            <a:off x="640080" y="2331720"/>
-            <a:ext cx="137160" cy="137160"/>
-          </a:xfrm>
-          <a:prstGeom prst="ellipse">
-            <a:avLst/>
-          </a:prstGeom>
-          <a:solidFill>
-            <a:srgbClr val="22D3EE"/>
-          </a:solidFill>
-          <a:ln>
-            <a:noFill/>
-          </a:ln>
-        </p:spPr>
-        <p:style>
-          <a:lnRef idx="1">
-            <a:schemeClr val="accent1"/>
-          </a:lnRef>
-          <a:fillRef idx="3">
-            <a:schemeClr val="accent1"/>
-          </a:fillRef>
-          <a:effectRef idx="2">
-            <a:schemeClr val="accent1"/>
-          </a:effectRef>
-          <a:fontRef idx="minor">
-            <a:schemeClr val="lt1"/>
-          </a:fontRef>
-        </p:style>
-        <p:txBody>
-          <a:bodyPr rtlCol="0" anchor="ctr"/>
-          <a:lstStyle/>
-          <a:p>
-            <a:pPr algn="ctr"/>
-          </a:p>
-        </p:txBody>
-      </p:sp>
-      <p:sp>
-        <p:nvSpPr>
-          <p:cNvPr id="10" name="TextBox 9"/>
-          <p:cNvSpPr txBox="1"/>
-          <p:nvPr/>
-        </p:nvSpPr>
-        <p:spPr>
-          <a:xfrm>
-            <a:off x="914400" y="2240280"/>
-            <a:ext cx="1828800" cy="320040"/>
-          </a:xfrm>
-          <a:prstGeom prst="rect">
-            <a:avLst/>
-          </a:prstGeom>
-          <a:noFill/>
-        </p:spPr>
-        <p:txBody>
-          <a:bodyPr wrap="none">
-            <a:spAutoFit/>
-          </a:bodyPr>
-          <a:lstStyle/>
-          <a:p>
-            <a:pPr>
-              <a:defRPr sz="1300" b="1">
-                <a:solidFill>
-                  <a:srgbClr val="FFFFFF"/>
-                </a:solidFill>
-              </a:defRPr>
-            </a:pPr>
-            <a:r>
-              <a:t>Correção de texto</a:t>
-            </a:r>
-          </a:p>
-        </p:txBody>
-      </p:sp>
-      <p:sp>
-        <p:nvSpPr>
-          <p:cNvPr id="11" name="TextBox 10"/>
-          <p:cNvSpPr txBox="1"/>
-          <p:nvPr/>
-        </p:nvSpPr>
-        <p:spPr>
-          <a:xfrm>
-            <a:off x="2743200" y="2240280"/>
-            <a:ext cx="1828800" cy="320040"/>
-          </a:xfrm>
-          <a:prstGeom prst="rect">
-            <a:avLst/>
-          </a:prstGeom>
-          <a:noFill/>
-        </p:spPr>
-        <p:txBody>
-          <a:bodyPr wrap="none">
-            <a:spAutoFit/>
-          </a:bodyPr>
-          <a:lstStyle/>
-          <a:p>
-            <a:pPr>
-              <a:defRPr sz="1200">
-                <a:solidFill>
-                  <a:srgbClr val="9CA3AF"/>
-                </a:solidFill>
-              </a:defRPr>
-            </a:pPr>
-            <a:r>
-              <a:t>~1 crédito por correção</a:t>
-            </a:r>
-          </a:p>
-        </p:txBody>
-      </p:sp>
-      <p:sp>
-        <p:nvSpPr>
-          <p:cNvPr id="12" name="Oval 11"/>
-          <p:cNvSpPr/>
-          <p:nvPr/>
-        </p:nvSpPr>
-        <p:spPr>
-          <a:xfrm>
-            <a:off x="640080" y="2834640"/>
-            <a:ext cx="137160" cy="137160"/>
-          </a:xfrm>
-          <a:prstGeom prst="ellipse">
-            <a:avLst/>
-          </a:prstGeom>
-          <a:solidFill>
-            <a:srgbClr val="22D3EE"/>
-          </a:solidFill>
-          <a:ln>
-            <a:noFill/>
-          </a:ln>
-        </p:spPr>
-        <p:style>
-          <a:lnRef idx="1">
-            <a:schemeClr val="accent1"/>
-          </a:lnRef>
-          <a:fillRef idx="3">
-            <a:schemeClr val="accent1"/>
-          </a:fillRef>
-          <a:effectRef idx="2">
-            <a:schemeClr val="accent1"/>
-          </a:effectRef>
-          <a:fontRef idx="minor">
-            <a:schemeClr val="lt1"/>
-          </a:fontRef>
-        </p:style>
-        <p:txBody>
-          <a:bodyPr rtlCol="0" anchor="ctr"/>
-          <a:lstStyle/>
-          <a:p>
-            <a:pPr algn="ctr"/>
-          </a:p>
-        </p:txBody>
-      </p:sp>
-      <p:sp>
-        <p:nvSpPr>
-          <p:cNvPr id="13" name="TextBox 12"/>
-          <p:cNvSpPr txBox="1"/>
-          <p:nvPr/>
-        </p:nvSpPr>
-        <p:spPr>
-          <a:xfrm>
-            <a:off x="914400" y="2743200"/>
-            <a:ext cx="1828800" cy="320040"/>
-          </a:xfrm>
-          <a:prstGeom prst="rect">
-            <a:avLst/>
-          </a:prstGeom>
-          <a:noFill/>
-        </p:spPr>
-        <p:txBody>
-          <a:bodyPr wrap="none">
-            <a:spAutoFit/>
-          </a:bodyPr>
-          <a:lstStyle/>
-          <a:p>
-            <a:pPr>
-              <a:defRPr sz="1300" b="1">
-                <a:solidFill>
-                  <a:srgbClr val="FFFFFF"/>
-                </a:solidFill>
-              </a:defRPr>
-            </a:pPr>
-            <a:r>
-              <a:t>Prática de conversação</a:t>
-            </a:r>
-          </a:p>
-        </p:txBody>
-      </p:sp>
-      <p:sp>
-        <p:nvSpPr>
-          <p:cNvPr id="14" name="TextBox 13"/>
-          <p:cNvSpPr txBox="1"/>
-          <p:nvPr/>
-        </p:nvSpPr>
-        <p:spPr>
-          <a:xfrm>
-            <a:off x="2743200" y="2743200"/>
-            <a:ext cx="1828800" cy="320040"/>
-          </a:xfrm>
-          <a:prstGeom prst="rect">
-            <a:avLst/>
-          </a:prstGeom>
-          <a:noFill/>
-        </p:spPr>
-        <p:txBody>
-          <a:bodyPr wrap="none">
-            <a:spAutoFit/>
-          </a:bodyPr>
-          <a:lstStyle/>
-          <a:p>
-            <a:pPr>
-              <a:defRPr sz="1200">
-                <a:solidFill>
-                  <a:srgbClr val="9CA3AF"/>
-                </a:solidFill>
-              </a:defRPr>
-            </a:pPr>
-            <a:r>
-              <a:t>10 créditos/minuto</a:t>
-            </a:r>
-          </a:p>
-        </p:txBody>
-      </p:sp>
-      <p:sp>
-        <p:nvSpPr>
-          <p:cNvPr id="15" name="Oval 14"/>
-          <p:cNvSpPr/>
-          <p:nvPr/>
-        </p:nvSpPr>
-        <p:spPr>
-          <a:xfrm>
-            <a:off x="640080" y="3337560"/>
-            <a:ext cx="137160" cy="137160"/>
-          </a:xfrm>
-          <a:prstGeom prst="ellipse">
-            <a:avLst/>
-          </a:prstGeom>
-          <a:solidFill>
-            <a:srgbClr val="22D3EE"/>
-          </a:solidFill>
-          <a:ln>
-            <a:noFill/>
-          </a:ln>
-        </p:spPr>
-        <p:style>
-          <a:lnRef idx="1">
-            <a:schemeClr val="accent1"/>
-          </a:lnRef>
-          <a:fillRef idx="3">
-            <a:schemeClr val="accent1"/>
-          </a:fillRef>
-          <a:effectRef idx="2">
-            <a:schemeClr val="accent1"/>
-          </a:effectRef>
-          <a:fontRef idx="minor">
-            <a:schemeClr val="lt1"/>
-          </a:fontRef>
-        </p:style>
-        <p:txBody>
-          <a:bodyPr rtlCol="0" anchor="ctr"/>
-          <a:lstStyle/>
-          <a:p>
-            <a:pPr algn="ctr"/>
-          </a:p>
-        </p:txBody>
-      </p:sp>
-      <p:sp>
-        <p:nvSpPr>
-          <p:cNvPr id="16" name="TextBox 15"/>
-          <p:cNvSpPr txBox="1"/>
-          <p:nvPr/>
-        </p:nvSpPr>
-        <p:spPr>
-          <a:xfrm>
-            <a:off x="914400" y="3246120"/>
-            <a:ext cx="1828800" cy="320040"/>
-          </a:xfrm>
-          <a:prstGeom prst="rect">
-            <a:avLst/>
-          </a:prstGeom>
-          <a:noFill/>
-        </p:spPr>
-        <p:txBody>
-          <a:bodyPr wrap="none">
-            <a:spAutoFit/>
-          </a:bodyPr>
-          <a:lstStyle/>
-          <a:p>
-            <a:pPr>
-              <a:defRPr sz="1300" b="1">
-                <a:solidFill>
-                  <a:srgbClr val="FFFFFF"/>
-                </a:solidFill>
-              </a:defRPr>
-            </a:pPr>
-            <a:r>
-              <a:t>Paráfrase de texto</a:t>
-            </a:r>
-          </a:p>
-        </p:txBody>
-      </p:sp>
-      <p:sp>
-        <p:nvSpPr>
-          <p:cNvPr id="17" name="TextBox 16"/>
-          <p:cNvSpPr txBox="1"/>
-          <p:nvPr/>
-        </p:nvSpPr>
-        <p:spPr>
-          <a:xfrm>
-            <a:off x="2743200" y="3246120"/>
-            <a:ext cx="1828800" cy="320040"/>
-          </a:xfrm>
-          <a:prstGeom prst="rect">
-            <a:avLst/>
-          </a:prstGeom>
-          <a:noFill/>
-        </p:spPr>
-        <p:txBody>
-          <a:bodyPr wrap="none">
-            <a:spAutoFit/>
-          </a:bodyPr>
-          <a:lstStyle/>
-          <a:p>
-            <a:pPr>
-              <a:defRPr sz="1200">
-                <a:solidFill>
-                  <a:srgbClr val="9CA3AF"/>
-                </a:solidFill>
-              </a:defRPr>
-            </a:pPr>
-            <a:r>
-              <a:t>~1 crédito por uso</a:t>
-            </a:r>
-          </a:p>
-        </p:txBody>
-      </p:sp>
-      <p:sp>
-        <p:nvSpPr>
-          <p:cNvPr id="18" name="Oval 17"/>
-          <p:cNvSpPr/>
-          <p:nvPr/>
-        </p:nvSpPr>
-        <p:spPr>
-          <a:xfrm>
-            <a:off x="640080" y="3840480"/>
-            <a:ext cx="137160" cy="137160"/>
-          </a:xfrm>
-          <a:prstGeom prst="ellipse">
-            <a:avLst/>
-          </a:prstGeom>
-          <a:solidFill>
-            <a:srgbClr val="22D3EE"/>
-          </a:solidFill>
-          <a:ln>
-            <a:noFill/>
-          </a:ln>
-        </p:spPr>
-        <p:style>
-          <a:lnRef idx="1">
-            <a:schemeClr val="accent1"/>
-          </a:lnRef>
-          <a:fillRef idx="3">
-            <a:schemeClr val="accent1"/>
-          </a:fillRef>
-          <a:effectRef idx="2">
-            <a:schemeClr val="accent1"/>
-          </a:effectRef>
-          <a:fontRef idx="minor">
-            <a:schemeClr val="lt1"/>
-          </a:fontRef>
-        </p:style>
-        <p:txBody>
-          <a:bodyPr rtlCol="0" anchor="ctr"/>
-          <a:lstStyle/>
-          <a:p>
-            <a:pPr algn="ctr"/>
-          </a:p>
-        </p:txBody>
-      </p:sp>
-      <p:sp>
-        <p:nvSpPr>
-          <p:cNvPr id="19" name="TextBox 18"/>
-          <p:cNvSpPr txBox="1"/>
-          <p:nvPr/>
-        </p:nvSpPr>
-        <p:spPr>
-          <a:xfrm>
-            <a:off x="914400" y="3749040"/>
-            <a:ext cx="1828800" cy="320040"/>
-          </a:xfrm>
-          <a:prstGeom prst="rect">
-            <a:avLst/>
-          </a:prstGeom>
-          <a:noFill/>
-        </p:spPr>
-        <p:txBody>
-          <a:bodyPr wrap="none">
-            <a:spAutoFit/>
-          </a:bodyPr>
-          <a:lstStyle/>
-          <a:p>
-            <a:pPr>
-              <a:defRPr sz="1300" b="1">
-                <a:solidFill>
-                  <a:srgbClr val="FFFFFF"/>
-                </a:solidFill>
-              </a:defRPr>
-            </a:pPr>
-            <a:r>
-              <a:t>Flashcards e jogos</a:t>
-            </a:r>
-          </a:p>
-        </p:txBody>
-      </p:sp>
-      <p:sp>
-        <p:nvSpPr>
-          <p:cNvPr id="20" name="TextBox 19"/>
-          <p:cNvSpPr txBox="1"/>
-          <p:nvPr/>
-        </p:nvSpPr>
-        <p:spPr>
-          <a:xfrm>
-            <a:off x="2743200" y="3749040"/>
-            <a:ext cx="1828800" cy="320040"/>
-          </a:xfrm>
-          <a:prstGeom prst="rect">
-            <a:avLst/>
-          </a:prstGeom>
-          <a:noFill/>
-        </p:spPr>
-        <p:txBody>
-          <a:bodyPr wrap="none">
-            <a:spAutoFit/>
-          </a:bodyPr>
-          <a:lstStyle/>
-          <a:p>
-            <a:pPr>
-              <a:defRPr sz="1200">
-                <a:solidFill>
-                  <a:srgbClr val="9CA3AF"/>
-                </a:solidFill>
-              </a:defRPr>
-            </a:pPr>
-            <a:r>
-              <a:t>Gratuito</a:t>
-            </a:r>
-          </a:p>
-        </p:txBody>
-      </p:sp>
-      <p:sp>
-        <p:nvSpPr>
-          <p:cNvPr id="21" name="TextBox 20"/>
-          <p:cNvSpPr txBox="1"/>
-          <p:nvPr/>
-        </p:nvSpPr>
-        <p:spPr>
-          <a:xfrm>
-            <a:off x="4846320" y="1280160"/>
-            <a:ext cx="3840480" cy="365760"/>
-          </a:xfrm>
-          <a:prstGeom prst="rect">
-            <a:avLst/>
-          </a:prstGeom>
-          <a:noFill/>
-        </p:spPr>
-        <p:txBody>
-          <a:bodyPr wrap="none">
-            <a:spAutoFit/>
-          </a:bodyPr>
-          <a:lstStyle/>
-          <a:p>
-            <a:pPr>
-              <a:defRPr sz="2000" b="1">
-                <a:solidFill>
-                  <a:srgbClr val="F97316"/>
-                </a:solidFill>
-              </a:defRPr>
-            </a:pPr>
-            <a:r>
-              <a:t>Comparado com Alternativas</a:t>
-            </a:r>
-          </a:p>
-        </p:txBody>
-      </p:sp>
-      <p:sp>
-        <p:nvSpPr>
-          <p:cNvPr id="22" name="Rounded Rectangle 21"/>
-          <p:cNvSpPr/>
-          <p:nvPr/>
-        </p:nvSpPr>
-        <p:spPr>
-          <a:xfrm>
-            <a:off x="4846320" y="1737360"/>
-            <a:ext cx="3840480" cy="502920"/>
+            <a:off x="457200" y="2194560"/>
+            <a:ext cx="3931920" cy="548640"/>
           </a:xfrm>
           <a:prstGeom prst="roundRect">
             <a:avLst/>
@@ -6110,84 +5518,92 @@
       </p:sp>
       <p:sp>
         <p:nvSpPr>
-          <p:cNvPr id="23" name="TextBox 22"/>
-          <p:cNvSpPr txBox="1"/>
-          <p:nvPr/>
-        </p:nvSpPr>
-        <p:spPr>
-          <a:xfrm>
-            <a:off x="5029200" y="1828800"/>
-            <a:ext cx="2103120" cy="320040"/>
-          </a:xfrm>
-          <a:prstGeom prst="rect">
-            <a:avLst/>
-          </a:prstGeom>
-          <a:noFill/>
-        </p:spPr>
-        <p:txBody>
-          <a:bodyPr wrap="none">
+          <p:cNvPr id="7" name="Oval 6"/>
+          <p:cNvSpPr/>
+          <p:nvPr/>
+        </p:nvSpPr>
+        <p:spPr>
+          <a:xfrm>
+            <a:off x="640080" y="2377440"/>
+            <a:ext cx="182880" cy="182880"/>
+          </a:xfrm>
+          <a:prstGeom prst="ellipse">
+            <a:avLst/>
+          </a:prstGeom>
+          <a:solidFill>
+            <a:srgbClr val="A855F7"/>
+          </a:solidFill>
+          <a:ln>
+            <a:noFill/>
+          </a:ln>
+        </p:spPr>
+        <p:style>
+          <a:lnRef idx="1">
+            <a:schemeClr val="accent1"/>
+          </a:lnRef>
+          <a:fillRef idx="3">
+            <a:schemeClr val="accent1"/>
+          </a:fillRef>
+          <a:effectRef idx="2">
+            <a:schemeClr val="accent1"/>
+          </a:effectRef>
+          <a:fontRef idx="minor">
+            <a:schemeClr val="lt1"/>
+          </a:fontRef>
+        </p:style>
+        <p:txBody>
+          <a:bodyPr rtlCol="0" anchor="ctr"/>
+          <a:lstStyle/>
+          <a:p>
+            <a:pPr algn="ctr"/>
+          </a:p>
+        </p:txBody>
+      </p:sp>
+      <p:sp>
+        <p:nvSpPr>
+          <p:cNvPr id="8" name="TextBox 7"/>
+          <p:cNvSpPr txBox="1"/>
+          <p:nvPr/>
+        </p:nvSpPr>
+        <p:spPr>
+          <a:xfrm>
+            <a:off x="960120" y="2304288"/>
+            <a:ext cx="3200400" cy="365760"/>
+          </a:xfrm>
+          <a:prstGeom prst="rect">
+            <a:avLst/>
+          </a:prstGeom>
+          <a:noFill/>
+        </p:spPr>
+        <p:txBody>
+          <a:bodyPr wrap="square">
             <a:spAutoFit/>
           </a:bodyPr>
           <a:lstStyle/>
           <a:p>
             <a:pPr>
-              <a:defRPr sz="1300">
+              <a:defRPr sz="1100">
                 <a:solidFill>
                   <a:srgbClr val="FFFFFF"/>
                 </a:solidFill>
               </a:defRPr>
             </a:pPr>
             <a:r>
-              <a:t>Professor particular</a:t>
-            </a:r>
-          </a:p>
-        </p:txBody>
-      </p:sp>
-      <p:sp>
-        <p:nvSpPr>
-          <p:cNvPr id="24" name="TextBox 23"/>
-          <p:cNvSpPr txBox="1"/>
-          <p:nvPr/>
-        </p:nvSpPr>
-        <p:spPr>
-          <a:xfrm>
-            <a:off x="7132320" y="1828800"/>
-            <a:ext cx="1371600" cy="320040"/>
-          </a:xfrm>
-          <a:prstGeom prst="rect">
-            <a:avLst/>
-          </a:prstGeom>
-          <a:noFill/>
-        </p:spPr>
-        <p:txBody>
-          <a:bodyPr wrap="none">
-            <a:spAutoFit/>
-          </a:bodyPr>
-          <a:lstStyle/>
-          <a:p>
-            <a:pPr algn="r">
-              <a:defRPr sz="1300" b="1">
-                <a:solidFill>
-                  <a:srgbClr val="EF4444"/>
-                </a:solidFill>
-              </a:defRPr>
-            </a:pPr>
-            <a:r>
-              <a:t>R$ 80-150/hora</a:t>
-            </a:r>
-          </a:p>
-        </p:txBody>
-      </p:sp>
-      <p:sp>
-        <p:nvSpPr>
-          <p:cNvPr id="25" name="Rounded Rectangle 24"/>
+              <a:t>Explicações em português</a:t>
+            </a:r>
+          </a:p>
+        </p:txBody>
+      </p:sp>
+      <p:sp>
+        <p:nvSpPr>
+          <p:cNvPr id="9" name="Rounded Rectangle 8"/>
           <p:cNvSpPr/>
           <p:nvPr/>
         </p:nvSpPr>
         <p:spPr>
           <a:xfrm>
-            <a:off x="4846320" y="2331720"/>
-            <a:ext cx="3840480" cy="502920"/>
+            <a:off x="457200" y="2834640"/>
+            <a:ext cx="3931920" cy="548640"/>
           </a:xfrm>
           <a:prstGeom prst="roundRect">
             <a:avLst/>
@@ -6223,84 +5639,92 @@
       </p:sp>
       <p:sp>
         <p:nvSpPr>
-          <p:cNvPr id="26" name="TextBox 25"/>
-          <p:cNvSpPr txBox="1"/>
-          <p:nvPr/>
-        </p:nvSpPr>
-        <p:spPr>
-          <a:xfrm>
-            <a:off x="5029200" y="2423160"/>
-            <a:ext cx="2103120" cy="320040"/>
-          </a:xfrm>
-          <a:prstGeom prst="rect">
-            <a:avLst/>
-          </a:prstGeom>
-          <a:noFill/>
-        </p:spPr>
-        <p:txBody>
-          <a:bodyPr wrap="none">
+          <p:cNvPr id="10" name="Oval 9"/>
+          <p:cNvSpPr/>
+          <p:nvPr/>
+        </p:nvSpPr>
+        <p:spPr>
+          <a:xfrm>
+            <a:off x="640080" y="3017520"/>
+            <a:ext cx="182880" cy="182880"/>
+          </a:xfrm>
+          <a:prstGeom prst="ellipse">
+            <a:avLst/>
+          </a:prstGeom>
+          <a:solidFill>
+            <a:srgbClr val="A855F7"/>
+          </a:solidFill>
+          <a:ln>
+            <a:noFill/>
+          </a:ln>
+        </p:spPr>
+        <p:style>
+          <a:lnRef idx="1">
+            <a:schemeClr val="accent1"/>
+          </a:lnRef>
+          <a:fillRef idx="3">
+            <a:schemeClr val="accent1"/>
+          </a:fillRef>
+          <a:effectRef idx="2">
+            <a:schemeClr val="accent1"/>
+          </a:effectRef>
+          <a:fontRef idx="minor">
+            <a:schemeClr val="lt1"/>
+          </a:fontRef>
+        </p:style>
+        <p:txBody>
+          <a:bodyPr rtlCol="0" anchor="ctr"/>
+          <a:lstStyle/>
+          <a:p>
+            <a:pPr algn="ctr"/>
+          </a:p>
+        </p:txBody>
+      </p:sp>
+      <p:sp>
+        <p:nvSpPr>
+          <p:cNvPr id="11" name="TextBox 10"/>
+          <p:cNvSpPr txBox="1"/>
+          <p:nvPr/>
+        </p:nvSpPr>
+        <p:spPr>
+          <a:xfrm>
+            <a:off x="960120" y="2944368"/>
+            <a:ext cx="3200400" cy="365760"/>
+          </a:xfrm>
+          <a:prstGeom prst="rect">
+            <a:avLst/>
+          </a:prstGeom>
+          <a:noFill/>
+        </p:spPr>
+        <p:txBody>
+          <a:bodyPr wrap="square">
             <a:spAutoFit/>
           </a:bodyPr>
           <a:lstStyle/>
           <a:p>
             <a:pPr>
-              <a:defRPr sz="1300">
+              <a:defRPr sz="1100">
                 <a:solidFill>
                   <a:srgbClr val="FFFFFF"/>
                 </a:solidFill>
               </a:defRPr>
             </a:pPr>
             <a:r>
-              <a:t>Curso presencial</a:t>
-            </a:r>
-          </a:p>
-        </p:txBody>
-      </p:sp>
-      <p:sp>
-        <p:nvSpPr>
-          <p:cNvPr id="27" name="TextBox 26"/>
-          <p:cNvSpPr txBox="1"/>
-          <p:nvPr/>
-        </p:nvSpPr>
-        <p:spPr>
-          <a:xfrm>
-            <a:off x="7132320" y="2423160"/>
-            <a:ext cx="1371600" cy="320040"/>
-          </a:xfrm>
-          <a:prstGeom prst="rect">
-            <a:avLst/>
-          </a:prstGeom>
-          <a:noFill/>
-        </p:spPr>
-        <p:txBody>
-          <a:bodyPr wrap="none">
-            <a:spAutoFit/>
-          </a:bodyPr>
-          <a:lstStyle/>
-          <a:p>
-            <a:pPr algn="r">
-              <a:defRPr sz="1300" b="1">
-                <a:solidFill>
-                  <a:srgbClr val="EF4444"/>
-                </a:solidFill>
-              </a:defRPr>
-            </a:pPr>
-            <a:r>
-              <a:t>R$ 300-800/mês</a:t>
-            </a:r>
-          </a:p>
-        </p:txBody>
-      </p:sp>
-      <p:sp>
-        <p:nvSpPr>
-          <p:cNvPr id="28" name="Rounded Rectangle 27"/>
+              <a:t>Exemplos práticos de uso</a:t>
+            </a:r>
+          </a:p>
+        </p:txBody>
+      </p:sp>
+      <p:sp>
+        <p:nvSpPr>
+          <p:cNvPr id="12" name="Rounded Rectangle 11"/>
           <p:cNvSpPr/>
           <p:nvPr/>
         </p:nvSpPr>
         <p:spPr>
           <a:xfrm>
-            <a:off x="4846320" y="2926080"/>
-            <a:ext cx="3840480" cy="502920"/>
+            <a:off x="457200" y="3474720"/>
+            <a:ext cx="3931920" cy="548640"/>
           </a:xfrm>
           <a:prstGeom prst="roundRect">
             <a:avLst/>
@@ -6336,84 +5760,92 @@
       </p:sp>
       <p:sp>
         <p:nvSpPr>
-          <p:cNvPr id="29" name="TextBox 28"/>
-          <p:cNvSpPr txBox="1"/>
-          <p:nvPr/>
-        </p:nvSpPr>
-        <p:spPr>
-          <a:xfrm>
-            <a:off x="5029200" y="3017520"/>
-            <a:ext cx="2103120" cy="320040"/>
-          </a:xfrm>
-          <a:prstGeom prst="rect">
-            <a:avLst/>
-          </a:prstGeom>
-          <a:noFill/>
-        </p:spPr>
-        <p:txBody>
-          <a:bodyPr wrap="none">
+          <p:cNvPr id="13" name="Oval 12"/>
+          <p:cNvSpPr/>
+          <p:nvPr/>
+        </p:nvSpPr>
+        <p:spPr>
+          <a:xfrm>
+            <a:off x="640080" y="3657600"/>
+            <a:ext cx="182880" cy="182880"/>
+          </a:xfrm>
+          <a:prstGeom prst="ellipse">
+            <a:avLst/>
+          </a:prstGeom>
+          <a:solidFill>
+            <a:srgbClr val="A855F7"/>
+          </a:solidFill>
+          <a:ln>
+            <a:noFill/>
+          </a:ln>
+        </p:spPr>
+        <p:style>
+          <a:lnRef idx="1">
+            <a:schemeClr val="accent1"/>
+          </a:lnRef>
+          <a:fillRef idx="3">
+            <a:schemeClr val="accent1"/>
+          </a:fillRef>
+          <a:effectRef idx="2">
+            <a:schemeClr val="accent1"/>
+          </a:effectRef>
+          <a:fontRef idx="minor">
+            <a:schemeClr val="lt1"/>
+          </a:fontRef>
+        </p:style>
+        <p:txBody>
+          <a:bodyPr rtlCol="0" anchor="ctr"/>
+          <a:lstStyle/>
+          <a:p>
+            <a:pPr algn="ctr"/>
+          </a:p>
+        </p:txBody>
+      </p:sp>
+      <p:sp>
+        <p:nvSpPr>
+          <p:cNvPr id="14" name="TextBox 13"/>
+          <p:cNvSpPr txBox="1"/>
+          <p:nvPr/>
+        </p:nvSpPr>
+        <p:spPr>
+          <a:xfrm>
+            <a:off x="960120" y="3584448"/>
+            <a:ext cx="3200400" cy="365760"/>
+          </a:xfrm>
+          <a:prstGeom prst="rect">
+            <a:avLst/>
+          </a:prstGeom>
+          <a:noFill/>
+        </p:spPr>
+        <p:txBody>
+          <a:bodyPr wrap="square">
             <a:spAutoFit/>
           </a:bodyPr>
           <a:lstStyle/>
           <a:p>
             <a:pPr>
-              <a:defRPr sz="1300">
+              <a:defRPr sz="1100">
                 <a:solidFill>
                   <a:srgbClr val="FFFFFF"/>
                 </a:solidFill>
               </a:defRPr>
             </a:pPr>
             <a:r>
-              <a:t>Apps premium</a:t>
-            </a:r>
-          </a:p>
-        </p:txBody>
-      </p:sp>
-      <p:sp>
-        <p:nvSpPr>
-          <p:cNvPr id="30" name="TextBox 29"/>
-          <p:cNvSpPr txBox="1"/>
-          <p:nvPr/>
-        </p:nvSpPr>
-        <p:spPr>
-          <a:xfrm>
-            <a:off x="7132320" y="3017520"/>
-            <a:ext cx="1371600" cy="320040"/>
-          </a:xfrm>
-          <a:prstGeom prst="rect">
-            <a:avLst/>
-          </a:prstGeom>
-          <a:noFill/>
-        </p:spPr>
-        <p:txBody>
-          <a:bodyPr wrap="none">
-            <a:spAutoFit/>
-          </a:bodyPr>
-          <a:lstStyle/>
-          <a:p>
-            <a:pPr algn="r">
-              <a:defRPr sz="1300" b="1">
-                <a:solidFill>
-                  <a:srgbClr val="EAB308"/>
-                </a:solidFill>
-              </a:defRPr>
-            </a:pPr>
-            <a:r>
-              <a:t>R$ 50-100/mês</a:t>
-            </a:r>
-          </a:p>
-        </p:txBody>
-      </p:sp>
-      <p:sp>
-        <p:nvSpPr>
-          <p:cNvPr id="31" name="Rounded Rectangle 30"/>
+              <a:t>Mais de 60 tópicos gramaticais</a:t>
+            </a:r>
+          </a:p>
+        </p:txBody>
+      </p:sp>
+      <p:sp>
+        <p:nvSpPr>
+          <p:cNvPr id="15" name="Rounded Rectangle 14"/>
           <p:cNvSpPr/>
           <p:nvPr/>
         </p:nvSpPr>
         <p:spPr>
           <a:xfrm>
-            <a:off x="4846320" y="3520440"/>
-            <a:ext cx="3840480" cy="502920"/>
+            <a:off x="457200" y="4114800"/>
+            <a:ext cx="3931920" cy="548640"/>
           </a:xfrm>
           <a:prstGeom prst="roundRect">
             <a:avLst/>
@@ -6449,95 +5881,23 @@
       </p:sp>
       <p:sp>
         <p:nvSpPr>
-          <p:cNvPr id="32" name="TextBox 31"/>
-          <p:cNvSpPr txBox="1"/>
-          <p:nvPr/>
-        </p:nvSpPr>
-        <p:spPr>
-          <a:xfrm>
-            <a:off x="5029200" y="3611880"/>
-            <a:ext cx="2103120" cy="320040"/>
-          </a:xfrm>
-          <a:prstGeom prst="rect">
-            <a:avLst/>
-          </a:prstGeom>
-          <a:noFill/>
-        </p:spPr>
-        <p:txBody>
-          <a:bodyPr wrap="none">
-            <a:spAutoFit/>
-          </a:bodyPr>
-          <a:lstStyle/>
-          <a:p>
-            <a:pPr>
-              <a:defRPr sz="1300">
-                <a:solidFill>
-                  <a:srgbClr val="FFFFFF"/>
-                </a:solidFill>
-              </a:defRPr>
-            </a:pPr>
-            <a:r>
-              <a:t>CorrectMe</a:t>
-            </a:r>
-          </a:p>
-        </p:txBody>
-      </p:sp>
-      <p:sp>
-        <p:nvSpPr>
-          <p:cNvPr id="33" name="TextBox 32"/>
-          <p:cNvSpPr txBox="1"/>
-          <p:nvPr/>
-        </p:nvSpPr>
-        <p:spPr>
-          <a:xfrm>
-            <a:off x="7132320" y="3611880"/>
-            <a:ext cx="1371600" cy="320040"/>
-          </a:xfrm>
-          <a:prstGeom prst="rect">
-            <a:avLst/>
-          </a:prstGeom>
-          <a:noFill/>
-        </p:spPr>
-        <p:txBody>
-          <a:bodyPr wrap="none">
-            <a:spAutoFit/>
-          </a:bodyPr>
-          <a:lstStyle/>
-          <a:p>
-            <a:pPr algn="r">
-              <a:defRPr sz="1300" b="1">
-                <a:solidFill>
-                  <a:srgbClr val="22C55E"/>
-                </a:solidFill>
-              </a:defRPr>
-            </a:pPr>
-            <a:r>
-              <a:t>A partir de R$ 0</a:t>
-            </a:r>
-          </a:p>
-        </p:txBody>
-      </p:sp>
-      <p:sp>
-        <p:nvSpPr>
-          <p:cNvPr id="34" name="Rounded Rectangle 33"/>
+          <p:cNvPr id="16" name="Oval 15"/>
           <p:cNvSpPr/>
           <p:nvPr/>
         </p:nvSpPr>
         <p:spPr>
           <a:xfrm>
-            <a:off x="457200" y="4160520"/>
-            <a:ext cx="8229600" cy="640080"/>
-          </a:xfrm>
-          <a:prstGeom prst="roundRect">
+            <a:off x="640080" y="4297680"/>
+            <a:ext cx="182880" cy="182880"/>
+          </a:xfrm>
+          <a:prstGeom prst="ellipse">
             <a:avLst/>
           </a:prstGeom>
           <a:solidFill>
-            <a:srgbClr val="251C45"/>
+            <a:srgbClr val="A855F7"/>
           </a:solidFill>
-          <a:ln w="25400">
-            <a:solidFill>
-              <a:srgbClr val="22C55E"/>
-            </a:solidFill>
+          <a:ln>
+            <a:noFill/>
           </a:ln>
         </p:spPr>
         <p:style>
@@ -6564,14 +5924,94 @@
       </p:sp>
       <p:sp>
         <p:nvSpPr>
-          <p:cNvPr id="35" name="TextBox 34"/>
-          <p:cNvSpPr txBox="1"/>
-          <p:nvPr/>
-        </p:nvSpPr>
-        <p:spPr>
-          <a:xfrm>
-            <a:off x="457200" y="4297680"/>
-            <a:ext cx="8229600" cy="365760"/>
+          <p:cNvPr id="17" name="TextBox 16"/>
+          <p:cNvSpPr txBox="1"/>
+          <p:nvPr/>
+        </p:nvSpPr>
+        <p:spPr>
+          <a:xfrm>
+            <a:off x="960120" y="4224528"/>
+            <a:ext cx="3200400" cy="365760"/>
+          </a:xfrm>
+          <a:prstGeom prst="rect">
+            <a:avLst/>
+          </a:prstGeom>
+          <a:noFill/>
+        </p:spPr>
+        <p:txBody>
+          <a:bodyPr wrap="square">
+            <a:spAutoFit/>
+          </a:bodyPr>
+          <a:lstStyle/>
+          <a:p>
+            <a:pPr>
+              <a:defRPr sz="1100">
+                <a:solidFill>
+                  <a:srgbClr val="FFFFFF"/>
+                </a:solidFill>
+              </a:defRPr>
+            </a:pPr>
+            <a:r>
+              <a:t>5 créditos por tópico explicado</a:t>
+            </a:r>
+          </a:p>
+        </p:txBody>
+      </p:sp>
+      <p:sp>
+        <p:nvSpPr>
+          <p:cNvPr id="18" name="Rounded Rectangle 17"/>
+          <p:cNvSpPr/>
+          <p:nvPr/>
+        </p:nvSpPr>
+        <p:spPr>
+          <a:xfrm>
+            <a:off x="4572000" y="457200"/>
+            <a:ext cx="4297680" cy="3931920"/>
+          </a:xfrm>
+          <a:prstGeom prst="roundRect">
+            <a:avLst/>
+          </a:prstGeom>
+          <a:solidFill>
+            <a:srgbClr val="372A5C"/>
+          </a:solidFill>
+          <a:ln w="25400">
+            <a:solidFill>
+              <a:srgbClr val="A855F7"/>
+            </a:solidFill>
+          </a:ln>
+        </p:spPr>
+        <p:style>
+          <a:lnRef idx="1">
+            <a:schemeClr val="accent1"/>
+          </a:lnRef>
+          <a:fillRef idx="3">
+            <a:schemeClr val="accent1"/>
+          </a:fillRef>
+          <a:effectRef idx="2">
+            <a:schemeClr val="accent1"/>
+          </a:effectRef>
+          <a:fontRef idx="minor">
+            <a:schemeClr val="lt1"/>
+          </a:fontRef>
+        </p:style>
+        <p:txBody>
+          <a:bodyPr rtlCol="0" anchor="ctr"/>
+          <a:lstStyle/>
+          <a:p>
+            <a:pPr algn="ctr"/>
+          </a:p>
+        </p:txBody>
+      </p:sp>
+      <p:sp>
+        <p:nvSpPr>
+          <p:cNvPr id="19" name="TextBox 18"/>
+          <p:cNvSpPr txBox="1"/>
+          <p:nvPr/>
+        </p:nvSpPr>
+        <p:spPr>
+          <a:xfrm>
+            <a:off x="5029200" y="2103120"/>
+            <a:ext cx="3383280" cy="457200"/>
           </a:xfrm>
           <a:prstGeom prst="rect">
             <a:avLst/>
@@ -6585,21 +6025,21 @@
           <a:lstStyle/>
           <a:p>
             <a:pPr algn="ctr">
-              <a:defRPr sz="1800" b="1">
-                <a:solidFill>
-                  <a:srgbClr val="22C55E"/>
-                </a:solidFill>
-              </a:defRPr>
-            </a:pPr>
-            <a:r>
-              <a:t>Comece grátis com 100 créditos - Sem cartão de crédito necessário!</a:t>
-            </a:r>
-          </a:p>
-        </p:txBody>
-      </p:sp>
-      <p:sp>
-        <p:nvSpPr>
-          <p:cNvPr id="36" name="TextBox 35"/>
+              <a:defRPr sz="1400">
+                <a:solidFill>
+                  <a:srgbClr val="9CA3AF"/>
+                </a:solidFill>
+              </a:defRPr>
+            </a:pPr>
+            <a:r>
+              <a:t>[Screenshot_chatbot_explicacaogramatica.png]</a:t>
+            </a:r>
+          </a:p>
+        </p:txBody>
+      </p:sp>
+      <p:sp>
+        <p:nvSpPr>
+          <p:cNvPr id="20" name="TextBox 19"/>
           <p:cNvSpPr txBox="1"/>
           <p:nvPr/>
         </p:nvSpPr>
@@ -6701,8 +6141,8 @@
         </p:nvSpPr>
         <p:spPr>
           <a:xfrm>
-            <a:off x="457200" y="137160"/>
-            <a:ext cx="8229600" cy="502920"/>
+            <a:off x="457200" y="182880"/>
+            <a:ext cx="8229600" cy="640080"/>
           </a:xfrm>
           <a:prstGeom prst="rect">
             <a:avLst/>
@@ -6716,28 +6156,63 @@
           <a:lstStyle/>
           <a:p>
             <a:pPr algn="ctr">
-              <a:defRPr sz="3200" b="1">
+              <a:defRPr sz="3600" b="1">
                 <a:solidFill>
                   <a:srgbClr val="FFFFFF"/>
                 </a:solidFill>
               </a:defRPr>
             </a:pPr>
             <a:r>
-              <a:t>Por que escolher o CorrectMe?</a:t>
-            </a:r>
-          </a:p>
-        </p:txBody>
-      </p:sp>
-      <p:sp>
-        <p:nvSpPr>
-          <p:cNvPr id="4" name="Rounded Rectangle 3"/>
+              <a:t>Como Funciona</a:t>
+            </a:r>
+          </a:p>
+        </p:txBody>
+      </p:sp>
+      <p:sp>
+        <p:nvSpPr>
+          <p:cNvPr id="4" name="TextBox 3"/>
+          <p:cNvSpPr txBox="1"/>
+          <p:nvPr/>
+        </p:nvSpPr>
+        <p:spPr>
+          <a:xfrm>
+            <a:off x="457200" y="777240"/>
+            <a:ext cx="8229600" cy="365760"/>
+          </a:xfrm>
+          <a:prstGeom prst="rect">
+            <a:avLst/>
+          </a:prstGeom>
+          <a:noFill/>
+        </p:spPr>
+        <p:txBody>
+          <a:bodyPr wrap="none">
+            <a:spAutoFit/>
+          </a:bodyPr>
+          <a:lstStyle/>
+          <a:p>
+            <a:pPr algn="ctr">
+              <a:defRPr sz="1600">
+                <a:solidFill>
+                  <a:srgbClr val="A855F7"/>
+                </a:solidFill>
+              </a:defRPr>
+            </a:pPr>
+            <a:r>
+              <a:t>Comece a aprender em 3 passos simples</a:t>
+            </a:r>
+          </a:p>
+        </p:txBody>
+      </p:sp>
+      <p:sp>
+        <p:nvSpPr>
+          <p:cNvPr id="5" name="Rounded Rectangle 4"/>
           <p:cNvSpPr/>
           <p:nvPr/>
         </p:nvSpPr>
         <p:spPr>
           <a:xfrm>
-            <a:off x="457200" y="731520"/>
-            <a:ext cx="8229600" cy="457200"/>
+            <a:off x="502920" y="1463040"/>
+            <a:ext cx="2651760" cy="2926080"/>
           </a:xfrm>
           <a:prstGeom prst="roundRect">
             <a:avLst/>
@@ -6745,8 +6220,10 @@
           <a:solidFill>
             <a:srgbClr val="251C45"/>
           </a:solidFill>
-          <a:ln>
-            <a:noFill/>
+          <a:ln w="25400">
+            <a:solidFill>
+              <a:srgbClr val="EC4899"/>
+            </a:solidFill>
           </a:ln>
         </p:spPr>
         <p:style>
@@ -6773,160 +6250,20 @@
       </p:sp>
       <p:sp>
         <p:nvSpPr>
-          <p:cNvPr id="5" name="TextBox 4"/>
-          <p:cNvSpPr txBox="1"/>
-          <p:nvPr/>
-        </p:nvSpPr>
-        <p:spPr>
-          <a:xfrm>
-            <a:off x="457200" y="822960"/>
-            <a:ext cx="2560320" cy="457200"/>
-          </a:xfrm>
-          <a:prstGeom prst="rect">
-            <a:avLst/>
-          </a:prstGeom>
-          <a:noFill/>
-        </p:spPr>
-        <p:txBody>
-          <a:bodyPr wrap="none" lIns="137160">
-            <a:spAutoFit/>
-          </a:bodyPr>
-          <a:lstStyle/>
-          <a:p>
-            <a:pPr algn="l">
-              <a:defRPr sz="1300" b="1">
-                <a:solidFill>
-                  <a:srgbClr val="FFFFFF"/>
-                </a:solidFill>
-              </a:defRPr>
-            </a:pPr>
-            <a:r>
-              <a:t>Recurso</a:t>
-            </a:r>
-          </a:p>
-        </p:txBody>
-      </p:sp>
-      <p:sp>
-        <p:nvSpPr>
-          <p:cNvPr id="6" name="TextBox 5"/>
-          <p:cNvSpPr txBox="1"/>
-          <p:nvPr/>
-        </p:nvSpPr>
-        <p:spPr>
-          <a:xfrm>
-            <a:off x="3017520" y="822960"/>
-            <a:ext cx="1828800" cy="457200"/>
-          </a:xfrm>
-          <a:prstGeom prst="rect">
-            <a:avLst/>
-          </a:prstGeom>
-          <a:noFill/>
-        </p:spPr>
-        <p:txBody>
-          <a:bodyPr wrap="none">
-            <a:spAutoFit/>
-          </a:bodyPr>
-          <a:lstStyle/>
-          <a:p>
-            <a:pPr algn="ctr">
-              <a:defRPr sz="1300" b="1">
-                <a:solidFill>
-                  <a:srgbClr val="A855F7"/>
-                </a:solidFill>
-              </a:defRPr>
-            </a:pPr>
-            <a:r>
-              <a:t>CorrectMe</a:t>
-            </a:r>
-          </a:p>
-        </p:txBody>
-      </p:sp>
-      <p:sp>
-        <p:nvSpPr>
-          <p:cNvPr id="7" name="TextBox 6"/>
-          <p:cNvSpPr txBox="1"/>
-          <p:nvPr/>
-        </p:nvSpPr>
-        <p:spPr>
-          <a:xfrm>
-            <a:off x="4846320" y="822960"/>
-            <a:ext cx="2011680" cy="457200"/>
-          </a:xfrm>
-          <a:prstGeom prst="rect">
-            <a:avLst/>
-          </a:prstGeom>
-          <a:noFill/>
-        </p:spPr>
-        <p:txBody>
-          <a:bodyPr wrap="none">
-            <a:spAutoFit/>
-          </a:bodyPr>
-          <a:lstStyle/>
-          <a:p>
-            <a:pPr algn="ctr">
-              <a:defRPr sz="1300" b="1">
-                <a:solidFill>
-                  <a:srgbClr val="FFFFFF"/>
-                </a:solidFill>
-              </a:defRPr>
-            </a:pPr>
-            <a:r>
-              <a:t>LanguageTool</a:t>
-            </a:r>
-          </a:p>
-        </p:txBody>
-      </p:sp>
-      <p:sp>
-        <p:nvSpPr>
-          <p:cNvPr id="8" name="TextBox 7"/>
-          <p:cNvSpPr txBox="1"/>
-          <p:nvPr/>
-        </p:nvSpPr>
-        <p:spPr>
-          <a:xfrm>
-            <a:off x="6858000" y="822960"/>
-            <a:ext cx="1828800" cy="457200"/>
-          </a:xfrm>
-          <a:prstGeom prst="rect">
-            <a:avLst/>
-          </a:prstGeom>
-          <a:noFill/>
-        </p:spPr>
-        <p:txBody>
-          <a:bodyPr wrap="none">
-            <a:spAutoFit/>
-          </a:bodyPr>
-          <a:lstStyle/>
-          <a:p>
-            <a:pPr algn="ctr">
-              <a:defRPr sz="1300" b="1">
-                <a:solidFill>
-                  <a:srgbClr val="FFFFFF"/>
-                </a:solidFill>
-              </a:defRPr>
-            </a:pPr>
-            <a:r>
-              <a:t>Scribbr</a:t>
-            </a:r>
-          </a:p>
-        </p:txBody>
-      </p:sp>
-      <p:sp>
-        <p:nvSpPr>
-          <p:cNvPr id="9" name="Rectangle 8"/>
+          <p:cNvPr id="6" name="Oval 5"/>
           <p:cNvSpPr/>
           <p:nvPr/>
         </p:nvSpPr>
         <p:spPr>
           <a:xfrm>
-            <a:off x="457200" y="1188720"/>
-            <a:ext cx="8229600" cy="457200"/>
-          </a:xfrm>
-          <a:prstGeom prst="rect">
+            <a:off x="1417320" y="1737360"/>
+            <a:ext cx="822960" cy="822960"/>
+          </a:xfrm>
+          <a:prstGeom prst="ellipse">
             <a:avLst/>
           </a:prstGeom>
           <a:solidFill>
-            <a:srgbClr val="191232"/>
+            <a:srgbClr val="EC4899"/>
           </a:solidFill>
           <a:ln>
             <a:noFill/>
@@ -6956,303 +6293,130 @@
       </p:sp>
       <p:sp>
         <p:nvSpPr>
-          <p:cNvPr id="10" name="TextBox 9"/>
-          <p:cNvSpPr txBox="1"/>
-          <p:nvPr/>
-        </p:nvSpPr>
-        <p:spPr>
-          <a:xfrm>
-            <a:off x="457200" y="1280160"/>
-            <a:ext cx="2560320" cy="457200"/>
-          </a:xfrm>
-          <a:prstGeom prst="rect">
-            <a:avLst/>
-          </a:prstGeom>
-          <a:noFill/>
-        </p:spPr>
-        <p:txBody>
-          <a:bodyPr wrap="none" lIns="137160">
-            <a:spAutoFit/>
-          </a:bodyPr>
-          <a:lstStyle/>
-          <a:p>
-            <a:pPr algn="l">
-              <a:defRPr sz="1100">
+          <p:cNvPr id="7" name="TextBox 6"/>
+          <p:cNvSpPr txBox="1"/>
+          <p:nvPr/>
+        </p:nvSpPr>
+        <p:spPr>
+          <a:xfrm>
+            <a:off x="1417320" y="1828800"/>
+            <a:ext cx="822960" cy="640080"/>
+          </a:xfrm>
+          <a:prstGeom prst="rect">
+            <a:avLst/>
+          </a:prstGeom>
+          <a:noFill/>
+        </p:spPr>
+        <p:txBody>
+          <a:bodyPr wrap="none">
+            <a:spAutoFit/>
+          </a:bodyPr>
+          <a:lstStyle/>
+          <a:p>
+            <a:pPr algn="ctr">
+              <a:defRPr sz="3600" b="1">
+                <a:solidFill>
+                  <a:srgbClr val="FFFFFF"/>
+                </a:solidFill>
+              </a:defRPr>
+            </a:pPr>
+            <a:r>
+              <a:t>1</a:t>
+            </a:r>
+          </a:p>
+        </p:txBody>
+      </p:sp>
+      <p:sp>
+        <p:nvSpPr>
+          <p:cNvPr id="8" name="TextBox 7"/>
+          <p:cNvSpPr txBox="1"/>
+          <p:nvPr/>
+        </p:nvSpPr>
+        <p:spPr>
+          <a:xfrm>
+            <a:off x="640080" y="2697480"/>
+            <a:ext cx="2377440" cy="457200"/>
+          </a:xfrm>
+          <a:prstGeom prst="rect">
+            <a:avLst/>
+          </a:prstGeom>
+          <a:noFill/>
+        </p:spPr>
+        <p:txBody>
+          <a:bodyPr wrap="square">
+            <a:spAutoFit/>
+          </a:bodyPr>
+          <a:lstStyle/>
+          <a:p>
+            <a:pPr algn="ctr">
+              <a:defRPr sz="1800" b="1">
+                <a:solidFill>
+                  <a:srgbClr val="FFFFFF"/>
+                </a:solidFill>
+              </a:defRPr>
+            </a:pPr>
+            <a:r>
+              <a:t>Escreva seu texto</a:t>
+            </a:r>
+          </a:p>
+        </p:txBody>
+      </p:sp>
+      <p:sp>
+        <p:nvSpPr>
+          <p:cNvPr id="9" name="TextBox 8"/>
+          <p:cNvSpPr txBox="1"/>
+          <p:nvPr/>
+        </p:nvSpPr>
+        <p:spPr>
+          <a:xfrm>
+            <a:off x="640080" y="3200400"/>
+            <a:ext cx="2377440" cy="1097280"/>
+          </a:xfrm>
+          <a:prstGeom prst="rect">
+            <a:avLst/>
+          </a:prstGeom>
+          <a:noFill/>
+        </p:spPr>
+        <p:txBody>
+          <a:bodyPr wrap="square">
+            <a:spAutoFit/>
+          </a:bodyPr>
+          <a:lstStyle/>
+          <a:p>
+            <a:pPr algn="ctr">
+              <a:defRPr sz="1200">
                 <a:solidFill>
                   <a:srgbClr val="9CA3AF"/>
                 </a:solidFill>
               </a:defRPr>
             </a:pPr>
             <a:r>
-              <a:t>Especializado em alemão</a:t>
-            </a:r>
-          </a:p>
-        </p:txBody>
-      </p:sp>
-      <p:sp>
-        <p:nvSpPr>
-          <p:cNvPr id="11" name="TextBox 10"/>
-          <p:cNvSpPr txBox="1"/>
-          <p:nvPr/>
-        </p:nvSpPr>
-        <p:spPr>
-          <a:xfrm>
-            <a:off x="3017520" y="1280160"/>
-            <a:ext cx="1828800" cy="457200"/>
-          </a:xfrm>
-          <a:prstGeom prst="rect">
-            <a:avLst/>
-          </a:prstGeom>
-          <a:noFill/>
-        </p:spPr>
-        <p:txBody>
-          <a:bodyPr wrap="none">
-            <a:spAutoFit/>
-          </a:bodyPr>
-          <a:lstStyle/>
-          <a:p>
-            <a:pPr algn="ctr">
-              <a:defRPr sz="1100" b="1">
-                <a:solidFill>
-                  <a:srgbClr val="22C55E"/>
-                </a:solidFill>
-              </a:defRPr>
-            </a:pPr>
-            <a:r>
-              <a:t>100%</a:t>
-            </a:r>
-          </a:p>
-        </p:txBody>
-      </p:sp>
-      <p:sp>
-        <p:nvSpPr>
-          <p:cNvPr id="12" name="TextBox 11"/>
-          <p:cNvSpPr txBox="1"/>
-          <p:nvPr/>
-        </p:nvSpPr>
-        <p:spPr>
-          <a:xfrm>
-            <a:off x="4846320" y="1280160"/>
-            <a:ext cx="2011680" cy="457200"/>
-          </a:xfrm>
-          <a:prstGeom prst="rect">
-            <a:avLst/>
-          </a:prstGeom>
-          <a:noFill/>
-        </p:spPr>
-        <p:txBody>
-          <a:bodyPr wrap="none">
-            <a:spAutoFit/>
-          </a:bodyPr>
-          <a:lstStyle/>
-          <a:p>
-            <a:pPr algn="ctr">
-              <a:defRPr sz="1100">
-                <a:solidFill>
-                  <a:srgbClr val="EAB308"/>
-                </a:solidFill>
-              </a:defRPr>
-            </a:pPr>
-            <a:r>
-              <a:t>Parcial</a:t>
-            </a:r>
-          </a:p>
-        </p:txBody>
-      </p:sp>
-      <p:sp>
-        <p:nvSpPr>
-          <p:cNvPr id="13" name="TextBox 12"/>
-          <p:cNvSpPr txBox="1"/>
-          <p:nvPr/>
-        </p:nvSpPr>
-        <p:spPr>
-          <a:xfrm>
-            <a:off x="6858000" y="1280160"/>
-            <a:ext cx="1828800" cy="457200"/>
-          </a:xfrm>
-          <a:prstGeom prst="rect">
-            <a:avLst/>
-          </a:prstGeom>
-          <a:noFill/>
-        </p:spPr>
-        <p:txBody>
-          <a:bodyPr wrap="none">
-            <a:spAutoFit/>
-          </a:bodyPr>
-          <a:lstStyle/>
-          <a:p>
-            <a:pPr algn="ctr">
-              <a:defRPr sz="1100">
-                <a:solidFill>
-                  <a:srgbClr val="EAB308"/>
-                </a:solidFill>
-              </a:defRPr>
-            </a:pPr>
-            <a:r>
-              <a:t>Parcial</a:t>
-            </a:r>
-          </a:p>
-        </p:txBody>
-      </p:sp>
-      <p:sp>
-        <p:nvSpPr>
-          <p:cNvPr id="14" name="TextBox 13"/>
-          <p:cNvSpPr txBox="1"/>
-          <p:nvPr/>
-        </p:nvSpPr>
-        <p:spPr>
-          <a:xfrm>
-            <a:off x="457200" y="1737360"/>
-            <a:ext cx="2560320" cy="457200"/>
-          </a:xfrm>
-          <a:prstGeom prst="rect">
-            <a:avLst/>
-          </a:prstGeom>
-          <a:noFill/>
-        </p:spPr>
-        <p:txBody>
-          <a:bodyPr wrap="none" lIns="137160">
-            <a:spAutoFit/>
-          </a:bodyPr>
-          <a:lstStyle/>
-          <a:p>
-            <a:pPr algn="l">
-              <a:defRPr sz="1100">
-                <a:solidFill>
-                  <a:srgbClr val="9CA3AF"/>
-                </a:solidFill>
-              </a:defRPr>
-            </a:pPr>
-            <a:r>
-              <a:t>Feedback pedagógico</a:t>
-            </a:r>
-          </a:p>
-        </p:txBody>
-      </p:sp>
-      <p:sp>
-        <p:nvSpPr>
-          <p:cNvPr id="15" name="TextBox 14"/>
-          <p:cNvSpPr txBox="1"/>
-          <p:nvPr/>
-        </p:nvSpPr>
-        <p:spPr>
-          <a:xfrm>
-            <a:off x="3017520" y="1737360"/>
-            <a:ext cx="1828800" cy="457200"/>
-          </a:xfrm>
-          <a:prstGeom prst="rect">
-            <a:avLst/>
-          </a:prstGeom>
-          <a:noFill/>
-        </p:spPr>
-        <p:txBody>
-          <a:bodyPr wrap="none">
-            <a:spAutoFit/>
-          </a:bodyPr>
-          <a:lstStyle/>
-          <a:p>
-            <a:pPr algn="ctr">
-              <a:defRPr sz="1100" b="1">
-                <a:solidFill>
-                  <a:srgbClr val="22C55E"/>
-                </a:solidFill>
-              </a:defRPr>
-            </a:pPr>
-            <a:r>
-              <a:t>Sim</a:t>
-            </a:r>
-          </a:p>
-        </p:txBody>
-      </p:sp>
-      <p:sp>
-        <p:nvSpPr>
-          <p:cNvPr id="16" name="TextBox 15"/>
-          <p:cNvSpPr txBox="1"/>
-          <p:nvPr/>
-        </p:nvSpPr>
-        <p:spPr>
-          <a:xfrm>
-            <a:off x="4846320" y="1737360"/>
-            <a:ext cx="2011680" cy="457200"/>
-          </a:xfrm>
-          <a:prstGeom prst="rect">
-            <a:avLst/>
-          </a:prstGeom>
-          <a:noFill/>
-        </p:spPr>
-        <p:txBody>
-          <a:bodyPr wrap="none">
-            <a:spAutoFit/>
-          </a:bodyPr>
-          <a:lstStyle/>
-          <a:p>
-            <a:pPr algn="ctr">
-              <a:defRPr sz="1100">
-                <a:solidFill>
-                  <a:srgbClr val="EF4444"/>
-                </a:solidFill>
-              </a:defRPr>
-            </a:pPr>
-            <a:r>
-              <a:t>Não</a:t>
-            </a:r>
-          </a:p>
-        </p:txBody>
-      </p:sp>
-      <p:sp>
-        <p:nvSpPr>
-          <p:cNvPr id="17" name="TextBox 16"/>
-          <p:cNvSpPr txBox="1"/>
-          <p:nvPr/>
-        </p:nvSpPr>
-        <p:spPr>
-          <a:xfrm>
-            <a:off x="6858000" y="1737360"/>
-            <a:ext cx="1828800" cy="457200"/>
-          </a:xfrm>
-          <a:prstGeom prst="rect">
-            <a:avLst/>
-          </a:prstGeom>
-          <a:noFill/>
-        </p:spPr>
-        <p:txBody>
-          <a:bodyPr wrap="none">
-            <a:spAutoFit/>
-          </a:bodyPr>
-          <a:lstStyle/>
-          <a:p>
-            <a:pPr algn="ctr">
-              <a:defRPr sz="1100">
-                <a:solidFill>
-                  <a:srgbClr val="EAB308"/>
-                </a:solidFill>
-              </a:defRPr>
-            </a:pPr>
-            <a:r>
-              <a:t>Limitado</a:t>
-            </a:r>
-          </a:p>
-        </p:txBody>
-      </p:sp>
-      <p:sp>
-        <p:nvSpPr>
-          <p:cNvPr id="18" name="Rectangle 17"/>
+              <a:t>Cole ou digite sua redação em alemão. Nosso editor inteligente aceita qualquer texto.</a:t>
+            </a:r>
+          </a:p>
+        </p:txBody>
+      </p:sp>
+      <p:sp>
+        <p:nvSpPr>
+          <p:cNvPr id="10" name="Rounded Rectangle 9"/>
           <p:cNvSpPr/>
           <p:nvPr/>
         </p:nvSpPr>
         <p:spPr>
           <a:xfrm>
-            <a:off x="457200" y="2103120"/>
-            <a:ext cx="8229600" cy="457200"/>
-          </a:xfrm>
-          <a:prstGeom prst="rect">
+            <a:off x="3383280" y="1463040"/>
+            <a:ext cx="2651760" cy="2926080"/>
+          </a:xfrm>
+          <a:prstGeom prst="roundRect">
             <a:avLst/>
           </a:prstGeom>
           <a:solidFill>
-            <a:srgbClr val="191232"/>
+            <a:srgbClr val="251C45"/>
           </a:solidFill>
-          <a:ln>
-            <a:noFill/>
+          <a:ln w="25400">
+            <a:solidFill>
+              <a:srgbClr val="A855F7"/>
+            </a:solidFill>
           </a:ln>
         </p:spPr>
         <p:style>
@@ -7279,300 +6443,20 @@
       </p:sp>
       <p:sp>
         <p:nvSpPr>
-          <p:cNvPr id="19" name="TextBox 18"/>
-          <p:cNvSpPr txBox="1"/>
-          <p:nvPr/>
-        </p:nvSpPr>
-        <p:spPr>
-          <a:xfrm>
-            <a:off x="457200" y="2194560"/>
-            <a:ext cx="2560320" cy="457200"/>
-          </a:xfrm>
-          <a:prstGeom prst="rect">
-            <a:avLst/>
-          </a:prstGeom>
-          <a:noFill/>
-        </p:spPr>
-        <p:txBody>
-          <a:bodyPr wrap="none" lIns="137160">
-            <a:spAutoFit/>
-          </a:bodyPr>
-          <a:lstStyle/>
-          <a:p>
-            <a:pPr algn="l">
-              <a:defRPr sz="1100">
-                <a:solidFill>
-                  <a:srgbClr val="9CA3AF"/>
-                </a:solidFill>
-              </a:defRPr>
-            </a:pPr>
-            <a:r>
-              <a:t>Categorização de erros</a:t>
-            </a:r>
-          </a:p>
-        </p:txBody>
-      </p:sp>
-      <p:sp>
-        <p:nvSpPr>
-          <p:cNvPr id="20" name="TextBox 19"/>
-          <p:cNvSpPr txBox="1"/>
-          <p:nvPr/>
-        </p:nvSpPr>
-        <p:spPr>
-          <a:xfrm>
-            <a:off x="3017520" y="2194560"/>
-            <a:ext cx="1828800" cy="457200"/>
-          </a:xfrm>
-          <a:prstGeom prst="rect">
-            <a:avLst/>
-          </a:prstGeom>
-          <a:noFill/>
-        </p:spPr>
-        <p:txBody>
-          <a:bodyPr wrap="none">
-            <a:spAutoFit/>
-          </a:bodyPr>
-          <a:lstStyle/>
-          <a:p>
-            <a:pPr algn="ctr">
-              <a:defRPr sz="1100" b="1">
-                <a:solidFill>
-                  <a:srgbClr val="22C55E"/>
-                </a:solidFill>
-              </a:defRPr>
-            </a:pPr>
-            <a:r>
-              <a:t>Sim</a:t>
-            </a:r>
-          </a:p>
-        </p:txBody>
-      </p:sp>
-      <p:sp>
-        <p:nvSpPr>
-          <p:cNvPr id="21" name="TextBox 20"/>
-          <p:cNvSpPr txBox="1"/>
-          <p:nvPr/>
-        </p:nvSpPr>
-        <p:spPr>
-          <a:xfrm>
-            <a:off x="4846320" y="2194560"/>
-            <a:ext cx="2011680" cy="457200"/>
-          </a:xfrm>
-          <a:prstGeom prst="rect">
-            <a:avLst/>
-          </a:prstGeom>
-          <a:noFill/>
-        </p:spPr>
-        <p:txBody>
-          <a:bodyPr wrap="none">
-            <a:spAutoFit/>
-          </a:bodyPr>
-          <a:lstStyle/>
-          <a:p>
-            <a:pPr algn="ctr">
-              <a:defRPr sz="1100">
-                <a:solidFill>
-                  <a:srgbClr val="EF4444"/>
-                </a:solidFill>
-              </a:defRPr>
-            </a:pPr>
-            <a:r>
-              <a:t>Não</a:t>
-            </a:r>
-          </a:p>
-        </p:txBody>
-      </p:sp>
-      <p:sp>
-        <p:nvSpPr>
-          <p:cNvPr id="22" name="TextBox 21"/>
-          <p:cNvSpPr txBox="1"/>
-          <p:nvPr/>
-        </p:nvSpPr>
-        <p:spPr>
-          <a:xfrm>
-            <a:off x="6858000" y="2194560"/>
-            <a:ext cx="1828800" cy="457200"/>
-          </a:xfrm>
-          <a:prstGeom prst="rect">
-            <a:avLst/>
-          </a:prstGeom>
-          <a:noFill/>
-        </p:spPr>
-        <p:txBody>
-          <a:bodyPr wrap="none">
-            <a:spAutoFit/>
-          </a:bodyPr>
-          <a:lstStyle/>
-          <a:p>
-            <a:pPr algn="ctr">
-              <a:defRPr sz="1100">
-                <a:solidFill>
-                  <a:srgbClr val="EF4444"/>
-                </a:solidFill>
-              </a:defRPr>
-            </a:pPr>
-            <a:r>
-              <a:t>Não</a:t>
-            </a:r>
-          </a:p>
-        </p:txBody>
-      </p:sp>
-      <p:sp>
-        <p:nvSpPr>
-          <p:cNvPr id="23" name="TextBox 22"/>
-          <p:cNvSpPr txBox="1"/>
-          <p:nvPr/>
-        </p:nvSpPr>
-        <p:spPr>
-          <a:xfrm>
-            <a:off x="457200" y="2651760"/>
-            <a:ext cx="2560320" cy="457200"/>
-          </a:xfrm>
-          <a:prstGeom prst="rect">
-            <a:avLst/>
-          </a:prstGeom>
-          <a:noFill/>
-        </p:spPr>
-        <p:txBody>
-          <a:bodyPr wrap="none" lIns="137160">
-            <a:spAutoFit/>
-          </a:bodyPr>
-          <a:lstStyle/>
-          <a:p>
-            <a:pPr algn="l">
-              <a:defRPr sz="1100">
-                <a:solidFill>
-                  <a:srgbClr val="9CA3AF"/>
-                </a:solidFill>
-              </a:defRPr>
-            </a:pPr>
-            <a:r>
-              <a:t>Flashcards integrados</a:t>
-            </a:r>
-          </a:p>
-        </p:txBody>
-      </p:sp>
-      <p:sp>
-        <p:nvSpPr>
-          <p:cNvPr id="24" name="TextBox 23"/>
-          <p:cNvSpPr txBox="1"/>
-          <p:nvPr/>
-        </p:nvSpPr>
-        <p:spPr>
-          <a:xfrm>
-            <a:off x="3017520" y="2651760"/>
-            <a:ext cx="1828800" cy="457200"/>
-          </a:xfrm>
-          <a:prstGeom prst="rect">
-            <a:avLst/>
-          </a:prstGeom>
-          <a:noFill/>
-        </p:spPr>
-        <p:txBody>
-          <a:bodyPr wrap="none">
-            <a:spAutoFit/>
-          </a:bodyPr>
-          <a:lstStyle/>
-          <a:p>
-            <a:pPr algn="ctr">
-              <a:defRPr sz="1100" b="1">
-                <a:solidFill>
-                  <a:srgbClr val="22C55E"/>
-                </a:solidFill>
-              </a:defRPr>
-            </a:pPr>
-            <a:r>
-              <a:t>Sim</a:t>
-            </a:r>
-          </a:p>
-        </p:txBody>
-      </p:sp>
-      <p:sp>
-        <p:nvSpPr>
-          <p:cNvPr id="25" name="TextBox 24"/>
-          <p:cNvSpPr txBox="1"/>
-          <p:nvPr/>
-        </p:nvSpPr>
-        <p:spPr>
-          <a:xfrm>
-            <a:off x="4846320" y="2651760"/>
-            <a:ext cx="2011680" cy="457200"/>
-          </a:xfrm>
-          <a:prstGeom prst="rect">
-            <a:avLst/>
-          </a:prstGeom>
-          <a:noFill/>
-        </p:spPr>
-        <p:txBody>
-          <a:bodyPr wrap="none">
-            <a:spAutoFit/>
-          </a:bodyPr>
-          <a:lstStyle/>
-          <a:p>
-            <a:pPr algn="ctr">
-              <a:defRPr sz="1100">
-                <a:solidFill>
-                  <a:srgbClr val="EF4444"/>
-                </a:solidFill>
-              </a:defRPr>
-            </a:pPr>
-            <a:r>
-              <a:t>Não</a:t>
-            </a:r>
-          </a:p>
-        </p:txBody>
-      </p:sp>
-      <p:sp>
-        <p:nvSpPr>
-          <p:cNvPr id="26" name="TextBox 25"/>
-          <p:cNvSpPr txBox="1"/>
-          <p:nvPr/>
-        </p:nvSpPr>
-        <p:spPr>
-          <a:xfrm>
-            <a:off x="6858000" y="2651760"/>
-            <a:ext cx="1828800" cy="457200"/>
-          </a:xfrm>
-          <a:prstGeom prst="rect">
-            <a:avLst/>
-          </a:prstGeom>
-          <a:noFill/>
-        </p:spPr>
-        <p:txBody>
-          <a:bodyPr wrap="none">
-            <a:spAutoFit/>
-          </a:bodyPr>
-          <a:lstStyle/>
-          <a:p>
-            <a:pPr algn="ctr">
-              <a:defRPr sz="1100">
-                <a:solidFill>
-                  <a:srgbClr val="EF4444"/>
-                </a:solidFill>
-              </a:defRPr>
-            </a:pPr>
-            <a:r>
-              <a:t>Não</a:t>
-            </a:r>
-          </a:p>
-        </p:txBody>
-      </p:sp>
-      <p:sp>
-        <p:nvSpPr>
-          <p:cNvPr id="27" name="Rectangle 26"/>
+          <p:cNvPr id="11" name="Oval 10"/>
           <p:cNvSpPr/>
           <p:nvPr/>
         </p:nvSpPr>
         <p:spPr>
           <a:xfrm>
-            <a:off x="457200" y="3017520"/>
-            <a:ext cx="8229600" cy="457200"/>
-          </a:xfrm>
-          <a:prstGeom prst="rect">
+            <a:off x="4297680" y="1737360"/>
+            <a:ext cx="822960" cy="822960"/>
+          </a:xfrm>
+          <a:prstGeom prst="ellipse">
             <a:avLst/>
           </a:prstGeom>
           <a:solidFill>
-            <a:srgbClr val="191232"/>
+            <a:srgbClr val="A855F7"/>
           </a:solidFill>
           <a:ln>
             <a:noFill/>
@@ -7602,303 +6486,130 @@
       </p:sp>
       <p:sp>
         <p:nvSpPr>
-          <p:cNvPr id="28" name="TextBox 27"/>
-          <p:cNvSpPr txBox="1"/>
-          <p:nvPr/>
-        </p:nvSpPr>
-        <p:spPr>
-          <a:xfrm>
-            <a:off x="457200" y="3108960"/>
-            <a:ext cx="2560320" cy="457200"/>
-          </a:xfrm>
-          <a:prstGeom prst="rect">
-            <a:avLst/>
-          </a:prstGeom>
-          <a:noFill/>
-        </p:spPr>
-        <p:txBody>
-          <a:bodyPr wrap="none" lIns="137160">
-            <a:spAutoFit/>
-          </a:bodyPr>
-          <a:lstStyle/>
-          <a:p>
-            <a:pPr algn="l">
-              <a:defRPr sz="1100">
+          <p:cNvPr id="12" name="TextBox 11"/>
+          <p:cNvSpPr txBox="1"/>
+          <p:nvPr/>
+        </p:nvSpPr>
+        <p:spPr>
+          <a:xfrm>
+            <a:off x="4297680" y="1828800"/>
+            <a:ext cx="822960" cy="640080"/>
+          </a:xfrm>
+          <a:prstGeom prst="rect">
+            <a:avLst/>
+          </a:prstGeom>
+          <a:noFill/>
+        </p:spPr>
+        <p:txBody>
+          <a:bodyPr wrap="none">
+            <a:spAutoFit/>
+          </a:bodyPr>
+          <a:lstStyle/>
+          <a:p>
+            <a:pPr algn="ctr">
+              <a:defRPr sz="3600" b="1">
+                <a:solidFill>
+                  <a:srgbClr val="FFFFFF"/>
+                </a:solidFill>
+              </a:defRPr>
+            </a:pPr>
+            <a:r>
+              <a:t>2</a:t>
+            </a:r>
+          </a:p>
+        </p:txBody>
+      </p:sp>
+      <p:sp>
+        <p:nvSpPr>
+          <p:cNvPr id="13" name="TextBox 12"/>
+          <p:cNvSpPr txBox="1"/>
+          <p:nvPr/>
+        </p:nvSpPr>
+        <p:spPr>
+          <a:xfrm>
+            <a:off x="3520440" y="2697480"/>
+            <a:ext cx="2377440" cy="457200"/>
+          </a:xfrm>
+          <a:prstGeom prst="rect">
+            <a:avLst/>
+          </a:prstGeom>
+          <a:noFill/>
+        </p:spPr>
+        <p:txBody>
+          <a:bodyPr wrap="square">
+            <a:spAutoFit/>
+          </a:bodyPr>
+          <a:lstStyle/>
+          <a:p>
+            <a:pPr algn="ctr">
+              <a:defRPr sz="1800" b="1">
+                <a:solidFill>
+                  <a:srgbClr val="FFFFFF"/>
+                </a:solidFill>
+              </a:defRPr>
+            </a:pPr>
+            <a:r>
+              <a:t>Receba a análise</a:t>
+            </a:r>
+          </a:p>
+        </p:txBody>
+      </p:sp>
+      <p:sp>
+        <p:nvSpPr>
+          <p:cNvPr id="14" name="TextBox 13"/>
+          <p:cNvSpPr txBox="1"/>
+          <p:nvPr/>
+        </p:nvSpPr>
+        <p:spPr>
+          <a:xfrm>
+            <a:off x="3520440" y="3200400"/>
+            <a:ext cx="2377440" cy="1097280"/>
+          </a:xfrm>
+          <a:prstGeom prst="rect">
+            <a:avLst/>
+          </a:prstGeom>
+          <a:noFill/>
+        </p:spPr>
+        <p:txBody>
+          <a:bodyPr wrap="square">
+            <a:spAutoFit/>
+          </a:bodyPr>
+          <a:lstStyle/>
+          <a:p>
+            <a:pPr algn="ctr">
+              <a:defRPr sz="1200">
                 <a:solidFill>
                   <a:srgbClr val="9CA3AF"/>
                 </a:solidFill>
               </a:defRPr>
             </a:pPr>
             <a:r>
-              <a:t>Listas de vocabulário</a:t>
-            </a:r>
-          </a:p>
-        </p:txBody>
-      </p:sp>
-      <p:sp>
-        <p:nvSpPr>
-          <p:cNvPr id="29" name="TextBox 28"/>
-          <p:cNvSpPr txBox="1"/>
-          <p:nvPr/>
-        </p:nvSpPr>
-        <p:spPr>
-          <a:xfrm>
-            <a:off x="3017520" y="3108960"/>
-            <a:ext cx="1828800" cy="457200"/>
-          </a:xfrm>
-          <a:prstGeom prst="rect">
-            <a:avLst/>
-          </a:prstGeom>
-          <a:noFill/>
-        </p:spPr>
-        <p:txBody>
-          <a:bodyPr wrap="none">
-            <a:spAutoFit/>
-          </a:bodyPr>
-          <a:lstStyle/>
-          <a:p>
-            <a:pPr algn="ctr">
-              <a:defRPr sz="1100" b="1">
-                <a:solidFill>
-                  <a:srgbClr val="22C55E"/>
-                </a:solidFill>
-              </a:defRPr>
-            </a:pPr>
-            <a:r>
-              <a:t>Sim</a:t>
-            </a:r>
-          </a:p>
-        </p:txBody>
-      </p:sp>
-      <p:sp>
-        <p:nvSpPr>
-          <p:cNvPr id="30" name="TextBox 29"/>
-          <p:cNvSpPr txBox="1"/>
-          <p:nvPr/>
-        </p:nvSpPr>
-        <p:spPr>
-          <a:xfrm>
-            <a:off x="4846320" y="3108960"/>
-            <a:ext cx="2011680" cy="457200"/>
-          </a:xfrm>
-          <a:prstGeom prst="rect">
-            <a:avLst/>
-          </a:prstGeom>
-          <a:noFill/>
-        </p:spPr>
-        <p:txBody>
-          <a:bodyPr wrap="none">
-            <a:spAutoFit/>
-          </a:bodyPr>
-          <a:lstStyle/>
-          <a:p>
-            <a:pPr algn="ctr">
-              <a:defRPr sz="1100">
-                <a:solidFill>
-                  <a:srgbClr val="EF4444"/>
-                </a:solidFill>
-              </a:defRPr>
-            </a:pPr>
-            <a:r>
-              <a:t>Não</a:t>
-            </a:r>
-          </a:p>
-        </p:txBody>
-      </p:sp>
-      <p:sp>
-        <p:nvSpPr>
-          <p:cNvPr id="31" name="TextBox 30"/>
-          <p:cNvSpPr txBox="1"/>
-          <p:nvPr/>
-        </p:nvSpPr>
-        <p:spPr>
-          <a:xfrm>
-            <a:off x="6858000" y="3108960"/>
-            <a:ext cx="1828800" cy="457200"/>
-          </a:xfrm>
-          <a:prstGeom prst="rect">
-            <a:avLst/>
-          </a:prstGeom>
-          <a:noFill/>
-        </p:spPr>
-        <p:txBody>
-          <a:bodyPr wrap="none">
-            <a:spAutoFit/>
-          </a:bodyPr>
-          <a:lstStyle/>
-          <a:p>
-            <a:pPr algn="ctr">
-              <a:defRPr sz="1100">
-                <a:solidFill>
-                  <a:srgbClr val="EF4444"/>
-                </a:solidFill>
-              </a:defRPr>
-            </a:pPr>
-            <a:r>
-              <a:t>Não</a:t>
-            </a:r>
-          </a:p>
-        </p:txBody>
-      </p:sp>
-      <p:sp>
-        <p:nvSpPr>
-          <p:cNvPr id="32" name="TextBox 31"/>
-          <p:cNvSpPr txBox="1"/>
-          <p:nvPr/>
-        </p:nvSpPr>
-        <p:spPr>
-          <a:xfrm>
-            <a:off x="457200" y="3566160"/>
-            <a:ext cx="2560320" cy="457200"/>
-          </a:xfrm>
-          <a:prstGeom prst="rect">
-            <a:avLst/>
-          </a:prstGeom>
-          <a:noFill/>
-        </p:spPr>
-        <p:txBody>
-          <a:bodyPr wrap="none" lIns="137160">
-            <a:spAutoFit/>
-          </a:bodyPr>
-          <a:lstStyle/>
-          <a:p>
-            <a:pPr algn="l">
-              <a:defRPr sz="1100">
-                <a:solidFill>
-                  <a:srgbClr val="9CA3AF"/>
-                </a:solidFill>
-              </a:defRPr>
-            </a:pPr>
-            <a:r>
-              <a:t>Chatbot para prática</a:t>
-            </a:r>
-          </a:p>
-        </p:txBody>
-      </p:sp>
-      <p:sp>
-        <p:nvSpPr>
-          <p:cNvPr id="33" name="TextBox 32"/>
-          <p:cNvSpPr txBox="1"/>
-          <p:nvPr/>
-        </p:nvSpPr>
-        <p:spPr>
-          <a:xfrm>
-            <a:off x="3017520" y="3566160"/>
-            <a:ext cx="1828800" cy="457200"/>
-          </a:xfrm>
-          <a:prstGeom prst="rect">
-            <a:avLst/>
-          </a:prstGeom>
-          <a:noFill/>
-        </p:spPr>
-        <p:txBody>
-          <a:bodyPr wrap="none">
-            <a:spAutoFit/>
-          </a:bodyPr>
-          <a:lstStyle/>
-          <a:p>
-            <a:pPr algn="ctr">
-              <a:defRPr sz="1100" b="1">
-                <a:solidFill>
-                  <a:srgbClr val="22C55E"/>
-                </a:solidFill>
-              </a:defRPr>
-            </a:pPr>
-            <a:r>
-              <a:t>Sim</a:t>
-            </a:r>
-          </a:p>
-        </p:txBody>
-      </p:sp>
-      <p:sp>
-        <p:nvSpPr>
-          <p:cNvPr id="34" name="TextBox 33"/>
-          <p:cNvSpPr txBox="1"/>
-          <p:nvPr/>
-        </p:nvSpPr>
-        <p:spPr>
-          <a:xfrm>
-            <a:off x="4846320" y="3566160"/>
-            <a:ext cx="2011680" cy="457200"/>
-          </a:xfrm>
-          <a:prstGeom prst="rect">
-            <a:avLst/>
-          </a:prstGeom>
-          <a:noFill/>
-        </p:spPr>
-        <p:txBody>
-          <a:bodyPr wrap="none">
-            <a:spAutoFit/>
-          </a:bodyPr>
-          <a:lstStyle/>
-          <a:p>
-            <a:pPr algn="ctr">
-              <a:defRPr sz="1100">
-                <a:solidFill>
-                  <a:srgbClr val="EF4444"/>
-                </a:solidFill>
-              </a:defRPr>
-            </a:pPr>
-            <a:r>
-              <a:t>Não</a:t>
-            </a:r>
-          </a:p>
-        </p:txBody>
-      </p:sp>
-      <p:sp>
-        <p:nvSpPr>
-          <p:cNvPr id="35" name="TextBox 34"/>
-          <p:cNvSpPr txBox="1"/>
-          <p:nvPr/>
-        </p:nvSpPr>
-        <p:spPr>
-          <a:xfrm>
-            <a:off x="6858000" y="3566160"/>
-            <a:ext cx="1828800" cy="457200"/>
-          </a:xfrm>
-          <a:prstGeom prst="rect">
-            <a:avLst/>
-          </a:prstGeom>
-          <a:noFill/>
-        </p:spPr>
-        <p:txBody>
-          <a:bodyPr wrap="none">
-            <a:spAutoFit/>
-          </a:bodyPr>
-          <a:lstStyle/>
-          <a:p>
-            <a:pPr algn="ctr">
-              <a:defRPr sz="1100">
-                <a:solidFill>
-                  <a:srgbClr val="EF4444"/>
-                </a:solidFill>
-              </a:defRPr>
-            </a:pPr>
-            <a:r>
-              <a:t>Não</a:t>
-            </a:r>
-          </a:p>
-        </p:txBody>
-      </p:sp>
-      <p:sp>
-        <p:nvSpPr>
-          <p:cNvPr id="36" name="Rectangle 35"/>
+              <a:t>Nossa IA identifica erros, categoriza por tipo e explica cada correção em português.</a:t>
+            </a:r>
+          </a:p>
+        </p:txBody>
+      </p:sp>
+      <p:sp>
+        <p:nvSpPr>
+          <p:cNvPr id="15" name="Rounded Rectangle 14"/>
           <p:cNvSpPr/>
           <p:nvPr/>
         </p:nvSpPr>
         <p:spPr>
           <a:xfrm>
-            <a:off x="457200" y="3931920"/>
-            <a:ext cx="8229600" cy="457200"/>
-          </a:xfrm>
-          <a:prstGeom prst="rect">
+            <a:off x="6263640" y="1463040"/>
+            <a:ext cx="2651760" cy="2926080"/>
+          </a:xfrm>
+          <a:prstGeom prst="roundRect">
             <a:avLst/>
           </a:prstGeom>
           <a:solidFill>
-            <a:srgbClr val="191232"/>
+            <a:srgbClr val="251C45"/>
           </a:solidFill>
-          <a:ln>
-            <a:noFill/>
+          <a:ln w="25400">
+            <a:solidFill>
+              <a:srgbClr val="22C55E"/>
+            </a:solidFill>
           </a:ln>
         </p:spPr>
         <p:style>
@@ -7925,49 +6636,162 @@
       </p:sp>
       <p:sp>
         <p:nvSpPr>
-          <p:cNvPr id="37" name="TextBox 36"/>
-          <p:cNvSpPr txBox="1"/>
-          <p:nvPr/>
-        </p:nvSpPr>
-        <p:spPr>
-          <a:xfrm>
-            <a:off x="457200" y="4023360"/>
-            <a:ext cx="2560320" cy="457200"/>
-          </a:xfrm>
-          <a:prstGeom prst="rect">
-            <a:avLst/>
-          </a:prstGeom>
-          <a:noFill/>
-        </p:spPr>
-        <p:txBody>
-          <a:bodyPr wrap="none" lIns="137160">
-            <a:spAutoFit/>
-          </a:bodyPr>
-          <a:lstStyle/>
-          <a:p>
-            <a:pPr algn="l">
-              <a:defRPr sz="1100">
+          <p:cNvPr id="16" name="Oval 15"/>
+          <p:cNvSpPr/>
+          <p:nvPr/>
+        </p:nvSpPr>
+        <p:spPr>
+          <a:xfrm>
+            <a:off x="7178040" y="1737360"/>
+            <a:ext cx="822960" cy="822960"/>
+          </a:xfrm>
+          <a:prstGeom prst="ellipse">
+            <a:avLst/>
+          </a:prstGeom>
+          <a:solidFill>
+            <a:srgbClr val="22C55E"/>
+          </a:solidFill>
+          <a:ln>
+            <a:noFill/>
+          </a:ln>
+        </p:spPr>
+        <p:style>
+          <a:lnRef idx="1">
+            <a:schemeClr val="accent1"/>
+          </a:lnRef>
+          <a:fillRef idx="3">
+            <a:schemeClr val="accent1"/>
+          </a:fillRef>
+          <a:effectRef idx="2">
+            <a:schemeClr val="accent1"/>
+          </a:effectRef>
+          <a:fontRef idx="minor">
+            <a:schemeClr val="lt1"/>
+          </a:fontRef>
+        </p:style>
+        <p:txBody>
+          <a:bodyPr rtlCol="0" anchor="ctr"/>
+          <a:lstStyle/>
+          <a:p>
+            <a:pPr algn="ctr"/>
+          </a:p>
+        </p:txBody>
+      </p:sp>
+      <p:sp>
+        <p:nvSpPr>
+          <p:cNvPr id="17" name="TextBox 16"/>
+          <p:cNvSpPr txBox="1"/>
+          <p:nvPr/>
+        </p:nvSpPr>
+        <p:spPr>
+          <a:xfrm>
+            <a:off x="7178040" y="1828800"/>
+            <a:ext cx="822960" cy="640080"/>
+          </a:xfrm>
+          <a:prstGeom prst="rect">
+            <a:avLst/>
+          </a:prstGeom>
+          <a:noFill/>
+        </p:spPr>
+        <p:txBody>
+          <a:bodyPr wrap="none">
+            <a:spAutoFit/>
+          </a:bodyPr>
+          <a:lstStyle/>
+          <a:p>
+            <a:pPr algn="ctr">
+              <a:defRPr sz="3600" b="1">
+                <a:solidFill>
+                  <a:srgbClr val="FFFFFF"/>
+                </a:solidFill>
+              </a:defRPr>
+            </a:pPr>
+            <a:r>
+              <a:t>3</a:t>
+            </a:r>
+          </a:p>
+        </p:txBody>
+      </p:sp>
+      <p:sp>
+        <p:nvSpPr>
+          <p:cNvPr id="18" name="TextBox 17"/>
+          <p:cNvSpPr txBox="1"/>
+          <p:nvPr/>
+        </p:nvSpPr>
+        <p:spPr>
+          <a:xfrm>
+            <a:off x="6400800" y="2697480"/>
+            <a:ext cx="2377440" cy="457200"/>
+          </a:xfrm>
+          <a:prstGeom prst="rect">
+            <a:avLst/>
+          </a:prstGeom>
+          <a:noFill/>
+        </p:spPr>
+        <p:txBody>
+          <a:bodyPr wrap="square">
+            <a:spAutoFit/>
+          </a:bodyPr>
+          <a:lstStyle/>
+          <a:p>
+            <a:pPr algn="ctr">
+              <a:defRPr sz="1800" b="1">
+                <a:solidFill>
+                  <a:srgbClr val="FFFFFF"/>
+                </a:solidFill>
+              </a:defRPr>
+            </a:pPr>
+            <a:r>
+              <a:t>Acompanhe sua evolução</a:t>
+            </a:r>
+          </a:p>
+        </p:txBody>
+      </p:sp>
+      <p:sp>
+        <p:nvSpPr>
+          <p:cNvPr id="19" name="TextBox 18"/>
+          <p:cNvSpPr txBox="1"/>
+          <p:nvPr/>
+        </p:nvSpPr>
+        <p:spPr>
+          <a:xfrm>
+            <a:off x="6400800" y="3200400"/>
+            <a:ext cx="2377440" cy="1097280"/>
+          </a:xfrm>
+          <a:prstGeom prst="rect">
+            <a:avLst/>
+          </a:prstGeom>
+          <a:noFill/>
+        </p:spPr>
+        <p:txBody>
+          <a:bodyPr wrap="square">
+            <a:spAutoFit/>
+          </a:bodyPr>
+          <a:lstStyle/>
+          <a:p>
+            <a:pPr algn="ctr">
+              <a:defRPr sz="1200">
                 <a:solidFill>
                   <a:srgbClr val="9CA3AF"/>
                 </a:solidFill>
               </a:defRPr>
             </a:pPr>
             <a:r>
-              <a:t>Prática de conversação</a:t>
-            </a:r>
-          </a:p>
-        </p:txBody>
-      </p:sp>
-      <p:sp>
-        <p:nvSpPr>
-          <p:cNvPr id="38" name="TextBox 37"/>
-          <p:cNvSpPr txBox="1"/>
-          <p:nvPr/>
-        </p:nvSpPr>
-        <p:spPr>
-          <a:xfrm>
-            <a:off x="3017520" y="4023360"/>
-            <a:ext cx="1828800" cy="457200"/>
+              <a:t>Visualize seu progresso no dashboard, pratique com flashcards e melhore continuamente.</a:t>
+            </a:r>
+          </a:p>
+        </p:txBody>
+      </p:sp>
+      <p:sp>
+        <p:nvSpPr>
+          <p:cNvPr id="20" name="TextBox 19"/>
+          <p:cNvSpPr txBox="1"/>
+          <p:nvPr/>
+        </p:nvSpPr>
+        <p:spPr>
+          <a:xfrm>
+            <a:off x="3108960" y="2834640"/>
+            <a:ext cx="274320" cy="274320"/>
           </a:xfrm>
           <a:prstGeom prst="rect">
             <a:avLst/>
@@ -7981,28 +6805,28 @@
           <a:lstStyle/>
           <a:p>
             <a:pPr algn="ctr">
-              <a:defRPr sz="1100" b="1">
-                <a:solidFill>
-                  <a:srgbClr val="22C55E"/>
-                </a:solidFill>
-              </a:defRPr>
-            </a:pPr>
-            <a:r>
-              <a:t>Sim</a:t>
-            </a:r>
-          </a:p>
-        </p:txBody>
-      </p:sp>
-      <p:sp>
-        <p:nvSpPr>
-          <p:cNvPr id="39" name="TextBox 38"/>
-          <p:cNvSpPr txBox="1"/>
-          <p:nvPr/>
-        </p:nvSpPr>
-        <p:spPr>
-          <a:xfrm>
-            <a:off x="4846320" y="4023360"/>
-            <a:ext cx="2011680" cy="457200"/>
+              <a:defRPr sz="2400" b="1">
+                <a:solidFill>
+                  <a:srgbClr val="A855F7"/>
+                </a:solidFill>
+              </a:defRPr>
+            </a:pPr>
+            <a:r>
+              <a:t>&gt;</a:t>
+            </a:r>
+          </a:p>
+        </p:txBody>
+      </p:sp>
+      <p:sp>
+        <p:nvSpPr>
+          <p:cNvPr id="21" name="TextBox 20"/>
+          <p:cNvSpPr txBox="1"/>
+          <p:nvPr/>
+        </p:nvSpPr>
+        <p:spPr>
+          <a:xfrm>
+            <a:off x="5989320" y="2834640"/>
+            <a:ext cx="274320" cy="274320"/>
           </a:xfrm>
           <a:prstGeom prst="rect">
             <a:avLst/>
@@ -8016,56 +6840,21 @@
           <a:lstStyle/>
           <a:p>
             <a:pPr algn="ctr">
-              <a:defRPr sz="1100">
-                <a:solidFill>
-                  <a:srgbClr val="EF4444"/>
-                </a:solidFill>
-              </a:defRPr>
-            </a:pPr>
-            <a:r>
-              <a:t>Não</a:t>
-            </a:r>
-          </a:p>
-        </p:txBody>
-      </p:sp>
-      <p:sp>
-        <p:nvSpPr>
-          <p:cNvPr id="40" name="TextBox 39"/>
-          <p:cNvSpPr txBox="1"/>
-          <p:nvPr/>
-        </p:nvSpPr>
-        <p:spPr>
-          <a:xfrm>
-            <a:off x="6858000" y="4023360"/>
-            <a:ext cx="1828800" cy="457200"/>
-          </a:xfrm>
-          <a:prstGeom prst="rect">
-            <a:avLst/>
-          </a:prstGeom>
-          <a:noFill/>
-        </p:spPr>
-        <p:txBody>
-          <a:bodyPr wrap="none">
-            <a:spAutoFit/>
-          </a:bodyPr>
-          <a:lstStyle/>
-          <a:p>
-            <a:pPr algn="ctr">
-              <a:defRPr sz="1100">
-                <a:solidFill>
-                  <a:srgbClr val="EF4444"/>
-                </a:solidFill>
-              </a:defRPr>
-            </a:pPr>
-            <a:r>
-              <a:t>Não</a:t>
-            </a:r>
-          </a:p>
-        </p:txBody>
-      </p:sp>
-      <p:sp>
-        <p:nvSpPr>
-          <p:cNvPr id="41" name="TextBox 40"/>
+              <a:defRPr sz="2400" b="1">
+                <a:solidFill>
+                  <a:srgbClr val="A855F7"/>
+                </a:solidFill>
+              </a:defRPr>
+            </a:pPr>
+            <a:r>
+              <a:t>&gt;</a:t>
+            </a:r>
+          </a:p>
+        </p:txBody>
+      </p:sp>
+      <p:sp>
+        <p:nvSpPr>
+          <p:cNvPr id="22" name="TextBox 21"/>
           <p:cNvSpPr txBox="1"/>
           <p:nvPr/>
         </p:nvSpPr>
@@ -8167,7 +6956,7 @@
         </p:nvSpPr>
         <p:spPr>
           <a:xfrm>
-            <a:off x="457200" y="228600"/>
+            <a:off x="457200" y="182880"/>
             <a:ext cx="8229600" cy="640080"/>
           </a:xfrm>
           <a:prstGeom prst="rect">
@@ -8189,32 +6978,100 @@
               </a:defRPr>
             </a:pPr>
             <a:r>
-              <a:t>Ideal Para</a:t>
-            </a:r>
-          </a:p>
-        </p:txBody>
-      </p:sp>
-      <p:sp>
-        <p:nvSpPr>
-          <p:cNvPr id="4" name="Rounded Rectangle 3"/>
+              <a:t>Análise de Custo</a:t>
+            </a:r>
+          </a:p>
+        </p:txBody>
+      </p:sp>
+      <p:sp>
+        <p:nvSpPr>
+          <p:cNvPr id="4" name="TextBox 3"/>
+          <p:cNvSpPr txBox="1"/>
+          <p:nvPr/>
+        </p:nvSpPr>
+        <p:spPr>
+          <a:xfrm>
+            <a:off x="457200" y="777240"/>
+            <a:ext cx="8229600" cy="365760"/>
+          </a:xfrm>
+          <a:prstGeom prst="rect">
+            <a:avLst/>
+          </a:prstGeom>
+          <a:noFill/>
+        </p:spPr>
+        <p:txBody>
+          <a:bodyPr wrap="none">
+            <a:spAutoFit/>
+          </a:bodyPr>
+          <a:lstStyle/>
+          <a:p>
+            <a:pPr algn="ctr">
+              <a:defRPr sz="1400">
+                <a:solidFill>
+                  <a:srgbClr val="9CA3AF"/>
+                </a:solidFill>
+              </a:defRPr>
+            </a:pPr>
+            <a:r>
+              <a:t>Investimento acessível para um aprendizado de qualidade</a:t>
+            </a:r>
+          </a:p>
+        </p:txBody>
+      </p:sp>
+      <p:sp>
+        <p:nvSpPr>
+          <p:cNvPr id="5" name="TextBox 4"/>
+          <p:cNvSpPr txBox="1"/>
+          <p:nvPr/>
+        </p:nvSpPr>
+        <p:spPr>
+          <a:xfrm>
+            <a:off x="457200" y="1280160"/>
+            <a:ext cx="4114800" cy="365760"/>
+          </a:xfrm>
+          <a:prstGeom prst="rect">
+            <a:avLst/>
+          </a:prstGeom>
+          <a:noFill/>
+        </p:spPr>
+        <p:txBody>
+          <a:bodyPr wrap="none">
+            <a:spAutoFit/>
+          </a:bodyPr>
+          <a:lstStyle/>
+          <a:p>
+            <a:pPr>
+              <a:defRPr sz="2000" b="1">
+                <a:solidFill>
+                  <a:srgbClr val="22D3EE"/>
+                </a:solidFill>
+              </a:defRPr>
+            </a:pPr>
+            <a:r>
+              <a:t>Sistema de Créditos</a:t>
+            </a:r>
+          </a:p>
+        </p:txBody>
+      </p:sp>
+      <p:sp>
+        <p:nvSpPr>
+          <p:cNvPr id="6" name="Oval 5"/>
           <p:cNvSpPr/>
           <p:nvPr/>
         </p:nvSpPr>
         <p:spPr>
           <a:xfrm>
-            <a:off x="457200" y="1188720"/>
-            <a:ext cx="3840480" cy="1280160"/>
-          </a:xfrm>
-          <a:prstGeom prst="roundRect">
+            <a:off x="640080" y="1828800"/>
+            <a:ext cx="137160" cy="137160"/>
+          </a:xfrm>
+          <a:prstGeom prst="ellipse">
             <a:avLst/>
           </a:prstGeom>
           <a:solidFill>
-            <a:srgbClr val="251C45"/>
+            <a:srgbClr val="22D3EE"/>
           </a:solidFill>
-          <a:ln w="25400">
-            <a:solidFill>
-              <a:srgbClr val="EC4899"/>
-            </a:solidFill>
+          <a:ln>
+            <a:noFill/>
           </a:ln>
         </p:spPr>
         <p:style>
@@ -8241,20 +7098,90 @@
       </p:sp>
       <p:sp>
         <p:nvSpPr>
-          <p:cNvPr id="5" name="Oval 4"/>
+          <p:cNvPr id="7" name="TextBox 6"/>
+          <p:cNvSpPr txBox="1"/>
+          <p:nvPr/>
+        </p:nvSpPr>
+        <p:spPr>
+          <a:xfrm>
+            <a:off x="914400" y="1737360"/>
+            <a:ext cx="1828800" cy="320040"/>
+          </a:xfrm>
+          <a:prstGeom prst="rect">
+            <a:avLst/>
+          </a:prstGeom>
+          <a:noFill/>
+        </p:spPr>
+        <p:txBody>
+          <a:bodyPr wrap="none">
+            <a:spAutoFit/>
+          </a:bodyPr>
+          <a:lstStyle/>
+          <a:p>
+            <a:pPr>
+              <a:defRPr sz="1300" b="1">
+                <a:solidFill>
+                  <a:srgbClr val="FFFFFF"/>
+                </a:solidFill>
+              </a:defRPr>
+            </a:pPr>
+            <a:r>
+              <a:t>100 créditos</a:t>
+            </a:r>
+          </a:p>
+        </p:txBody>
+      </p:sp>
+      <p:sp>
+        <p:nvSpPr>
+          <p:cNvPr id="8" name="TextBox 7"/>
+          <p:cNvSpPr txBox="1"/>
+          <p:nvPr/>
+        </p:nvSpPr>
+        <p:spPr>
+          <a:xfrm>
+            <a:off x="2743200" y="1737360"/>
+            <a:ext cx="1828800" cy="320040"/>
+          </a:xfrm>
+          <a:prstGeom prst="rect">
+            <a:avLst/>
+          </a:prstGeom>
+          <a:noFill/>
+        </p:spPr>
+        <p:txBody>
+          <a:bodyPr wrap="none">
+            <a:spAutoFit/>
+          </a:bodyPr>
+          <a:lstStyle/>
+          <a:p>
+            <a:pPr>
+              <a:defRPr sz="1200">
+                <a:solidFill>
+                  <a:srgbClr val="9CA3AF"/>
+                </a:solidFill>
+              </a:defRPr>
+            </a:pPr>
+            <a:r>
+              <a:t>Grátis para novos usuários</a:t>
+            </a:r>
+          </a:p>
+        </p:txBody>
+      </p:sp>
+      <p:sp>
+        <p:nvSpPr>
+          <p:cNvPr id="9" name="Oval 8"/>
           <p:cNvSpPr/>
           <p:nvPr/>
         </p:nvSpPr>
         <p:spPr>
           <a:xfrm>
-            <a:off x="640080" y="1463040"/>
-            <a:ext cx="640080" cy="640080"/>
+            <a:off x="640080" y="2240280"/>
+            <a:ext cx="137160" cy="137160"/>
           </a:xfrm>
           <a:prstGeom prst="ellipse">
             <a:avLst/>
           </a:prstGeom>
           <a:solidFill>
-            <a:srgbClr val="EC4899"/>
+            <a:srgbClr val="22D3EE"/>
           </a:solidFill>
           <a:ln>
             <a:noFill/>
@@ -8284,14 +7211,14 @@
       </p:sp>
       <p:sp>
         <p:nvSpPr>
-          <p:cNvPr id="6" name="TextBox 5"/>
-          <p:cNvSpPr txBox="1"/>
-          <p:nvPr/>
-        </p:nvSpPr>
-        <p:spPr>
-          <a:xfrm>
-            <a:off x="1463040" y="1417320"/>
-            <a:ext cx="2651760" cy="411480"/>
+          <p:cNvPr id="10" name="TextBox 9"/>
+          <p:cNvSpPr txBox="1"/>
+          <p:nvPr/>
+        </p:nvSpPr>
+        <p:spPr>
+          <a:xfrm>
+            <a:off x="914400" y="2148840"/>
+            <a:ext cx="1828800" cy="320040"/>
           </a:xfrm>
           <a:prstGeom prst="rect">
             <a:avLst/>
@@ -8305,74 +7232,72 @@
           <a:lstStyle/>
           <a:p>
             <a:pPr>
-              <a:defRPr sz="1800" b="1">
-                <a:solidFill>
-                  <a:srgbClr val="EC4899"/>
-                </a:solidFill>
-              </a:defRPr>
-            </a:pPr>
-            <a:r>
-              <a:t>Estudantes</a:t>
-            </a:r>
-          </a:p>
-        </p:txBody>
-      </p:sp>
-      <p:sp>
-        <p:nvSpPr>
-          <p:cNvPr id="7" name="TextBox 6"/>
-          <p:cNvSpPr txBox="1"/>
-          <p:nvPr/>
-        </p:nvSpPr>
-        <p:spPr>
-          <a:xfrm>
-            <a:off x="1463040" y="1828800"/>
-            <a:ext cx="2651760" cy="548640"/>
-          </a:xfrm>
-          <a:prstGeom prst="rect">
-            <a:avLst/>
-          </a:prstGeom>
-          <a:noFill/>
-        </p:spPr>
-        <p:txBody>
-          <a:bodyPr wrap="square">
+              <a:defRPr sz="1300" b="1">
+                <a:solidFill>
+                  <a:srgbClr val="FFFFFF"/>
+                </a:solidFill>
+              </a:defRPr>
+            </a:pPr>
+            <a:r>
+              <a:t>Correção de texto</a:t>
+            </a:r>
+          </a:p>
+        </p:txBody>
+      </p:sp>
+      <p:sp>
+        <p:nvSpPr>
+          <p:cNvPr id="11" name="TextBox 10"/>
+          <p:cNvSpPr txBox="1"/>
+          <p:nvPr/>
+        </p:nvSpPr>
+        <p:spPr>
+          <a:xfrm>
+            <a:off x="2743200" y="2148840"/>
+            <a:ext cx="1828800" cy="320040"/>
+          </a:xfrm>
+          <a:prstGeom prst="rect">
+            <a:avLst/>
+          </a:prstGeom>
+          <a:noFill/>
+        </p:spPr>
+        <p:txBody>
+          <a:bodyPr wrap="none">
             <a:spAutoFit/>
           </a:bodyPr>
           <a:lstStyle/>
           <a:p>
             <a:pPr>
-              <a:defRPr sz="1300">
+              <a:defRPr sz="1200">
                 <a:solidFill>
                   <a:srgbClr val="9CA3AF"/>
                 </a:solidFill>
               </a:defRPr>
             </a:pPr>
             <a:r>
-              <a:t>Preparando para provas Goethe, TestDaF, DSH</a:t>
-            </a:r>
-          </a:p>
-        </p:txBody>
-      </p:sp>
-      <p:sp>
-        <p:nvSpPr>
-          <p:cNvPr id="8" name="Rounded Rectangle 7"/>
+              <a:t>~20 créditos por correção</a:t>
+            </a:r>
+          </a:p>
+        </p:txBody>
+      </p:sp>
+      <p:sp>
+        <p:nvSpPr>
+          <p:cNvPr id="12" name="Oval 11"/>
           <p:cNvSpPr/>
           <p:nvPr/>
         </p:nvSpPr>
         <p:spPr>
           <a:xfrm>
-            <a:off x="4846320" y="1188720"/>
-            <a:ext cx="3840480" cy="1280160"/>
-          </a:xfrm>
-          <a:prstGeom prst="roundRect">
+            <a:off x="640080" y="2651760"/>
+            <a:ext cx="137160" cy="137160"/>
+          </a:xfrm>
+          <a:prstGeom prst="ellipse">
             <a:avLst/>
           </a:prstGeom>
           <a:solidFill>
-            <a:srgbClr val="251C45"/>
+            <a:srgbClr val="22D3EE"/>
           </a:solidFill>
-          <a:ln w="25400">
-            <a:solidFill>
-              <a:srgbClr val="A855F7"/>
-            </a:solidFill>
+          <a:ln>
+            <a:noFill/>
           </a:ln>
         </p:spPr>
         <p:style>
@@ -8399,20 +7324,90 @@
       </p:sp>
       <p:sp>
         <p:nvSpPr>
-          <p:cNvPr id="9" name="Oval 8"/>
+          <p:cNvPr id="13" name="TextBox 12"/>
+          <p:cNvSpPr txBox="1"/>
+          <p:nvPr/>
+        </p:nvSpPr>
+        <p:spPr>
+          <a:xfrm>
+            <a:off x="914400" y="2560320"/>
+            <a:ext cx="1828800" cy="320040"/>
+          </a:xfrm>
+          <a:prstGeom prst="rect">
+            <a:avLst/>
+          </a:prstGeom>
+          <a:noFill/>
+        </p:spPr>
+        <p:txBody>
+          <a:bodyPr wrap="none">
+            <a:spAutoFit/>
+          </a:bodyPr>
+          <a:lstStyle/>
+          <a:p>
+            <a:pPr>
+              <a:defRPr sz="1300" b="1">
+                <a:solidFill>
+                  <a:srgbClr val="FFFFFF"/>
+                </a:solidFill>
+              </a:defRPr>
+            </a:pPr>
+            <a:r>
+              <a:t>Paráfrase de texto</a:t>
+            </a:r>
+          </a:p>
+        </p:txBody>
+      </p:sp>
+      <p:sp>
+        <p:nvSpPr>
+          <p:cNvPr id="14" name="TextBox 13"/>
+          <p:cNvSpPr txBox="1"/>
+          <p:nvPr/>
+        </p:nvSpPr>
+        <p:spPr>
+          <a:xfrm>
+            <a:off x="2743200" y="2560320"/>
+            <a:ext cx="1828800" cy="320040"/>
+          </a:xfrm>
+          <a:prstGeom prst="rect">
+            <a:avLst/>
+          </a:prstGeom>
+          <a:noFill/>
+        </p:spPr>
+        <p:txBody>
+          <a:bodyPr wrap="none">
+            <a:spAutoFit/>
+          </a:bodyPr>
+          <a:lstStyle/>
+          <a:p>
+            <a:pPr>
+              <a:defRPr sz="1200">
+                <a:solidFill>
+                  <a:srgbClr val="9CA3AF"/>
+                </a:solidFill>
+              </a:defRPr>
+            </a:pPr>
+            <a:r>
+              <a:t>~5 créditos por uso</a:t>
+            </a:r>
+          </a:p>
+        </p:txBody>
+      </p:sp>
+      <p:sp>
+        <p:nvSpPr>
+          <p:cNvPr id="15" name="Oval 14"/>
           <p:cNvSpPr/>
           <p:nvPr/>
         </p:nvSpPr>
         <p:spPr>
           <a:xfrm>
-            <a:off x="5029200" y="1463040"/>
-            <a:ext cx="640080" cy="640080"/>
+            <a:off x="640080" y="3063240"/>
+            <a:ext cx="137160" cy="137160"/>
           </a:xfrm>
           <a:prstGeom prst="ellipse">
             <a:avLst/>
           </a:prstGeom>
           <a:solidFill>
-            <a:srgbClr val="A855F7"/>
+            <a:srgbClr val="22D3EE"/>
           </a:solidFill>
           <a:ln>
             <a:noFill/>
@@ -8442,14 +7437,14 @@
       </p:sp>
       <p:sp>
         <p:nvSpPr>
-          <p:cNvPr id="10" name="TextBox 9"/>
-          <p:cNvSpPr txBox="1"/>
-          <p:nvPr/>
-        </p:nvSpPr>
-        <p:spPr>
-          <a:xfrm>
-            <a:off x="5852160" y="1417320"/>
-            <a:ext cx="2651760" cy="411480"/>
+          <p:cNvPr id="16" name="TextBox 15"/>
+          <p:cNvSpPr txBox="1"/>
+          <p:nvPr/>
+        </p:nvSpPr>
+        <p:spPr>
+          <a:xfrm>
+            <a:off x="914400" y="2971800"/>
+            <a:ext cx="1828800" cy="320040"/>
           </a:xfrm>
           <a:prstGeom prst="rect">
             <a:avLst/>
@@ -8463,74 +7458,72 @@
           <a:lstStyle/>
           <a:p>
             <a:pPr>
-              <a:defRPr sz="1800" b="1">
-                <a:solidFill>
-                  <a:srgbClr val="A855F7"/>
-                </a:solidFill>
-              </a:defRPr>
-            </a:pPr>
-            <a:r>
-              <a:t>Profissionais</a:t>
-            </a:r>
-          </a:p>
-        </p:txBody>
-      </p:sp>
-      <p:sp>
-        <p:nvSpPr>
-          <p:cNvPr id="11" name="TextBox 10"/>
-          <p:cNvSpPr txBox="1"/>
-          <p:nvPr/>
-        </p:nvSpPr>
-        <p:spPr>
-          <a:xfrm>
-            <a:off x="5852160" y="1828800"/>
-            <a:ext cx="2651760" cy="548640"/>
-          </a:xfrm>
-          <a:prstGeom prst="rect">
-            <a:avLst/>
-          </a:prstGeom>
-          <a:noFill/>
-        </p:spPr>
-        <p:txBody>
-          <a:bodyPr wrap="square">
+              <a:defRPr sz="1300" b="1">
+                <a:solidFill>
+                  <a:srgbClr val="FFFFFF"/>
+                </a:solidFill>
+              </a:defRPr>
+            </a:pPr>
+            <a:r>
+              <a:t>Chatbot conversação</a:t>
+            </a:r>
+          </a:p>
+        </p:txBody>
+      </p:sp>
+      <p:sp>
+        <p:nvSpPr>
+          <p:cNvPr id="17" name="TextBox 16"/>
+          <p:cNvSpPr txBox="1"/>
+          <p:nvPr/>
+        </p:nvSpPr>
+        <p:spPr>
+          <a:xfrm>
+            <a:off x="2743200" y="2971800"/>
+            <a:ext cx="1828800" cy="320040"/>
+          </a:xfrm>
+          <a:prstGeom prst="rect">
+            <a:avLst/>
+          </a:prstGeom>
+          <a:noFill/>
+        </p:spPr>
+        <p:txBody>
+          <a:bodyPr wrap="none">
             <a:spAutoFit/>
           </a:bodyPr>
           <a:lstStyle/>
           <a:p>
             <a:pPr>
-              <a:defRPr sz="1300">
+              <a:defRPr sz="1200">
                 <a:solidFill>
                   <a:srgbClr val="9CA3AF"/>
                 </a:solidFill>
               </a:defRPr>
             </a:pPr>
             <a:r>
-              <a:t>Que precisam escrever em alemão no trabalho</a:t>
-            </a:r>
-          </a:p>
-        </p:txBody>
-      </p:sp>
-      <p:sp>
-        <p:nvSpPr>
-          <p:cNvPr id="12" name="Rounded Rectangle 11"/>
+              <a:t>2,5 créditos por frase</a:t>
+            </a:r>
+          </a:p>
+        </p:txBody>
+      </p:sp>
+      <p:sp>
+        <p:nvSpPr>
+          <p:cNvPr id="18" name="Oval 17"/>
           <p:cNvSpPr/>
           <p:nvPr/>
         </p:nvSpPr>
         <p:spPr>
           <a:xfrm>
-            <a:off x="457200" y="2697480"/>
-            <a:ext cx="3840480" cy="1280160"/>
-          </a:xfrm>
-          <a:prstGeom prst="roundRect">
+            <a:off x="640080" y="3474720"/>
+            <a:ext cx="137160" cy="137160"/>
+          </a:xfrm>
+          <a:prstGeom prst="ellipse">
             <a:avLst/>
           </a:prstGeom>
           <a:solidFill>
-            <a:srgbClr val="251C45"/>
+            <a:srgbClr val="22D3EE"/>
           </a:solidFill>
-          <a:ln w="25400">
-            <a:solidFill>
-              <a:srgbClr val="3B82F6"/>
-            </a:solidFill>
+          <a:ln>
+            <a:noFill/>
           </a:ln>
         </p:spPr>
         <p:style>
@@ -8557,20 +7550,90 @@
       </p:sp>
       <p:sp>
         <p:nvSpPr>
-          <p:cNvPr id="13" name="Oval 12"/>
+          <p:cNvPr id="19" name="TextBox 18"/>
+          <p:cNvSpPr txBox="1"/>
+          <p:nvPr/>
+        </p:nvSpPr>
+        <p:spPr>
+          <a:xfrm>
+            <a:off x="914400" y="3383280"/>
+            <a:ext cx="1828800" cy="320040"/>
+          </a:xfrm>
+          <a:prstGeom prst="rect">
+            <a:avLst/>
+          </a:prstGeom>
+          <a:noFill/>
+        </p:spPr>
+        <p:txBody>
+          <a:bodyPr wrap="none">
+            <a:spAutoFit/>
+          </a:bodyPr>
+          <a:lstStyle/>
+          <a:p>
+            <a:pPr>
+              <a:defRPr sz="1300" b="1">
+                <a:solidFill>
+                  <a:srgbClr val="FFFFFF"/>
+                </a:solidFill>
+              </a:defRPr>
+            </a:pPr>
+            <a:r>
+              <a:t>Chatbot gramática</a:t>
+            </a:r>
+          </a:p>
+        </p:txBody>
+      </p:sp>
+      <p:sp>
+        <p:nvSpPr>
+          <p:cNvPr id="20" name="TextBox 19"/>
+          <p:cNvSpPr txBox="1"/>
+          <p:nvPr/>
+        </p:nvSpPr>
+        <p:spPr>
+          <a:xfrm>
+            <a:off x="2743200" y="3383280"/>
+            <a:ext cx="1828800" cy="320040"/>
+          </a:xfrm>
+          <a:prstGeom prst="rect">
+            <a:avLst/>
+          </a:prstGeom>
+          <a:noFill/>
+        </p:spPr>
+        <p:txBody>
+          <a:bodyPr wrap="none">
+            <a:spAutoFit/>
+          </a:bodyPr>
+          <a:lstStyle/>
+          <a:p>
+            <a:pPr>
+              <a:defRPr sz="1200">
+                <a:solidFill>
+                  <a:srgbClr val="9CA3AF"/>
+                </a:solidFill>
+              </a:defRPr>
+            </a:pPr>
+            <a:r>
+              <a:t>5 créditos por tópico</a:t>
+            </a:r>
+          </a:p>
+        </p:txBody>
+      </p:sp>
+      <p:sp>
+        <p:nvSpPr>
+          <p:cNvPr id="21" name="Oval 20"/>
           <p:cNvSpPr/>
           <p:nvPr/>
         </p:nvSpPr>
         <p:spPr>
           <a:xfrm>
-            <a:off x="640080" y="2971800"/>
-            <a:ext cx="640080" cy="640080"/>
+            <a:off x="640080" y="3886200"/>
+            <a:ext cx="137160" cy="137160"/>
           </a:xfrm>
           <a:prstGeom prst="ellipse">
             <a:avLst/>
           </a:prstGeom>
           <a:solidFill>
-            <a:srgbClr val="3B82F6"/>
+            <a:srgbClr val="22D3EE"/>
           </a:solidFill>
           <a:ln>
             <a:noFill/>
@@ -8600,14 +7663,14 @@
       </p:sp>
       <p:sp>
         <p:nvSpPr>
-          <p:cNvPr id="14" name="TextBox 13"/>
-          <p:cNvSpPr txBox="1"/>
-          <p:nvPr/>
-        </p:nvSpPr>
-        <p:spPr>
-          <a:xfrm>
-            <a:off x="1463040" y="2926080"/>
-            <a:ext cx="2651760" cy="411480"/>
+          <p:cNvPr id="22" name="TextBox 21"/>
+          <p:cNvSpPr txBox="1"/>
+          <p:nvPr/>
+        </p:nvSpPr>
+        <p:spPr>
+          <a:xfrm>
+            <a:off x="914400" y="3794760"/>
+            <a:ext cx="1828800" cy="320040"/>
           </a:xfrm>
           <a:prstGeom prst="rect">
             <a:avLst/>
@@ -8621,36 +7684,149 @@
           <a:lstStyle/>
           <a:p>
             <a:pPr>
-              <a:defRPr sz="1800" b="1">
-                <a:solidFill>
-                  <a:srgbClr val="3B82F6"/>
-                </a:solidFill>
-              </a:defRPr>
-            </a:pPr>
-            <a:r>
-              <a:t>Professores</a:t>
-            </a:r>
-          </a:p>
-        </p:txBody>
-      </p:sp>
-      <p:sp>
-        <p:nvSpPr>
-          <p:cNvPr id="15" name="TextBox 14"/>
-          <p:cNvSpPr txBox="1"/>
-          <p:nvPr/>
-        </p:nvSpPr>
-        <p:spPr>
-          <a:xfrm>
-            <a:off x="1463040" y="3337560"/>
-            <a:ext cx="2651760" cy="548640"/>
-          </a:xfrm>
-          <a:prstGeom prst="rect">
-            <a:avLst/>
-          </a:prstGeom>
-          <a:noFill/>
-        </p:spPr>
-        <p:txBody>
-          <a:bodyPr wrap="square">
+              <a:defRPr sz="1300" b="1">
+                <a:solidFill>
+                  <a:srgbClr val="FFFFFF"/>
+                </a:solidFill>
+              </a:defRPr>
+            </a:pPr>
+            <a:r>
+              <a:t>Flashcards e jogos</a:t>
+            </a:r>
+          </a:p>
+        </p:txBody>
+      </p:sp>
+      <p:sp>
+        <p:nvSpPr>
+          <p:cNvPr id="23" name="TextBox 22"/>
+          <p:cNvSpPr txBox="1"/>
+          <p:nvPr/>
+        </p:nvSpPr>
+        <p:spPr>
+          <a:xfrm>
+            <a:off x="2743200" y="3794760"/>
+            <a:ext cx="1828800" cy="320040"/>
+          </a:xfrm>
+          <a:prstGeom prst="rect">
+            <a:avLst/>
+          </a:prstGeom>
+          <a:noFill/>
+        </p:spPr>
+        <p:txBody>
+          <a:bodyPr wrap="none">
+            <a:spAutoFit/>
+          </a:bodyPr>
+          <a:lstStyle/>
+          <a:p>
+            <a:pPr>
+              <a:defRPr sz="1200">
+                <a:solidFill>
+                  <a:srgbClr val="9CA3AF"/>
+                </a:solidFill>
+              </a:defRPr>
+            </a:pPr>
+            <a:r>
+              <a:t>Gratuito</a:t>
+            </a:r>
+          </a:p>
+        </p:txBody>
+      </p:sp>
+      <p:sp>
+        <p:nvSpPr>
+          <p:cNvPr id="24" name="TextBox 23"/>
+          <p:cNvSpPr txBox="1"/>
+          <p:nvPr/>
+        </p:nvSpPr>
+        <p:spPr>
+          <a:xfrm>
+            <a:off x="4846320" y="1280160"/>
+            <a:ext cx="3840480" cy="365760"/>
+          </a:xfrm>
+          <a:prstGeom prst="rect">
+            <a:avLst/>
+          </a:prstGeom>
+          <a:noFill/>
+        </p:spPr>
+        <p:txBody>
+          <a:bodyPr wrap="none">
+            <a:spAutoFit/>
+          </a:bodyPr>
+          <a:lstStyle/>
+          <a:p>
+            <a:pPr>
+              <a:defRPr sz="2000" b="1">
+                <a:solidFill>
+                  <a:srgbClr val="F97316"/>
+                </a:solidFill>
+              </a:defRPr>
+            </a:pPr>
+            <a:r>
+              <a:t>Comparado com Alternativas</a:t>
+            </a:r>
+          </a:p>
+        </p:txBody>
+      </p:sp>
+      <p:sp>
+        <p:nvSpPr>
+          <p:cNvPr id="25" name="Rounded Rectangle 24"/>
+          <p:cNvSpPr/>
+          <p:nvPr/>
+        </p:nvSpPr>
+        <p:spPr>
+          <a:xfrm>
+            <a:off x="4846320" y="1737360"/>
+            <a:ext cx="3840480" cy="502920"/>
+          </a:xfrm>
+          <a:prstGeom prst="roundRect">
+            <a:avLst/>
+          </a:prstGeom>
+          <a:solidFill>
+            <a:srgbClr val="251C45"/>
+          </a:solidFill>
+          <a:ln>
+            <a:noFill/>
+          </a:ln>
+        </p:spPr>
+        <p:style>
+          <a:lnRef idx="1">
+            <a:schemeClr val="accent1"/>
+          </a:lnRef>
+          <a:fillRef idx="3">
+            <a:schemeClr val="accent1"/>
+          </a:fillRef>
+          <a:effectRef idx="2">
+            <a:schemeClr val="accent1"/>
+          </a:effectRef>
+          <a:fontRef idx="minor">
+            <a:schemeClr val="lt1"/>
+          </a:fontRef>
+        </p:style>
+        <p:txBody>
+          <a:bodyPr rtlCol="0" anchor="ctr"/>
+          <a:lstStyle/>
+          <a:p>
+            <a:pPr algn="ctr"/>
+          </a:p>
+        </p:txBody>
+      </p:sp>
+      <p:sp>
+        <p:nvSpPr>
+          <p:cNvPr id="26" name="TextBox 25"/>
+          <p:cNvSpPr txBox="1"/>
+          <p:nvPr/>
+        </p:nvSpPr>
+        <p:spPr>
+          <a:xfrm>
+            <a:off x="5029200" y="1828800"/>
+            <a:ext cx="2103120" cy="320040"/>
+          </a:xfrm>
+          <a:prstGeom prst="rect">
+            <a:avLst/>
+          </a:prstGeom>
+          <a:noFill/>
+        </p:spPr>
+        <p:txBody>
+          <a:bodyPr wrap="none">
             <a:spAutoFit/>
           </a:bodyPr>
           <a:lstStyle/>
@@ -8658,26 +7834,400 @@
             <a:pPr>
               <a:defRPr sz="1300">
                 <a:solidFill>
-                  <a:srgbClr val="9CA3AF"/>
-                </a:solidFill>
-              </a:defRPr>
-            </a:pPr>
-            <a:r>
-              <a:t>Que querem otimizar correções de alunos</a:t>
-            </a:r>
-          </a:p>
-        </p:txBody>
-      </p:sp>
-      <p:sp>
-        <p:nvSpPr>
-          <p:cNvPr id="16" name="Rounded Rectangle 15"/>
+                  <a:srgbClr val="FFFFFF"/>
+                </a:solidFill>
+              </a:defRPr>
+            </a:pPr>
+            <a:r>
+              <a:t>Professor particular</a:t>
+            </a:r>
+          </a:p>
+        </p:txBody>
+      </p:sp>
+      <p:sp>
+        <p:nvSpPr>
+          <p:cNvPr id="27" name="TextBox 26"/>
+          <p:cNvSpPr txBox="1"/>
+          <p:nvPr/>
+        </p:nvSpPr>
+        <p:spPr>
+          <a:xfrm>
+            <a:off x="7132320" y="1828800"/>
+            <a:ext cx="1371600" cy="320040"/>
+          </a:xfrm>
+          <a:prstGeom prst="rect">
+            <a:avLst/>
+          </a:prstGeom>
+          <a:noFill/>
+        </p:spPr>
+        <p:txBody>
+          <a:bodyPr wrap="none">
+            <a:spAutoFit/>
+          </a:bodyPr>
+          <a:lstStyle/>
+          <a:p>
+            <a:pPr algn="r">
+              <a:defRPr sz="1300" b="1">
+                <a:solidFill>
+                  <a:srgbClr val="EF4444"/>
+                </a:solidFill>
+              </a:defRPr>
+            </a:pPr>
+            <a:r>
+              <a:t>R$ 80-150/hora</a:t>
+            </a:r>
+          </a:p>
+        </p:txBody>
+      </p:sp>
+      <p:sp>
+        <p:nvSpPr>
+          <p:cNvPr id="28" name="Rounded Rectangle 27"/>
           <p:cNvSpPr/>
           <p:nvPr/>
         </p:nvSpPr>
         <p:spPr>
           <a:xfrm>
-            <a:off x="4846320" y="2697480"/>
-            <a:ext cx="3840480" cy="1280160"/>
+            <a:off x="4846320" y="2331720"/>
+            <a:ext cx="3840480" cy="502920"/>
+          </a:xfrm>
+          <a:prstGeom prst="roundRect">
+            <a:avLst/>
+          </a:prstGeom>
+          <a:solidFill>
+            <a:srgbClr val="251C45"/>
+          </a:solidFill>
+          <a:ln>
+            <a:noFill/>
+          </a:ln>
+        </p:spPr>
+        <p:style>
+          <a:lnRef idx="1">
+            <a:schemeClr val="accent1"/>
+          </a:lnRef>
+          <a:fillRef idx="3">
+            <a:schemeClr val="accent1"/>
+          </a:fillRef>
+          <a:effectRef idx="2">
+            <a:schemeClr val="accent1"/>
+          </a:effectRef>
+          <a:fontRef idx="minor">
+            <a:schemeClr val="lt1"/>
+          </a:fontRef>
+        </p:style>
+        <p:txBody>
+          <a:bodyPr rtlCol="0" anchor="ctr"/>
+          <a:lstStyle/>
+          <a:p>
+            <a:pPr algn="ctr"/>
+          </a:p>
+        </p:txBody>
+      </p:sp>
+      <p:sp>
+        <p:nvSpPr>
+          <p:cNvPr id="29" name="TextBox 28"/>
+          <p:cNvSpPr txBox="1"/>
+          <p:nvPr/>
+        </p:nvSpPr>
+        <p:spPr>
+          <a:xfrm>
+            <a:off x="5029200" y="2423160"/>
+            <a:ext cx="2103120" cy="320040"/>
+          </a:xfrm>
+          <a:prstGeom prst="rect">
+            <a:avLst/>
+          </a:prstGeom>
+          <a:noFill/>
+        </p:spPr>
+        <p:txBody>
+          <a:bodyPr wrap="none">
+            <a:spAutoFit/>
+          </a:bodyPr>
+          <a:lstStyle/>
+          <a:p>
+            <a:pPr>
+              <a:defRPr sz="1300">
+                <a:solidFill>
+                  <a:srgbClr val="FFFFFF"/>
+                </a:solidFill>
+              </a:defRPr>
+            </a:pPr>
+            <a:r>
+              <a:t>Curso presencial</a:t>
+            </a:r>
+          </a:p>
+        </p:txBody>
+      </p:sp>
+      <p:sp>
+        <p:nvSpPr>
+          <p:cNvPr id="30" name="TextBox 29"/>
+          <p:cNvSpPr txBox="1"/>
+          <p:nvPr/>
+        </p:nvSpPr>
+        <p:spPr>
+          <a:xfrm>
+            <a:off x="7132320" y="2423160"/>
+            <a:ext cx="1371600" cy="320040"/>
+          </a:xfrm>
+          <a:prstGeom prst="rect">
+            <a:avLst/>
+          </a:prstGeom>
+          <a:noFill/>
+        </p:spPr>
+        <p:txBody>
+          <a:bodyPr wrap="none">
+            <a:spAutoFit/>
+          </a:bodyPr>
+          <a:lstStyle/>
+          <a:p>
+            <a:pPr algn="r">
+              <a:defRPr sz="1300" b="1">
+                <a:solidFill>
+                  <a:srgbClr val="EF4444"/>
+                </a:solidFill>
+              </a:defRPr>
+            </a:pPr>
+            <a:r>
+              <a:t>R$ 300-800/mês</a:t>
+            </a:r>
+          </a:p>
+        </p:txBody>
+      </p:sp>
+      <p:sp>
+        <p:nvSpPr>
+          <p:cNvPr id="31" name="Rounded Rectangle 30"/>
+          <p:cNvSpPr/>
+          <p:nvPr/>
+        </p:nvSpPr>
+        <p:spPr>
+          <a:xfrm>
+            <a:off x="4846320" y="2926080"/>
+            <a:ext cx="3840480" cy="502920"/>
+          </a:xfrm>
+          <a:prstGeom prst="roundRect">
+            <a:avLst/>
+          </a:prstGeom>
+          <a:solidFill>
+            <a:srgbClr val="251C45"/>
+          </a:solidFill>
+          <a:ln>
+            <a:noFill/>
+          </a:ln>
+        </p:spPr>
+        <p:style>
+          <a:lnRef idx="1">
+            <a:schemeClr val="accent1"/>
+          </a:lnRef>
+          <a:fillRef idx="3">
+            <a:schemeClr val="accent1"/>
+          </a:fillRef>
+          <a:effectRef idx="2">
+            <a:schemeClr val="accent1"/>
+          </a:effectRef>
+          <a:fontRef idx="minor">
+            <a:schemeClr val="lt1"/>
+          </a:fontRef>
+        </p:style>
+        <p:txBody>
+          <a:bodyPr rtlCol="0" anchor="ctr"/>
+          <a:lstStyle/>
+          <a:p>
+            <a:pPr algn="ctr"/>
+          </a:p>
+        </p:txBody>
+      </p:sp>
+      <p:sp>
+        <p:nvSpPr>
+          <p:cNvPr id="32" name="TextBox 31"/>
+          <p:cNvSpPr txBox="1"/>
+          <p:nvPr/>
+        </p:nvSpPr>
+        <p:spPr>
+          <a:xfrm>
+            <a:off x="5029200" y="3017520"/>
+            <a:ext cx="2103120" cy="320040"/>
+          </a:xfrm>
+          <a:prstGeom prst="rect">
+            <a:avLst/>
+          </a:prstGeom>
+          <a:noFill/>
+        </p:spPr>
+        <p:txBody>
+          <a:bodyPr wrap="none">
+            <a:spAutoFit/>
+          </a:bodyPr>
+          <a:lstStyle/>
+          <a:p>
+            <a:pPr>
+              <a:defRPr sz="1300">
+                <a:solidFill>
+                  <a:srgbClr val="FFFFFF"/>
+                </a:solidFill>
+              </a:defRPr>
+            </a:pPr>
+            <a:r>
+              <a:t>Apps premium</a:t>
+            </a:r>
+          </a:p>
+        </p:txBody>
+      </p:sp>
+      <p:sp>
+        <p:nvSpPr>
+          <p:cNvPr id="33" name="TextBox 32"/>
+          <p:cNvSpPr txBox="1"/>
+          <p:nvPr/>
+        </p:nvSpPr>
+        <p:spPr>
+          <a:xfrm>
+            <a:off x="7132320" y="3017520"/>
+            <a:ext cx="1371600" cy="320040"/>
+          </a:xfrm>
+          <a:prstGeom prst="rect">
+            <a:avLst/>
+          </a:prstGeom>
+          <a:noFill/>
+        </p:spPr>
+        <p:txBody>
+          <a:bodyPr wrap="none">
+            <a:spAutoFit/>
+          </a:bodyPr>
+          <a:lstStyle/>
+          <a:p>
+            <a:pPr algn="r">
+              <a:defRPr sz="1300" b="1">
+                <a:solidFill>
+                  <a:srgbClr val="EAB308"/>
+                </a:solidFill>
+              </a:defRPr>
+            </a:pPr>
+            <a:r>
+              <a:t>R$ 50-100/mês</a:t>
+            </a:r>
+          </a:p>
+        </p:txBody>
+      </p:sp>
+      <p:sp>
+        <p:nvSpPr>
+          <p:cNvPr id="34" name="Rounded Rectangle 33"/>
+          <p:cNvSpPr/>
+          <p:nvPr/>
+        </p:nvSpPr>
+        <p:spPr>
+          <a:xfrm>
+            <a:off x="4846320" y="3520440"/>
+            <a:ext cx="3840480" cy="502920"/>
+          </a:xfrm>
+          <a:prstGeom prst="roundRect">
+            <a:avLst/>
+          </a:prstGeom>
+          <a:solidFill>
+            <a:srgbClr val="251C45"/>
+          </a:solidFill>
+          <a:ln>
+            <a:noFill/>
+          </a:ln>
+        </p:spPr>
+        <p:style>
+          <a:lnRef idx="1">
+            <a:schemeClr val="accent1"/>
+          </a:lnRef>
+          <a:fillRef idx="3">
+            <a:schemeClr val="accent1"/>
+          </a:fillRef>
+          <a:effectRef idx="2">
+            <a:schemeClr val="accent1"/>
+          </a:effectRef>
+          <a:fontRef idx="minor">
+            <a:schemeClr val="lt1"/>
+          </a:fontRef>
+        </p:style>
+        <p:txBody>
+          <a:bodyPr rtlCol="0" anchor="ctr"/>
+          <a:lstStyle/>
+          <a:p>
+            <a:pPr algn="ctr"/>
+          </a:p>
+        </p:txBody>
+      </p:sp>
+      <p:sp>
+        <p:nvSpPr>
+          <p:cNvPr id="35" name="TextBox 34"/>
+          <p:cNvSpPr txBox="1"/>
+          <p:nvPr/>
+        </p:nvSpPr>
+        <p:spPr>
+          <a:xfrm>
+            <a:off x="5029200" y="3611880"/>
+            <a:ext cx="2103120" cy="320040"/>
+          </a:xfrm>
+          <a:prstGeom prst="rect">
+            <a:avLst/>
+          </a:prstGeom>
+          <a:noFill/>
+        </p:spPr>
+        <p:txBody>
+          <a:bodyPr wrap="none">
+            <a:spAutoFit/>
+          </a:bodyPr>
+          <a:lstStyle/>
+          <a:p>
+            <a:pPr>
+              <a:defRPr sz="1300">
+                <a:solidFill>
+                  <a:srgbClr val="FFFFFF"/>
+                </a:solidFill>
+              </a:defRPr>
+            </a:pPr>
+            <a:r>
+              <a:t>CorrectMe</a:t>
+            </a:r>
+          </a:p>
+        </p:txBody>
+      </p:sp>
+      <p:sp>
+        <p:nvSpPr>
+          <p:cNvPr id="36" name="TextBox 35"/>
+          <p:cNvSpPr txBox="1"/>
+          <p:nvPr/>
+        </p:nvSpPr>
+        <p:spPr>
+          <a:xfrm>
+            <a:off x="7132320" y="3611880"/>
+            <a:ext cx="1371600" cy="320040"/>
+          </a:xfrm>
+          <a:prstGeom prst="rect">
+            <a:avLst/>
+          </a:prstGeom>
+          <a:noFill/>
+        </p:spPr>
+        <p:txBody>
+          <a:bodyPr wrap="none">
+            <a:spAutoFit/>
+          </a:bodyPr>
+          <a:lstStyle/>
+          <a:p>
+            <a:pPr algn="r">
+              <a:defRPr sz="1300" b="1">
+                <a:solidFill>
+                  <a:srgbClr val="22C55E"/>
+                </a:solidFill>
+              </a:defRPr>
+            </a:pPr>
+            <a:r>
+              <a:t>A partir de R$ 0</a:t>
+            </a:r>
+          </a:p>
+        </p:txBody>
+      </p:sp>
+      <p:sp>
+        <p:nvSpPr>
+          <p:cNvPr id="37" name="Rounded Rectangle 36"/>
+          <p:cNvSpPr/>
+          <p:nvPr/>
+        </p:nvSpPr>
+        <p:spPr>
+          <a:xfrm>
+            <a:off x="457200" y="4160520"/>
+            <a:ext cx="8229600" cy="640080"/>
           </a:xfrm>
           <a:prstGeom prst="roundRect">
             <a:avLst/>
@@ -8715,57 +8265,14 @@
       </p:sp>
       <p:sp>
         <p:nvSpPr>
-          <p:cNvPr id="17" name="Oval 16"/>
-          <p:cNvSpPr/>
-          <p:nvPr/>
-        </p:nvSpPr>
-        <p:spPr>
-          <a:xfrm>
-            <a:off x="5029200" y="2971800"/>
-            <a:ext cx="640080" cy="640080"/>
-          </a:xfrm>
-          <a:prstGeom prst="ellipse">
-            <a:avLst/>
-          </a:prstGeom>
-          <a:solidFill>
-            <a:srgbClr val="22C55E"/>
-          </a:solidFill>
-          <a:ln>
-            <a:noFill/>
-          </a:ln>
-        </p:spPr>
-        <p:style>
-          <a:lnRef idx="1">
-            <a:schemeClr val="accent1"/>
-          </a:lnRef>
-          <a:fillRef idx="3">
-            <a:schemeClr val="accent1"/>
-          </a:fillRef>
-          <a:effectRef idx="2">
-            <a:schemeClr val="accent1"/>
-          </a:effectRef>
-          <a:fontRef idx="minor">
-            <a:schemeClr val="lt1"/>
-          </a:fontRef>
-        </p:style>
-        <p:txBody>
-          <a:bodyPr rtlCol="0" anchor="ctr"/>
-          <a:lstStyle/>
-          <a:p>
-            <a:pPr algn="ctr"/>
-          </a:p>
-        </p:txBody>
-      </p:sp>
-      <p:sp>
-        <p:nvSpPr>
-          <p:cNvPr id="18" name="TextBox 17"/>
-          <p:cNvSpPr txBox="1"/>
-          <p:nvPr/>
-        </p:nvSpPr>
-        <p:spPr>
-          <a:xfrm>
-            <a:off x="5852160" y="2926080"/>
-            <a:ext cx="2651760" cy="411480"/>
+          <p:cNvPr id="38" name="TextBox 37"/>
+          <p:cNvSpPr txBox="1"/>
+          <p:nvPr/>
+        </p:nvSpPr>
+        <p:spPr>
+          <a:xfrm>
+            <a:off x="457200" y="4297680"/>
+            <a:ext cx="8229600" cy="365760"/>
           </a:xfrm>
           <a:prstGeom prst="rect">
             <a:avLst/>
@@ -8778,7 +8285,7 @@
           </a:bodyPr>
           <a:lstStyle/>
           <a:p>
-            <a:pPr>
+            <a:pPr algn="ctr">
               <a:defRPr sz="1800" b="1">
                 <a:solidFill>
                   <a:srgbClr val="22C55E"/>
@@ -8786,49 +8293,14 @@
               </a:defRPr>
             </a:pPr>
             <a:r>
-              <a:t>Aprendizes</a:t>
-            </a:r>
-          </a:p>
-        </p:txBody>
-      </p:sp>
-      <p:sp>
-        <p:nvSpPr>
-          <p:cNvPr id="19" name="TextBox 18"/>
-          <p:cNvSpPr txBox="1"/>
-          <p:nvPr/>
-        </p:nvSpPr>
-        <p:spPr>
-          <a:xfrm>
-            <a:off x="5852160" y="3337560"/>
-            <a:ext cx="2651760" cy="548640"/>
-          </a:xfrm>
-          <a:prstGeom prst="rect">
-            <a:avLst/>
-          </a:prstGeom>
-          <a:noFill/>
-        </p:spPr>
-        <p:txBody>
-          <a:bodyPr wrap="square">
-            <a:spAutoFit/>
-          </a:bodyPr>
-          <a:lstStyle/>
-          <a:p>
-            <a:pPr>
-              <a:defRPr sz="1300">
-                <a:solidFill>
-                  <a:srgbClr val="9CA3AF"/>
-                </a:solidFill>
-              </a:defRPr>
-            </a:pPr>
-            <a:r>
-              <a:t>De qualquer nível, do iniciante ao avançado</a:t>
-            </a:r>
-          </a:p>
-        </p:txBody>
-      </p:sp>
-      <p:sp>
-        <p:nvSpPr>
-          <p:cNvPr id="20" name="TextBox 19"/>
+              <a:t>Comece grátis com 100 créditos - Sem cartão de crédito necessário!</a:t>
+            </a:r>
+          </a:p>
+        </p:txBody>
+      </p:sp>
+      <p:sp>
+        <p:nvSpPr>
+          <p:cNvPr id="39" name="TextBox 38"/>
           <p:cNvSpPr txBox="1"/>
           <p:nvPr/>
         </p:nvSpPr>
@@ -8924,20 +8396,55 @@
       </p:sp>
       <p:sp>
         <p:nvSpPr>
-          <p:cNvPr id="3" name="Rectangle 2"/>
+          <p:cNvPr id="3" name="TextBox 2"/>
+          <p:cNvSpPr txBox="1"/>
+          <p:nvPr/>
+        </p:nvSpPr>
+        <p:spPr>
+          <a:xfrm>
+            <a:off x="457200" y="137160"/>
+            <a:ext cx="8229600" cy="502920"/>
+          </a:xfrm>
+          <a:prstGeom prst="rect">
+            <a:avLst/>
+          </a:prstGeom>
+          <a:noFill/>
+        </p:spPr>
+        <p:txBody>
+          <a:bodyPr wrap="none">
+            <a:spAutoFit/>
+          </a:bodyPr>
+          <a:lstStyle/>
+          <a:p>
+            <a:pPr algn="ctr">
+              <a:defRPr sz="3200" b="1">
+                <a:solidFill>
+                  <a:srgbClr val="FFFFFF"/>
+                </a:solidFill>
+              </a:defRPr>
+            </a:pPr>
+            <a:r>
+              <a:t>Por que escolher o CorrectMe?</a:t>
+            </a:r>
+          </a:p>
+        </p:txBody>
+      </p:sp>
+      <p:sp>
+        <p:nvSpPr>
+          <p:cNvPr id="4" name="Rounded Rectangle 3"/>
           <p:cNvSpPr/>
           <p:nvPr/>
         </p:nvSpPr>
         <p:spPr>
           <a:xfrm>
-            <a:off x="0" y="0"/>
-            <a:ext cx="9144000" cy="91440"/>
-          </a:xfrm>
-          <a:prstGeom prst="rect">
+            <a:off x="457200" y="731520"/>
+            <a:ext cx="8229600" cy="457200"/>
+          </a:xfrm>
+          <a:prstGeom prst="roundRect">
             <a:avLst/>
           </a:prstGeom>
           <a:solidFill>
-            <a:srgbClr val="A855F7"/>
+            <a:srgbClr val="251C45"/>
           </a:solidFill>
           <a:ln>
             <a:noFill/>
@@ -8965,30 +8472,6 @@
           </a:p>
         </p:txBody>
       </p:sp>
-      <p:pic>
-        <p:nvPicPr>
-          <p:cNvPr id="4" name="Picture 3" descr="LogobrancofundoTransparentev1.png"/>
-          <p:cNvPicPr>
-            <a:picLocks noChangeAspect="1"/>
-          </p:cNvPicPr>
-          <p:nvPr/>
-        </p:nvPicPr>
-        <p:blipFill>
-          <a:blip r:embed="rId2"/>
-          <a:stretch>
-            <a:fillRect/>
-          </a:stretch>
-        </p:blipFill>
-        <p:spPr>
-          <a:xfrm>
-            <a:off x="3474720" y="457200"/>
-            <a:ext cx="2133600" cy="1280160"/>
-          </a:xfrm>
-          <a:prstGeom prst="rect">
-            <a:avLst/>
-          </a:prstGeom>
-        </p:spPr>
-      </p:pic>
       <p:sp>
         <p:nvSpPr>
           <p:cNvPr id="5" name="TextBox 4"/>
@@ -8997,8 +8480,43 @@
         </p:nvSpPr>
         <p:spPr>
           <a:xfrm>
-            <a:off x="457200" y="1920240"/>
-            <a:ext cx="8229600" cy="914400"/>
+            <a:off x="457200" y="822960"/>
+            <a:ext cx="2560320" cy="457200"/>
+          </a:xfrm>
+          <a:prstGeom prst="rect">
+            <a:avLst/>
+          </a:prstGeom>
+          <a:noFill/>
+        </p:spPr>
+        <p:txBody>
+          <a:bodyPr wrap="none" lIns="137160">
+            <a:spAutoFit/>
+          </a:bodyPr>
+          <a:lstStyle/>
+          <a:p>
+            <a:pPr algn="l">
+              <a:defRPr sz="1300" b="1">
+                <a:solidFill>
+                  <a:srgbClr val="FFFFFF"/>
+                </a:solidFill>
+              </a:defRPr>
+            </a:pPr>
+            <a:r>
+              <a:t>Recurso</a:t>
+            </a:r>
+          </a:p>
+        </p:txBody>
+      </p:sp>
+      <p:sp>
+        <p:nvSpPr>
+          <p:cNvPr id="6" name="TextBox 5"/>
+          <p:cNvSpPr txBox="1"/>
+          <p:nvPr/>
+        </p:nvSpPr>
+        <p:spPr>
+          <a:xfrm>
+            <a:off x="3017520" y="822960"/>
+            <a:ext cx="1828800" cy="457200"/>
           </a:xfrm>
           <a:prstGeom prst="rect">
             <a:avLst/>
@@ -9012,28 +8530,63 @@
           <a:lstStyle/>
           <a:p>
             <a:pPr algn="ctr">
-              <a:defRPr sz="4000" b="1">
+              <a:defRPr sz="1300" b="1">
+                <a:solidFill>
+                  <a:srgbClr val="A855F7"/>
+                </a:solidFill>
+              </a:defRPr>
+            </a:pPr>
+            <a:r>
+              <a:t>CorrectMe</a:t>
+            </a:r>
+          </a:p>
+        </p:txBody>
+      </p:sp>
+      <p:sp>
+        <p:nvSpPr>
+          <p:cNvPr id="7" name="TextBox 6"/>
+          <p:cNvSpPr txBox="1"/>
+          <p:nvPr/>
+        </p:nvSpPr>
+        <p:spPr>
+          <a:xfrm>
+            <a:off x="4846320" y="822960"/>
+            <a:ext cx="2011680" cy="457200"/>
+          </a:xfrm>
+          <a:prstGeom prst="rect">
+            <a:avLst/>
+          </a:prstGeom>
+          <a:noFill/>
+        </p:spPr>
+        <p:txBody>
+          <a:bodyPr wrap="none">
+            <a:spAutoFit/>
+          </a:bodyPr>
+          <a:lstStyle/>
+          <a:p>
+            <a:pPr algn="ctr">
+              <a:defRPr sz="1300" b="1">
                 <a:solidFill>
                   <a:srgbClr val="FFFFFF"/>
                 </a:solidFill>
               </a:defRPr>
             </a:pPr>
             <a:r>
-              <a:t>Comece a dominar o alemão hoje!</a:t>
-            </a:r>
-          </a:p>
-        </p:txBody>
-      </p:sp>
-      <p:sp>
-        <p:nvSpPr>
-          <p:cNvPr id="6" name="TextBox 5"/>
-          <p:cNvSpPr txBox="1"/>
-          <p:nvPr/>
-        </p:nvSpPr>
-        <p:spPr>
-          <a:xfrm>
-            <a:off x="457200" y="2743200"/>
-            <a:ext cx="8229600" cy="548640"/>
+              <a:t>LanguageTool</a:t>
+            </a:r>
+          </a:p>
+        </p:txBody>
+      </p:sp>
+      <p:sp>
+        <p:nvSpPr>
+          <p:cNvPr id="8" name="TextBox 7"/>
+          <p:cNvSpPr txBox="1"/>
+          <p:nvPr/>
+        </p:nvSpPr>
+        <p:spPr>
+          <a:xfrm>
+            <a:off x="6858000" y="822960"/>
+            <a:ext cx="1828800" cy="457200"/>
           </a:xfrm>
           <a:prstGeom prst="rect">
             <a:avLst/>
@@ -9047,28 +8600,1311 @@
           <a:lstStyle/>
           <a:p>
             <a:pPr algn="ctr">
-              <a:defRPr sz="2000">
-                <a:solidFill>
-                  <a:srgbClr val="A855F7"/>
-                </a:solidFill>
-              </a:defRPr>
-            </a:pPr>
-            <a:r>
-              <a:t>Experimente grátis - 100 créditos para novos usuários</a:t>
-            </a:r>
-          </a:p>
-        </p:txBody>
-      </p:sp>
-      <p:sp>
-        <p:nvSpPr>
-          <p:cNvPr id="7" name="Rounded Rectangle 6"/>
+              <a:defRPr sz="1300" b="1">
+                <a:solidFill>
+                  <a:srgbClr val="FFFFFF"/>
+                </a:solidFill>
+              </a:defRPr>
+            </a:pPr>
+            <a:r>
+              <a:t>Scribbr</a:t>
+            </a:r>
+          </a:p>
+        </p:txBody>
+      </p:sp>
+      <p:sp>
+        <p:nvSpPr>
+          <p:cNvPr id="9" name="Rectangle 8"/>
           <p:cNvSpPr/>
           <p:nvPr/>
         </p:nvSpPr>
         <p:spPr>
           <a:xfrm>
-            <a:off x="2286000" y="3383280"/>
-            <a:ext cx="4572000" cy="731520"/>
+            <a:off x="457200" y="1188720"/>
+            <a:ext cx="8229600" cy="457200"/>
+          </a:xfrm>
+          <a:prstGeom prst="rect">
+            <a:avLst/>
+          </a:prstGeom>
+          <a:solidFill>
+            <a:srgbClr val="191232"/>
+          </a:solidFill>
+          <a:ln>
+            <a:noFill/>
+          </a:ln>
+        </p:spPr>
+        <p:style>
+          <a:lnRef idx="1">
+            <a:schemeClr val="accent1"/>
+          </a:lnRef>
+          <a:fillRef idx="3">
+            <a:schemeClr val="accent1"/>
+          </a:fillRef>
+          <a:effectRef idx="2">
+            <a:schemeClr val="accent1"/>
+          </a:effectRef>
+          <a:fontRef idx="minor">
+            <a:schemeClr val="lt1"/>
+          </a:fontRef>
+        </p:style>
+        <p:txBody>
+          <a:bodyPr rtlCol="0" anchor="ctr"/>
+          <a:lstStyle/>
+          <a:p>
+            <a:pPr algn="ctr"/>
+          </a:p>
+        </p:txBody>
+      </p:sp>
+      <p:sp>
+        <p:nvSpPr>
+          <p:cNvPr id="10" name="TextBox 9"/>
+          <p:cNvSpPr txBox="1"/>
+          <p:nvPr/>
+        </p:nvSpPr>
+        <p:spPr>
+          <a:xfrm>
+            <a:off x="457200" y="1280160"/>
+            <a:ext cx="2560320" cy="457200"/>
+          </a:xfrm>
+          <a:prstGeom prst="rect">
+            <a:avLst/>
+          </a:prstGeom>
+          <a:noFill/>
+        </p:spPr>
+        <p:txBody>
+          <a:bodyPr wrap="none" lIns="137160">
+            <a:spAutoFit/>
+          </a:bodyPr>
+          <a:lstStyle/>
+          <a:p>
+            <a:pPr algn="l">
+              <a:defRPr sz="1100">
+                <a:solidFill>
+                  <a:srgbClr val="9CA3AF"/>
+                </a:solidFill>
+              </a:defRPr>
+            </a:pPr>
+            <a:r>
+              <a:t>Especializado em alemão</a:t>
+            </a:r>
+          </a:p>
+        </p:txBody>
+      </p:sp>
+      <p:sp>
+        <p:nvSpPr>
+          <p:cNvPr id="11" name="TextBox 10"/>
+          <p:cNvSpPr txBox="1"/>
+          <p:nvPr/>
+        </p:nvSpPr>
+        <p:spPr>
+          <a:xfrm>
+            <a:off x="3017520" y="1280160"/>
+            <a:ext cx="1828800" cy="457200"/>
+          </a:xfrm>
+          <a:prstGeom prst="rect">
+            <a:avLst/>
+          </a:prstGeom>
+          <a:noFill/>
+        </p:spPr>
+        <p:txBody>
+          <a:bodyPr wrap="none">
+            <a:spAutoFit/>
+          </a:bodyPr>
+          <a:lstStyle/>
+          <a:p>
+            <a:pPr algn="ctr">
+              <a:defRPr sz="1100" b="1">
+                <a:solidFill>
+                  <a:srgbClr val="22C55E"/>
+                </a:solidFill>
+              </a:defRPr>
+            </a:pPr>
+            <a:r>
+              <a:t>100%</a:t>
+            </a:r>
+          </a:p>
+        </p:txBody>
+      </p:sp>
+      <p:sp>
+        <p:nvSpPr>
+          <p:cNvPr id="12" name="TextBox 11"/>
+          <p:cNvSpPr txBox="1"/>
+          <p:nvPr/>
+        </p:nvSpPr>
+        <p:spPr>
+          <a:xfrm>
+            <a:off x="4846320" y="1280160"/>
+            <a:ext cx="2011680" cy="457200"/>
+          </a:xfrm>
+          <a:prstGeom prst="rect">
+            <a:avLst/>
+          </a:prstGeom>
+          <a:noFill/>
+        </p:spPr>
+        <p:txBody>
+          <a:bodyPr wrap="none">
+            <a:spAutoFit/>
+          </a:bodyPr>
+          <a:lstStyle/>
+          <a:p>
+            <a:pPr algn="ctr">
+              <a:defRPr sz="1100">
+                <a:solidFill>
+                  <a:srgbClr val="EAB308"/>
+                </a:solidFill>
+              </a:defRPr>
+            </a:pPr>
+            <a:r>
+              <a:t>Parcial</a:t>
+            </a:r>
+          </a:p>
+        </p:txBody>
+      </p:sp>
+      <p:sp>
+        <p:nvSpPr>
+          <p:cNvPr id="13" name="TextBox 12"/>
+          <p:cNvSpPr txBox="1"/>
+          <p:nvPr/>
+        </p:nvSpPr>
+        <p:spPr>
+          <a:xfrm>
+            <a:off x="6858000" y="1280160"/>
+            <a:ext cx="1828800" cy="457200"/>
+          </a:xfrm>
+          <a:prstGeom prst="rect">
+            <a:avLst/>
+          </a:prstGeom>
+          <a:noFill/>
+        </p:spPr>
+        <p:txBody>
+          <a:bodyPr wrap="none">
+            <a:spAutoFit/>
+          </a:bodyPr>
+          <a:lstStyle/>
+          <a:p>
+            <a:pPr algn="ctr">
+              <a:defRPr sz="1100">
+                <a:solidFill>
+                  <a:srgbClr val="EAB308"/>
+                </a:solidFill>
+              </a:defRPr>
+            </a:pPr>
+            <a:r>
+              <a:t>Parcial</a:t>
+            </a:r>
+          </a:p>
+        </p:txBody>
+      </p:sp>
+      <p:sp>
+        <p:nvSpPr>
+          <p:cNvPr id="14" name="TextBox 13"/>
+          <p:cNvSpPr txBox="1"/>
+          <p:nvPr/>
+        </p:nvSpPr>
+        <p:spPr>
+          <a:xfrm>
+            <a:off x="457200" y="1737360"/>
+            <a:ext cx="2560320" cy="457200"/>
+          </a:xfrm>
+          <a:prstGeom prst="rect">
+            <a:avLst/>
+          </a:prstGeom>
+          <a:noFill/>
+        </p:spPr>
+        <p:txBody>
+          <a:bodyPr wrap="none" lIns="137160">
+            <a:spAutoFit/>
+          </a:bodyPr>
+          <a:lstStyle/>
+          <a:p>
+            <a:pPr algn="l">
+              <a:defRPr sz="1100">
+                <a:solidFill>
+                  <a:srgbClr val="9CA3AF"/>
+                </a:solidFill>
+              </a:defRPr>
+            </a:pPr>
+            <a:r>
+              <a:t>Feedback pedagógico</a:t>
+            </a:r>
+          </a:p>
+        </p:txBody>
+      </p:sp>
+      <p:sp>
+        <p:nvSpPr>
+          <p:cNvPr id="15" name="TextBox 14"/>
+          <p:cNvSpPr txBox="1"/>
+          <p:nvPr/>
+        </p:nvSpPr>
+        <p:spPr>
+          <a:xfrm>
+            <a:off x="3017520" y="1737360"/>
+            <a:ext cx="1828800" cy="457200"/>
+          </a:xfrm>
+          <a:prstGeom prst="rect">
+            <a:avLst/>
+          </a:prstGeom>
+          <a:noFill/>
+        </p:spPr>
+        <p:txBody>
+          <a:bodyPr wrap="none">
+            <a:spAutoFit/>
+          </a:bodyPr>
+          <a:lstStyle/>
+          <a:p>
+            <a:pPr algn="ctr">
+              <a:defRPr sz="1100" b="1">
+                <a:solidFill>
+                  <a:srgbClr val="22C55E"/>
+                </a:solidFill>
+              </a:defRPr>
+            </a:pPr>
+            <a:r>
+              <a:t>Sim</a:t>
+            </a:r>
+          </a:p>
+        </p:txBody>
+      </p:sp>
+      <p:sp>
+        <p:nvSpPr>
+          <p:cNvPr id="16" name="TextBox 15"/>
+          <p:cNvSpPr txBox="1"/>
+          <p:nvPr/>
+        </p:nvSpPr>
+        <p:spPr>
+          <a:xfrm>
+            <a:off x="4846320" y="1737360"/>
+            <a:ext cx="2011680" cy="457200"/>
+          </a:xfrm>
+          <a:prstGeom prst="rect">
+            <a:avLst/>
+          </a:prstGeom>
+          <a:noFill/>
+        </p:spPr>
+        <p:txBody>
+          <a:bodyPr wrap="none">
+            <a:spAutoFit/>
+          </a:bodyPr>
+          <a:lstStyle/>
+          <a:p>
+            <a:pPr algn="ctr">
+              <a:defRPr sz="1100">
+                <a:solidFill>
+                  <a:srgbClr val="EF4444"/>
+                </a:solidFill>
+              </a:defRPr>
+            </a:pPr>
+            <a:r>
+              <a:t>Não</a:t>
+            </a:r>
+          </a:p>
+        </p:txBody>
+      </p:sp>
+      <p:sp>
+        <p:nvSpPr>
+          <p:cNvPr id="17" name="TextBox 16"/>
+          <p:cNvSpPr txBox="1"/>
+          <p:nvPr/>
+        </p:nvSpPr>
+        <p:spPr>
+          <a:xfrm>
+            <a:off x="6858000" y="1737360"/>
+            <a:ext cx="1828800" cy="457200"/>
+          </a:xfrm>
+          <a:prstGeom prst="rect">
+            <a:avLst/>
+          </a:prstGeom>
+          <a:noFill/>
+        </p:spPr>
+        <p:txBody>
+          <a:bodyPr wrap="none">
+            <a:spAutoFit/>
+          </a:bodyPr>
+          <a:lstStyle/>
+          <a:p>
+            <a:pPr algn="ctr">
+              <a:defRPr sz="1100">
+                <a:solidFill>
+                  <a:srgbClr val="EAB308"/>
+                </a:solidFill>
+              </a:defRPr>
+            </a:pPr>
+            <a:r>
+              <a:t>Limitado</a:t>
+            </a:r>
+          </a:p>
+        </p:txBody>
+      </p:sp>
+      <p:sp>
+        <p:nvSpPr>
+          <p:cNvPr id="18" name="Rectangle 17"/>
+          <p:cNvSpPr/>
+          <p:nvPr/>
+        </p:nvSpPr>
+        <p:spPr>
+          <a:xfrm>
+            <a:off x="457200" y="2103120"/>
+            <a:ext cx="8229600" cy="457200"/>
+          </a:xfrm>
+          <a:prstGeom prst="rect">
+            <a:avLst/>
+          </a:prstGeom>
+          <a:solidFill>
+            <a:srgbClr val="191232"/>
+          </a:solidFill>
+          <a:ln>
+            <a:noFill/>
+          </a:ln>
+        </p:spPr>
+        <p:style>
+          <a:lnRef idx="1">
+            <a:schemeClr val="accent1"/>
+          </a:lnRef>
+          <a:fillRef idx="3">
+            <a:schemeClr val="accent1"/>
+          </a:fillRef>
+          <a:effectRef idx="2">
+            <a:schemeClr val="accent1"/>
+          </a:effectRef>
+          <a:fontRef idx="minor">
+            <a:schemeClr val="lt1"/>
+          </a:fontRef>
+        </p:style>
+        <p:txBody>
+          <a:bodyPr rtlCol="0" anchor="ctr"/>
+          <a:lstStyle/>
+          <a:p>
+            <a:pPr algn="ctr"/>
+          </a:p>
+        </p:txBody>
+      </p:sp>
+      <p:sp>
+        <p:nvSpPr>
+          <p:cNvPr id="19" name="TextBox 18"/>
+          <p:cNvSpPr txBox="1"/>
+          <p:nvPr/>
+        </p:nvSpPr>
+        <p:spPr>
+          <a:xfrm>
+            <a:off x="457200" y="2194560"/>
+            <a:ext cx="2560320" cy="457200"/>
+          </a:xfrm>
+          <a:prstGeom prst="rect">
+            <a:avLst/>
+          </a:prstGeom>
+          <a:noFill/>
+        </p:spPr>
+        <p:txBody>
+          <a:bodyPr wrap="none" lIns="137160">
+            <a:spAutoFit/>
+          </a:bodyPr>
+          <a:lstStyle/>
+          <a:p>
+            <a:pPr algn="l">
+              <a:defRPr sz="1100">
+                <a:solidFill>
+                  <a:srgbClr val="9CA3AF"/>
+                </a:solidFill>
+              </a:defRPr>
+            </a:pPr>
+            <a:r>
+              <a:t>Categorização de erros</a:t>
+            </a:r>
+          </a:p>
+        </p:txBody>
+      </p:sp>
+      <p:sp>
+        <p:nvSpPr>
+          <p:cNvPr id="20" name="TextBox 19"/>
+          <p:cNvSpPr txBox="1"/>
+          <p:nvPr/>
+        </p:nvSpPr>
+        <p:spPr>
+          <a:xfrm>
+            <a:off x="3017520" y="2194560"/>
+            <a:ext cx="1828800" cy="457200"/>
+          </a:xfrm>
+          <a:prstGeom prst="rect">
+            <a:avLst/>
+          </a:prstGeom>
+          <a:noFill/>
+        </p:spPr>
+        <p:txBody>
+          <a:bodyPr wrap="none">
+            <a:spAutoFit/>
+          </a:bodyPr>
+          <a:lstStyle/>
+          <a:p>
+            <a:pPr algn="ctr">
+              <a:defRPr sz="1100" b="1">
+                <a:solidFill>
+                  <a:srgbClr val="22C55E"/>
+                </a:solidFill>
+              </a:defRPr>
+            </a:pPr>
+            <a:r>
+              <a:t>Sim</a:t>
+            </a:r>
+          </a:p>
+        </p:txBody>
+      </p:sp>
+      <p:sp>
+        <p:nvSpPr>
+          <p:cNvPr id="21" name="TextBox 20"/>
+          <p:cNvSpPr txBox="1"/>
+          <p:nvPr/>
+        </p:nvSpPr>
+        <p:spPr>
+          <a:xfrm>
+            <a:off x="4846320" y="2194560"/>
+            <a:ext cx="2011680" cy="457200"/>
+          </a:xfrm>
+          <a:prstGeom prst="rect">
+            <a:avLst/>
+          </a:prstGeom>
+          <a:noFill/>
+        </p:spPr>
+        <p:txBody>
+          <a:bodyPr wrap="none">
+            <a:spAutoFit/>
+          </a:bodyPr>
+          <a:lstStyle/>
+          <a:p>
+            <a:pPr algn="ctr">
+              <a:defRPr sz="1100">
+                <a:solidFill>
+                  <a:srgbClr val="EF4444"/>
+                </a:solidFill>
+              </a:defRPr>
+            </a:pPr>
+            <a:r>
+              <a:t>Não</a:t>
+            </a:r>
+          </a:p>
+        </p:txBody>
+      </p:sp>
+      <p:sp>
+        <p:nvSpPr>
+          <p:cNvPr id="22" name="TextBox 21"/>
+          <p:cNvSpPr txBox="1"/>
+          <p:nvPr/>
+        </p:nvSpPr>
+        <p:spPr>
+          <a:xfrm>
+            <a:off x="6858000" y="2194560"/>
+            <a:ext cx="1828800" cy="457200"/>
+          </a:xfrm>
+          <a:prstGeom prst="rect">
+            <a:avLst/>
+          </a:prstGeom>
+          <a:noFill/>
+        </p:spPr>
+        <p:txBody>
+          <a:bodyPr wrap="none">
+            <a:spAutoFit/>
+          </a:bodyPr>
+          <a:lstStyle/>
+          <a:p>
+            <a:pPr algn="ctr">
+              <a:defRPr sz="1100">
+                <a:solidFill>
+                  <a:srgbClr val="EF4444"/>
+                </a:solidFill>
+              </a:defRPr>
+            </a:pPr>
+            <a:r>
+              <a:t>Não</a:t>
+            </a:r>
+          </a:p>
+        </p:txBody>
+      </p:sp>
+      <p:sp>
+        <p:nvSpPr>
+          <p:cNvPr id="23" name="TextBox 22"/>
+          <p:cNvSpPr txBox="1"/>
+          <p:nvPr/>
+        </p:nvSpPr>
+        <p:spPr>
+          <a:xfrm>
+            <a:off x="457200" y="2651760"/>
+            <a:ext cx="2560320" cy="457200"/>
+          </a:xfrm>
+          <a:prstGeom prst="rect">
+            <a:avLst/>
+          </a:prstGeom>
+          <a:noFill/>
+        </p:spPr>
+        <p:txBody>
+          <a:bodyPr wrap="none" lIns="137160">
+            <a:spAutoFit/>
+          </a:bodyPr>
+          <a:lstStyle/>
+          <a:p>
+            <a:pPr algn="l">
+              <a:defRPr sz="1100">
+                <a:solidFill>
+                  <a:srgbClr val="9CA3AF"/>
+                </a:solidFill>
+              </a:defRPr>
+            </a:pPr>
+            <a:r>
+              <a:t>Flashcards integrados</a:t>
+            </a:r>
+          </a:p>
+        </p:txBody>
+      </p:sp>
+      <p:sp>
+        <p:nvSpPr>
+          <p:cNvPr id="24" name="TextBox 23"/>
+          <p:cNvSpPr txBox="1"/>
+          <p:nvPr/>
+        </p:nvSpPr>
+        <p:spPr>
+          <a:xfrm>
+            <a:off x="3017520" y="2651760"/>
+            <a:ext cx="1828800" cy="457200"/>
+          </a:xfrm>
+          <a:prstGeom prst="rect">
+            <a:avLst/>
+          </a:prstGeom>
+          <a:noFill/>
+        </p:spPr>
+        <p:txBody>
+          <a:bodyPr wrap="none">
+            <a:spAutoFit/>
+          </a:bodyPr>
+          <a:lstStyle/>
+          <a:p>
+            <a:pPr algn="ctr">
+              <a:defRPr sz="1100" b="1">
+                <a:solidFill>
+                  <a:srgbClr val="22C55E"/>
+                </a:solidFill>
+              </a:defRPr>
+            </a:pPr>
+            <a:r>
+              <a:t>Sim</a:t>
+            </a:r>
+          </a:p>
+        </p:txBody>
+      </p:sp>
+      <p:sp>
+        <p:nvSpPr>
+          <p:cNvPr id="25" name="TextBox 24"/>
+          <p:cNvSpPr txBox="1"/>
+          <p:nvPr/>
+        </p:nvSpPr>
+        <p:spPr>
+          <a:xfrm>
+            <a:off x="4846320" y="2651760"/>
+            <a:ext cx="2011680" cy="457200"/>
+          </a:xfrm>
+          <a:prstGeom prst="rect">
+            <a:avLst/>
+          </a:prstGeom>
+          <a:noFill/>
+        </p:spPr>
+        <p:txBody>
+          <a:bodyPr wrap="none">
+            <a:spAutoFit/>
+          </a:bodyPr>
+          <a:lstStyle/>
+          <a:p>
+            <a:pPr algn="ctr">
+              <a:defRPr sz="1100">
+                <a:solidFill>
+                  <a:srgbClr val="EF4444"/>
+                </a:solidFill>
+              </a:defRPr>
+            </a:pPr>
+            <a:r>
+              <a:t>Não</a:t>
+            </a:r>
+          </a:p>
+        </p:txBody>
+      </p:sp>
+      <p:sp>
+        <p:nvSpPr>
+          <p:cNvPr id="26" name="TextBox 25"/>
+          <p:cNvSpPr txBox="1"/>
+          <p:nvPr/>
+        </p:nvSpPr>
+        <p:spPr>
+          <a:xfrm>
+            <a:off x="6858000" y="2651760"/>
+            <a:ext cx="1828800" cy="457200"/>
+          </a:xfrm>
+          <a:prstGeom prst="rect">
+            <a:avLst/>
+          </a:prstGeom>
+          <a:noFill/>
+        </p:spPr>
+        <p:txBody>
+          <a:bodyPr wrap="none">
+            <a:spAutoFit/>
+          </a:bodyPr>
+          <a:lstStyle/>
+          <a:p>
+            <a:pPr algn="ctr">
+              <a:defRPr sz="1100">
+                <a:solidFill>
+                  <a:srgbClr val="EF4444"/>
+                </a:solidFill>
+              </a:defRPr>
+            </a:pPr>
+            <a:r>
+              <a:t>Não</a:t>
+            </a:r>
+          </a:p>
+        </p:txBody>
+      </p:sp>
+      <p:sp>
+        <p:nvSpPr>
+          <p:cNvPr id="27" name="Rectangle 26"/>
+          <p:cNvSpPr/>
+          <p:nvPr/>
+        </p:nvSpPr>
+        <p:spPr>
+          <a:xfrm>
+            <a:off x="457200" y="3017520"/>
+            <a:ext cx="8229600" cy="457200"/>
+          </a:xfrm>
+          <a:prstGeom prst="rect">
+            <a:avLst/>
+          </a:prstGeom>
+          <a:solidFill>
+            <a:srgbClr val="191232"/>
+          </a:solidFill>
+          <a:ln>
+            <a:noFill/>
+          </a:ln>
+        </p:spPr>
+        <p:style>
+          <a:lnRef idx="1">
+            <a:schemeClr val="accent1"/>
+          </a:lnRef>
+          <a:fillRef idx="3">
+            <a:schemeClr val="accent1"/>
+          </a:fillRef>
+          <a:effectRef idx="2">
+            <a:schemeClr val="accent1"/>
+          </a:effectRef>
+          <a:fontRef idx="minor">
+            <a:schemeClr val="lt1"/>
+          </a:fontRef>
+        </p:style>
+        <p:txBody>
+          <a:bodyPr rtlCol="0" anchor="ctr"/>
+          <a:lstStyle/>
+          <a:p>
+            <a:pPr algn="ctr"/>
+          </a:p>
+        </p:txBody>
+      </p:sp>
+      <p:sp>
+        <p:nvSpPr>
+          <p:cNvPr id="28" name="TextBox 27"/>
+          <p:cNvSpPr txBox="1"/>
+          <p:nvPr/>
+        </p:nvSpPr>
+        <p:spPr>
+          <a:xfrm>
+            <a:off x="457200" y="3108960"/>
+            <a:ext cx="2560320" cy="457200"/>
+          </a:xfrm>
+          <a:prstGeom prst="rect">
+            <a:avLst/>
+          </a:prstGeom>
+          <a:noFill/>
+        </p:spPr>
+        <p:txBody>
+          <a:bodyPr wrap="none" lIns="137160">
+            <a:spAutoFit/>
+          </a:bodyPr>
+          <a:lstStyle/>
+          <a:p>
+            <a:pPr algn="l">
+              <a:defRPr sz="1100">
+                <a:solidFill>
+                  <a:srgbClr val="9CA3AF"/>
+                </a:solidFill>
+              </a:defRPr>
+            </a:pPr>
+            <a:r>
+              <a:t>Listas de vocabulário</a:t>
+            </a:r>
+          </a:p>
+        </p:txBody>
+      </p:sp>
+      <p:sp>
+        <p:nvSpPr>
+          <p:cNvPr id="29" name="TextBox 28"/>
+          <p:cNvSpPr txBox="1"/>
+          <p:nvPr/>
+        </p:nvSpPr>
+        <p:spPr>
+          <a:xfrm>
+            <a:off x="3017520" y="3108960"/>
+            <a:ext cx="1828800" cy="457200"/>
+          </a:xfrm>
+          <a:prstGeom prst="rect">
+            <a:avLst/>
+          </a:prstGeom>
+          <a:noFill/>
+        </p:spPr>
+        <p:txBody>
+          <a:bodyPr wrap="none">
+            <a:spAutoFit/>
+          </a:bodyPr>
+          <a:lstStyle/>
+          <a:p>
+            <a:pPr algn="ctr">
+              <a:defRPr sz="1100" b="1">
+                <a:solidFill>
+                  <a:srgbClr val="22C55E"/>
+                </a:solidFill>
+              </a:defRPr>
+            </a:pPr>
+            <a:r>
+              <a:t>Sim</a:t>
+            </a:r>
+          </a:p>
+        </p:txBody>
+      </p:sp>
+      <p:sp>
+        <p:nvSpPr>
+          <p:cNvPr id="30" name="TextBox 29"/>
+          <p:cNvSpPr txBox="1"/>
+          <p:nvPr/>
+        </p:nvSpPr>
+        <p:spPr>
+          <a:xfrm>
+            <a:off x="4846320" y="3108960"/>
+            <a:ext cx="2011680" cy="457200"/>
+          </a:xfrm>
+          <a:prstGeom prst="rect">
+            <a:avLst/>
+          </a:prstGeom>
+          <a:noFill/>
+        </p:spPr>
+        <p:txBody>
+          <a:bodyPr wrap="none">
+            <a:spAutoFit/>
+          </a:bodyPr>
+          <a:lstStyle/>
+          <a:p>
+            <a:pPr algn="ctr">
+              <a:defRPr sz="1100">
+                <a:solidFill>
+                  <a:srgbClr val="EF4444"/>
+                </a:solidFill>
+              </a:defRPr>
+            </a:pPr>
+            <a:r>
+              <a:t>Não</a:t>
+            </a:r>
+          </a:p>
+        </p:txBody>
+      </p:sp>
+      <p:sp>
+        <p:nvSpPr>
+          <p:cNvPr id="31" name="TextBox 30"/>
+          <p:cNvSpPr txBox="1"/>
+          <p:nvPr/>
+        </p:nvSpPr>
+        <p:spPr>
+          <a:xfrm>
+            <a:off x="6858000" y="3108960"/>
+            <a:ext cx="1828800" cy="457200"/>
+          </a:xfrm>
+          <a:prstGeom prst="rect">
+            <a:avLst/>
+          </a:prstGeom>
+          <a:noFill/>
+        </p:spPr>
+        <p:txBody>
+          <a:bodyPr wrap="none">
+            <a:spAutoFit/>
+          </a:bodyPr>
+          <a:lstStyle/>
+          <a:p>
+            <a:pPr algn="ctr">
+              <a:defRPr sz="1100">
+                <a:solidFill>
+                  <a:srgbClr val="EF4444"/>
+                </a:solidFill>
+              </a:defRPr>
+            </a:pPr>
+            <a:r>
+              <a:t>Não</a:t>
+            </a:r>
+          </a:p>
+        </p:txBody>
+      </p:sp>
+      <p:sp>
+        <p:nvSpPr>
+          <p:cNvPr id="32" name="TextBox 31"/>
+          <p:cNvSpPr txBox="1"/>
+          <p:nvPr/>
+        </p:nvSpPr>
+        <p:spPr>
+          <a:xfrm>
+            <a:off x="457200" y="3566160"/>
+            <a:ext cx="2560320" cy="457200"/>
+          </a:xfrm>
+          <a:prstGeom prst="rect">
+            <a:avLst/>
+          </a:prstGeom>
+          <a:noFill/>
+        </p:spPr>
+        <p:txBody>
+          <a:bodyPr wrap="none" lIns="137160">
+            <a:spAutoFit/>
+          </a:bodyPr>
+          <a:lstStyle/>
+          <a:p>
+            <a:pPr algn="l">
+              <a:defRPr sz="1100">
+                <a:solidFill>
+                  <a:srgbClr val="9CA3AF"/>
+                </a:solidFill>
+              </a:defRPr>
+            </a:pPr>
+            <a:r>
+              <a:t>Chatbot para prática</a:t>
+            </a:r>
+          </a:p>
+        </p:txBody>
+      </p:sp>
+      <p:sp>
+        <p:nvSpPr>
+          <p:cNvPr id="33" name="TextBox 32"/>
+          <p:cNvSpPr txBox="1"/>
+          <p:nvPr/>
+        </p:nvSpPr>
+        <p:spPr>
+          <a:xfrm>
+            <a:off x="3017520" y="3566160"/>
+            <a:ext cx="1828800" cy="457200"/>
+          </a:xfrm>
+          <a:prstGeom prst="rect">
+            <a:avLst/>
+          </a:prstGeom>
+          <a:noFill/>
+        </p:spPr>
+        <p:txBody>
+          <a:bodyPr wrap="none">
+            <a:spAutoFit/>
+          </a:bodyPr>
+          <a:lstStyle/>
+          <a:p>
+            <a:pPr algn="ctr">
+              <a:defRPr sz="1100" b="1">
+                <a:solidFill>
+                  <a:srgbClr val="22C55E"/>
+                </a:solidFill>
+              </a:defRPr>
+            </a:pPr>
+            <a:r>
+              <a:t>Sim</a:t>
+            </a:r>
+          </a:p>
+        </p:txBody>
+      </p:sp>
+      <p:sp>
+        <p:nvSpPr>
+          <p:cNvPr id="34" name="TextBox 33"/>
+          <p:cNvSpPr txBox="1"/>
+          <p:nvPr/>
+        </p:nvSpPr>
+        <p:spPr>
+          <a:xfrm>
+            <a:off x="4846320" y="3566160"/>
+            <a:ext cx="2011680" cy="457200"/>
+          </a:xfrm>
+          <a:prstGeom prst="rect">
+            <a:avLst/>
+          </a:prstGeom>
+          <a:noFill/>
+        </p:spPr>
+        <p:txBody>
+          <a:bodyPr wrap="none">
+            <a:spAutoFit/>
+          </a:bodyPr>
+          <a:lstStyle/>
+          <a:p>
+            <a:pPr algn="ctr">
+              <a:defRPr sz="1100">
+                <a:solidFill>
+                  <a:srgbClr val="EF4444"/>
+                </a:solidFill>
+              </a:defRPr>
+            </a:pPr>
+            <a:r>
+              <a:t>Não</a:t>
+            </a:r>
+          </a:p>
+        </p:txBody>
+      </p:sp>
+      <p:sp>
+        <p:nvSpPr>
+          <p:cNvPr id="35" name="TextBox 34"/>
+          <p:cNvSpPr txBox="1"/>
+          <p:nvPr/>
+        </p:nvSpPr>
+        <p:spPr>
+          <a:xfrm>
+            <a:off x="6858000" y="3566160"/>
+            <a:ext cx="1828800" cy="457200"/>
+          </a:xfrm>
+          <a:prstGeom prst="rect">
+            <a:avLst/>
+          </a:prstGeom>
+          <a:noFill/>
+        </p:spPr>
+        <p:txBody>
+          <a:bodyPr wrap="none">
+            <a:spAutoFit/>
+          </a:bodyPr>
+          <a:lstStyle/>
+          <a:p>
+            <a:pPr algn="ctr">
+              <a:defRPr sz="1100">
+                <a:solidFill>
+                  <a:srgbClr val="EF4444"/>
+                </a:solidFill>
+              </a:defRPr>
+            </a:pPr>
+            <a:r>
+              <a:t>Não</a:t>
+            </a:r>
+          </a:p>
+        </p:txBody>
+      </p:sp>
+      <p:sp>
+        <p:nvSpPr>
+          <p:cNvPr id="36" name="Rectangle 35"/>
+          <p:cNvSpPr/>
+          <p:nvPr/>
+        </p:nvSpPr>
+        <p:spPr>
+          <a:xfrm>
+            <a:off x="457200" y="3931920"/>
+            <a:ext cx="8229600" cy="457200"/>
+          </a:xfrm>
+          <a:prstGeom prst="rect">
+            <a:avLst/>
+          </a:prstGeom>
+          <a:solidFill>
+            <a:srgbClr val="191232"/>
+          </a:solidFill>
+          <a:ln>
+            <a:noFill/>
+          </a:ln>
+        </p:spPr>
+        <p:style>
+          <a:lnRef idx="1">
+            <a:schemeClr val="accent1"/>
+          </a:lnRef>
+          <a:fillRef idx="3">
+            <a:schemeClr val="accent1"/>
+          </a:fillRef>
+          <a:effectRef idx="2">
+            <a:schemeClr val="accent1"/>
+          </a:effectRef>
+          <a:fontRef idx="minor">
+            <a:schemeClr val="lt1"/>
+          </a:fontRef>
+        </p:style>
+        <p:txBody>
+          <a:bodyPr rtlCol="0" anchor="ctr"/>
+          <a:lstStyle/>
+          <a:p>
+            <a:pPr algn="ctr"/>
+          </a:p>
+        </p:txBody>
+      </p:sp>
+      <p:sp>
+        <p:nvSpPr>
+          <p:cNvPr id="37" name="TextBox 36"/>
+          <p:cNvSpPr txBox="1"/>
+          <p:nvPr/>
+        </p:nvSpPr>
+        <p:spPr>
+          <a:xfrm>
+            <a:off x="457200" y="4023360"/>
+            <a:ext cx="2560320" cy="457200"/>
+          </a:xfrm>
+          <a:prstGeom prst="rect">
+            <a:avLst/>
+          </a:prstGeom>
+          <a:noFill/>
+        </p:spPr>
+        <p:txBody>
+          <a:bodyPr wrap="none" lIns="137160">
+            <a:spAutoFit/>
+          </a:bodyPr>
+          <a:lstStyle/>
+          <a:p>
+            <a:pPr algn="l">
+              <a:defRPr sz="1100">
+                <a:solidFill>
+                  <a:srgbClr val="9CA3AF"/>
+                </a:solidFill>
+              </a:defRPr>
+            </a:pPr>
+            <a:r>
+              <a:t>Prática de conversação</a:t>
+            </a:r>
+          </a:p>
+        </p:txBody>
+      </p:sp>
+      <p:sp>
+        <p:nvSpPr>
+          <p:cNvPr id="38" name="TextBox 37"/>
+          <p:cNvSpPr txBox="1"/>
+          <p:nvPr/>
+        </p:nvSpPr>
+        <p:spPr>
+          <a:xfrm>
+            <a:off x="3017520" y="4023360"/>
+            <a:ext cx="1828800" cy="457200"/>
+          </a:xfrm>
+          <a:prstGeom prst="rect">
+            <a:avLst/>
+          </a:prstGeom>
+          <a:noFill/>
+        </p:spPr>
+        <p:txBody>
+          <a:bodyPr wrap="none">
+            <a:spAutoFit/>
+          </a:bodyPr>
+          <a:lstStyle/>
+          <a:p>
+            <a:pPr algn="ctr">
+              <a:defRPr sz="1100" b="1">
+                <a:solidFill>
+                  <a:srgbClr val="22C55E"/>
+                </a:solidFill>
+              </a:defRPr>
+            </a:pPr>
+            <a:r>
+              <a:t>Sim</a:t>
+            </a:r>
+          </a:p>
+        </p:txBody>
+      </p:sp>
+      <p:sp>
+        <p:nvSpPr>
+          <p:cNvPr id="39" name="TextBox 38"/>
+          <p:cNvSpPr txBox="1"/>
+          <p:nvPr/>
+        </p:nvSpPr>
+        <p:spPr>
+          <a:xfrm>
+            <a:off x="4846320" y="4023360"/>
+            <a:ext cx="2011680" cy="457200"/>
+          </a:xfrm>
+          <a:prstGeom prst="rect">
+            <a:avLst/>
+          </a:prstGeom>
+          <a:noFill/>
+        </p:spPr>
+        <p:txBody>
+          <a:bodyPr wrap="none">
+            <a:spAutoFit/>
+          </a:bodyPr>
+          <a:lstStyle/>
+          <a:p>
+            <a:pPr algn="ctr">
+              <a:defRPr sz="1100">
+                <a:solidFill>
+                  <a:srgbClr val="EF4444"/>
+                </a:solidFill>
+              </a:defRPr>
+            </a:pPr>
+            <a:r>
+              <a:t>Não</a:t>
+            </a:r>
+          </a:p>
+        </p:txBody>
+      </p:sp>
+      <p:sp>
+        <p:nvSpPr>
+          <p:cNvPr id="40" name="TextBox 39"/>
+          <p:cNvSpPr txBox="1"/>
+          <p:nvPr/>
+        </p:nvSpPr>
+        <p:spPr>
+          <a:xfrm>
+            <a:off x="6858000" y="4023360"/>
+            <a:ext cx="1828800" cy="457200"/>
+          </a:xfrm>
+          <a:prstGeom prst="rect">
+            <a:avLst/>
+          </a:prstGeom>
+          <a:noFill/>
+        </p:spPr>
+        <p:txBody>
+          <a:bodyPr wrap="none">
+            <a:spAutoFit/>
+          </a:bodyPr>
+          <a:lstStyle/>
+          <a:p>
+            <a:pPr algn="ctr">
+              <a:defRPr sz="1100">
+                <a:solidFill>
+                  <a:srgbClr val="EF4444"/>
+                </a:solidFill>
+              </a:defRPr>
+            </a:pPr>
+            <a:r>
+              <a:t>Não</a:t>
+            </a:r>
+          </a:p>
+        </p:txBody>
+      </p:sp>
+      <p:sp>
+        <p:nvSpPr>
+          <p:cNvPr id="41" name="TextBox 40"/>
+          <p:cNvSpPr txBox="1"/>
+          <p:nvPr/>
+        </p:nvSpPr>
+        <p:spPr>
+          <a:xfrm>
+            <a:off x="8412480" y="4823460"/>
+            <a:ext cx="548640" cy="274320"/>
+          </a:xfrm>
+          <a:prstGeom prst="rect">
+            <a:avLst/>
+          </a:prstGeom>
+          <a:noFill/>
+        </p:spPr>
+        <p:txBody>
+          <a:bodyPr wrap="none">
+            <a:spAutoFit/>
+          </a:bodyPr>
+          <a:lstStyle/>
+          <a:p>
+            <a:pPr algn="r">
+              <a:defRPr sz="1000">
+                <a:solidFill>
+                  <a:srgbClr val="9CA3AF"/>
+                </a:solidFill>
+              </a:defRPr>
+            </a:pPr>
+            <a:r>
+              <a:t>15</a:t>
+            </a:r>
+          </a:p>
+        </p:txBody>
+      </p:sp>
+    </p:spTree>
+  </p:cSld>
+  <p:clrMapOvr>
+    <a:masterClrMapping/>
+  </p:clrMapOvr>
+</p:sld>
+</file>
+
+<file path=ppt/slides/slide16.xml><?xml version="1.0" encoding="utf-8"?>
+<p:sld xmlns:a="http://schemas.openxmlformats.org/drawingml/2006/main" xmlns:p="http://schemas.openxmlformats.org/presentationml/2006/main" xmlns:r="http://schemas.openxmlformats.org/officeDocument/2006/relationships">
+  <p:cSld>
+    <p:spTree>
+      <p:nvGrpSpPr>
+        <p:cNvPr id="1" name=""/>
+        <p:cNvGrpSpPr/>
+        <p:nvPr/>
+      </p:nvGrpSpPr>
+      <p:grpSpPr/>
+      <p:sp>
+        <p:nvSpPr>
+          <p:cNvPr id="2" name="Rectangle 1"/>
+          <p:cNvSpPr/>
+          <p:nvPr/>
+        </p:nvSpPr>
+        <p:spPr>
+          <a:xfrm>
+            <a:off x="0" y="0"/>
+            <a:ext cx="9144000" cy="5143500"/>
+          </a:xfrm>
+          <a:prstGeom prst="rect">
+            <a:avLst/>
+          </a:prstGeom>
+          <a:solidFill>
+            <a:srgbClr val="0F0A1F"/>
+          </a:solidFill>
+          <a:ln>
+            <a:noFill/>
+          </a:ln>
+        </p:spPr>
+        <p:style>
+          <a:lnRef idx="1">
+            <a:schemeClr val="accent1"/>
+          </a:lnRef>
+          <a:fillRef idx="3">
+            <a:schemeClr val="accent1"/>
+          </a:fillRef>
+          <a:effectRef idx="2">
+            <a:schemeClr val="accent1"/>
+          </a:effectRef>
+          <a:fontRef idx="minor">
+            <a:schemeClr val="lt1"/>
+          </a:fontRef>
+        </p:style>
+        <p:txBody>
+          <a:bodyPr rtlCol="0" anchor="ctr"/>
+          <a:lstStyle/>
+          <a:p>
+            <a:pPr algn="ctr"/>
+          </a:p>
+        </p:txBody>
+      </p:sp>
+      <p:sp>
+        <p:nvSpPr>
+          <p:cNvPr id="3" name="TextBox 2"/>
+          <p:cNvSpPr txBox="1"/>
+          <p:nvPr/>
+        </p:nvSpPr>
+        <p:spPr>
+          <a:xfrm>
+            <a:off x="457200" y="228600"/>
+            <a:ext cx="8229600" cy="640080"/>
+          </a:xfrm>
+          <a:prstGeom prst="rect">
+            <a:avLst/>
+          </a:prstGeom>
+          <a:noFill/>
+        </p:spPr>
+        <p:txBody>
+          <a:bodyPr wrap="none">
+            <a:spAutoFit/>
+          </a:bodyPr>
+          <a:lstStyle/>
+          <a:p>
+            <a:pPr algn="ctr">
+              <a:defRPr sz="3600" b="1">
+                <a:solidFill>
+                  <a:srgbClr val="FFFFFF"/>
+                </a:solidFill>
+              </a:defRPr>
+            </a:pPr>
+            <a:r>
+              <a:t>Ideal Para</a:t>
+            </a:r>
+          </a:p>
+        </p:txBody>
+      </p:sp>
+      <p:sp>
+        <p:nvSpPr>
+          <p:cNvPr id="4" name="Rounded Rectangle 3"/>
+          <p:cNvSpPr/>
+          <p:nvPr/>
+        </p:nvSpPr>
+        <p:spPr>
+          <a:xfrm>
+            <a:off x="457200" y="1188720"/>
+            <a:ext cx="3840480" cy="1280160"/>
           </a:xfrm>
           <a:prstGeom prst="roundRect">
             <a:avLst/>
@@ -9106,6 +9942,871 @@
       </p:sp>
       <p:sp>
         <p:nvSpPr>
+          <p:cNvPr id="5" name="Oval 4"/>
+          <p:cNvSpPr/>
+          <p:nvPr/>
+        </p:nvSpPr>
+        <p:spPr>
+          <a:xfrm>
+            <a:off x="640080" y="1463040"/>
+            <a:ext cx="640080" cy="640080"/>
+          </a:xfrm>
+          <a:prstGeom prst="ellipse">
+            <a:avLst/>
+          </a:prstGeom>
+          <a:solidFill>
+            <a:srgbClr val="EC4899"/>
+          </a:solidFill>
+          <a:ln>
+            <a:noFill/>
+          </a:ln>
+        </p:spPr>
+        <p:style>
+          <a:lnRef idx="1">
+            <a:schemeClr val="accent1"/>
+          </a:lnRef>
+          <a:fillRef idx="3">
+            <a:schemeClr val="accent1"/>
+          </a:fillRef>
+          <a:effectRef idx="2">
+            <a:schemeClr val="accent1"/>
+          </a:effectRef>
+          <a:fontRef idx="minor">
+            <a:schemeClr val="lt1"/>
+          </a:fontRef>
+        </p:style>
+        <p:txBody>
+          <a:bodyPr rtlCol="0" anchor="ctr"/>
+          <a:lstStyle/>
+          <a:p>
+            <a:pPr algn="ctr"/>
+          </a:p>
+        </p:txBody>
+      </p:sp>
+      <p:sp>
+        <p:nvSpPr>
+          <p:cNvPr id="6" name="TextBox 5"/>
+          <p:cNvSpPr txBox="1"/>
+          <p:nvPr/>
+        </p:nvSpPr>
+        <p:spPr>
+          <a:xfrm>
+            <a:off x="1463040" y="1417320"/>
+            <a:ext cx="2651760" cy="411480"/>
+          </a:xfrm>
+          <a:prstGeom prst="rect">
+            <a:avLst/>
+          </a:prstGeom>
+          <a:noFill/>
+        </p:spPr>
+        <p:txBody>
+          <a:bodyPr wrap="none">
+            <a:spAutoFit/>
+          </a:bodyPr>
+          <a:lstStyle/>
+          <a:p>
+            <a:pPr>
+              <a:defRPr sz="1800" b="1">
+                <a:solidFill>
+                  <a:srgbClr val="EC4899"/>
+                </a:solidFill>
+              </a:defRPr>
+            </a:pPr>
+            <a:r>
+              <a:t>Estudantes</a:t>
+            </a:r>
+          </a:p>
+        </p:txBody>
+      </p:sp>
+      <p:sp>
+        <p:nvSpPr>
+          <p:cNvPr id="7" name="TextBox 6"/>
+          <p:cNvSpPr txBox="1"/>
+          <p:nvPr/>
+        </p:nvSpPr>
+        <p:spPr>
+          <a:xfrm>
+            <a:off x="1463040" y="1828800"/>
+            <a:ext cx="2651760" cy="548640"/>
+          </a:xfrm>
+          <a:prstGeom prst="rect">
+            <a:avLst/>
+          </a:prstGeom>
+          <a:noFill/>
+        </p:spPr>
+        <p:txBody>
+          <a:bodyPr wrap="square">
+            <a:spAutoFit/>
+          </a:bodyPr>
+          <a:lstStyle/>
+          <a:p>
+            <a:pPr>
+              <a:defRPr sz="1300">
+                <a:solidFill>
+                  <a:srgbClr val="9CA3AF"/>
+                </a:solidFill>
+              </a:defRPr>
+            </a:pPr>
+            <a:r>
+              <a:t>Preparando para provas Goethe, TestDaF, DSH</a:t>
+            </a:r>
+          </a:p>
+        </p:txBody>
+      </p:sp>
+      <p:sp>
+        <p:nvSpPr>
+          <p:cNvPr id="8" name="Rounded Rectangle 7"/>
+          <p:cNvSpPr/>
+          <p:nvPr/>
+        </p:nvSpPr>
+        <p:spPr>
+          <a:xfrm>
+            <a:off x="4846320" y="1188720"/>
+            <a:ext cx="3840480" cy="1280160"/>
+          </a:xfrm>
+          <a:prstGeom prst="roundRect">
+            <a:avLst/>
+          </a:prstGeom>
+          <a:solidFill>
+            <a:srgbClr val="251C45"/>
+          </a:solidFill>
+          <a:ln w="25400">
+            <a:solidFill>
+              <a:srgbClr val="A855F7"/>
+            </a:solidFill>
+          </a:ln>
+        </p:spPr>
+        <p:style>
+          <a:lnRef idx="1">
+            <a:schemeClr val="accent1"/>
+          </a:lnRef>
+          <a:fillRef idx="3">
+            <a:schemeClr val="accent1"/>
+          </a:fillRef>
+          <a:effectRef idx="2">
+            <a:schemeClr val="accent1"/>
+          </a:effectRef>
+          <a:fontRef idx="minor">
+            <a:schemeClr val="lt1"/>
+          </a:fontRef>
+        </p:style>
+        <p:txBody>
+          <a:bodyPr rtlCol="0" anchor="ctr"/>
+          <a:lstStyle/>
+          <a:p>
+            <a:pPr algn="ctr"/>
+          </a:p>
+        </p:txBody>
+      </p:sp>
+      <p:sp>
+        <p:nvSpPr>
+          <p:cNvPr id="9" name="Oval 8"/>
+          <p:cNvSpPr/>
+          <p:nvPr/>
+        </p:nvSpPr>
+        <p:spPr>
+          <a:xfrm>
+            <a:off x="5029200" y="1463040"/>
+            <a:ext cx="640080" cy="640080"/>
+          </a:xfrm>
+          <a:prstGeom prst="ellipse">
+            <a:avLst/>
+          </a:prstGeom>
+          <a:solidFill>
+            <a:srgbClr val="A855F7"/>
+          </a:solidFill>
+          <a:ln>
+            <a:noFill/>
+          </a:ln>
+        </p:spPr>
+        <p:style>
+          <a:lnRef idx="1">
+            <a:schemeClr val="accent1"/>
+          </a:lnRef>
+          <a:fillRef idx="3">
+            <a:schemeClr val="accent1"/>
+          </a:fillRef>
+          <a:effectRef idx="2">
+            <a:schemeClr val="accent1"/>
+          </a:effectRef>
+          <a:fontRef idx="minor">
+            <a:schemeClr val="lt1"/>
+          </a:fontRef>
+        </p:style>
+        <p:txBody>
+          <a:bodyPr rtlCol="0" anchor="ctr"/>
+          <a:lstStyle/>
+          <a:p>
+            <a:pPr algn="ctr"/>
+          </a:p>
+        </p:txBody>
+      </p:sp>
+      <p:sp>
+        <p:nvSpPr>
+          <p:cNvPr id="10" name="TextBox 9"/>
+          <p:cNvSpPr txBox="1"/>
+          <p:nvPr/>
+        </p:nvSpPr>
+        <p:spPr>
+          <a:xfrm>
+            <a:off x="5852160" y="1417320"/>
+            <a:ext cx="2651760" cy="411480"/>
+          </a:xfrm>
+          <a:prstGeom prst="rect">
+            <a:avLst/>
+          </a:prstGeom>
+          <a:noFill/>
+        </p:spPr>
+        <p:txBody>
+          <a:bodyPr wrap="none">
+            <a:spAutoFit/>
+          </a:bodyPr>
+          <a:lstStyle/>
+          <a:p>
+            <a:pPr>
+              <a:defRPr sz="1800" b="1">
+                <a:solidFill>
+                  <a:srgbClr val="A855F7"/>
+                </a:solidFill>
+              </a:defRPr>
+            </a:pPr>
+            <a:r>
+              <a:t>Profissionais</a:t>
+            </a:r>
+          </a:p>
+        </p:txBody>
+      </p:sp>
+      <p:sp>
+        <p:nvSpPr>
+          <p:cNvPr id="11" name="TextBox 10"/>
+          <p:cNvSpPr txBox="1"/>
+          <p:nvPr/>
+        </p:nvSpPr>
+        <p:spPr>
+          <a:xfrm>
+            <a:off x="5852160" y="1828800"/>
+            <a:ext cx="2651760" cy="548640"/>
+          </a:xfrm>
+          <a:prstGeom prst="rect">
+            <a:avLst/>
+          </a:prstGeom>
+          <a:noFill/>
+        </p:spPr>
+        <p:txBody>
+          <a:bodyPr wrap="square">
+            <a:spAutoFit/>
+          </a:bodyPr>
+          <a:lstStyle/>
+          <a:p>
+            <a:pPr>
+              <a:defRPr sz="1300">
+                <a:solidFill>
+                  <a:srgbClr val="9CA3AF"/>
+                </a:solidFill>
+              </a:defRPr>
+            </a:pPr>
+            <a:r>
+              <a:t>Que precisam escrever em alemão no trabalho</a:t>
+            </a:r>
+          </a:p>
+        </p:txBody>
+      </p:sp>
+      <p:sp>
+        <p:nvSpPr>
+          <p:cNvPr id="12" name="Rounded Rectangle 11"/>
+          <p:cNvSpPr/>
+          <p:nvPr/>
+        </p:nvSpPr>
+        <p:spPr>
+          <a:xfrm>
+            <a:off x="457200" y="2697480"/>
+            <a:ext cx="3840480" cy="1280160"/>
+          </a:xfrm>
+          <a:prstGeom prst="roundRect">
+            <a:avLst/>
+          </a:prstGeom>
+          <a:solidFill>
+            <a:srgbClr val="251C45"/>
+          </a:solidFill>
+          <a:ln w="25400">
+            <a:solidFill>
+              <a:srgbClr val="3B82F6"/>
+            </a:solidFill>
+          </a:ln>
+        </p:spPr>
+        <p:style>
+          <a:lnRef idx="1">
+            <a:schemeClr val="accent1"/>
+          </a:lnRef>
+          <a:fillRef idx="3">
+            <a:schemeClr val="accent1"/>
+          </a:fillRef>
+          <a:effectRef idx="2">
+            <a:schemeClr val="accent1"/>
+          </a:effectRef>
+          <a:fontRef idx="minor">
+            <a:schemeClr val="lt1"/>
+          </a:fontRef>
+        </p:style>
+        <p:txBody>
+          <a:bodyPr rtlCol="0" anchor="ctr"/>
+          <a:lstStyle/>
+          <a:p>
+            <a:pPr algn="ctr"/>
+          </a:p>
+        </p:txBody>
+      </p:sp>
+      <p:sp>
+        <p:nvSpPr>
+          <p:cNvPr id="13" name="Oval 12"/>
+          <p:cNvSpPr/>
+          <p:nvPr/>
+        </p:nvSpPr>
+        <p:spPr>
+          <a:xfrm>
+            <a:off x="640080" y="2971800"/>
+            <a:ext cx="640080" cy="640080"/>
+          </a:xfrm>
+          <a:prstGeom prst="ellipse">
+            <a:avLst/>
+          </a:prstGeom>
+          <a:solidFill>
+            <a:srgbClr val="3B82F6"/>
+          </a:solidFill>
+          <a:ln>
+            <a:noFill/>
+          </a:ln>
+        </p:spPr>
+        <p:style>
+          <a:lnRef idx="1">
+            <a:schemeClr val="accent1"/>
+          </a:lnRef>
+          <a:fillRef idx="3">
+            <a:schemeClr val="accent1"/>
+          </a:fillRef>
+          <a:effectRef idx="2">
+            <a:schemeClr val="accent1"/>
+          </a:effectRef>
+          <a:fontRef idx="minor">
+            <a:schemeClr val="lt1"/>
+          </a:fontRef>
+        </p:style>
+        <p:txBody>
+          <a:bodyPr rtlCol="0" anchor="ctr"/>
+          <a:lstStyle/>
+          <a:p>
+            <a:pPr algn="ctr"/>
+          </a:p>
+        </p:txBody>
+      </p:sp>
+      <p:sp>
+        <p:nvSpPr>
+          <p:cNvPr id="14" name="TextBox 13"/>
+          <p:cNvSpPr txBox="1"/>
+          <p:nvPr/>
+        </p:nvSpPr>
+        <p:spPr>
+          <a:xfrm>
+            <a:off x="1463040" y="2926080"/>
+            <a:ext cx="2651760" cy="411480"/>
+          </a:xfrm>
+          <a:prstGeom prst="rect">
+            <a:avLst/>
+          </a:prstGeom>
+          <a:noFill/>
+        </p:spPr>
+        <p:txBody>
+          <a:bodyPr wrap="none">
+            <a:spAutoFit/>
+          </a:bodyPr>
+          <a:lstStyle/>
+          <a:p>
+            <a:pPr>
+              <a:defRPr sz="1800" b="1">
+                <a:solidFill>
+                  <a:srgbClr val="3B82F6"/>
+                </a:solidFill>
+              </a:defRPr>
+            </a:pPr>
+            <a:r>
+              <a:t>Professores</a:t>
+            </a:r>
+          </a:p>
+        </p:txBody>
+      </p:sp>
+      <p:sp>
+        <p:nvSpPr>
+          <p:cNvPr id="15" name="TextBox 14"/>
+          <p:cNvSpPr txBox="1"/>
+          <p:nvPr/>
+        </p:nvSpPr>
+        <p:spPr>
+          <a:xfrm>
+            <a:off x="1463040" y="3337560"/>
+            <a:ext cx="2651760" cy="548640"/>
+          </a:xfrm>
+          <a:prstGeom prst="rect">
+            <a:avLst/>
+          </a:prstGeom>
+          <a:noFill/>
+        </p:spPr>
+        <p:txBody>
+          <a:bodyPr wrap="square">
+            <a:spAutoFit/>
+          </a:bodyPr>
+          <a:lstStyle/>
+          <a:p>
+            <a:pPr>
+              <a:defRPr sz="1300">
+                <a:solidFill>
+                  <a:srgbClr val="9CA3AF"/>
+                </a:solidFill>
+              </a:defRPr>
+            </a:pPr>
+            <a:r>
+              <a:t>Que querem otimizar correções de alunos</a:t>
+            </a:r>
+          </a:p>
+        </p:txBody>
+      </p:sp>
+      <p:sp>
+        <p:nvSpPr>
+          <p:cNvPr id="16" name="Rounded Rectangle 15"/>
+          <p:cNvSpPr/>
+          <p:nvPr/>
+        </p:nvSpPr>
+        <p:spPr>
+          <a:xfrm>
+            <a:off x="4846320" y="2697480"/>
+            <a:ext cx="3840480" cy="1280160"/>
+          </a:xfrm>
+          <a:prstGeom prst="roundRect">
+            <a:avLst/>
+          </a:prstGeom>
+          <a:solidFill>
+            <a:srgbClr val="251C45"/>
+          </a:solidFill>
+          <a:ln w="25400">
+            <a:solidFill>
+              <a:srgbClr val="22C55E"/>
+            </a:solidFill>
+          </a:ln>
+        </p:spPr>
+        <p:style>
+          <a:lnRef idx="1">
+            <a:schemeClr val="accent1"/>
+          </a:lnRef>
+          <a:fillRef idx="3">
+            <a:schemeClr val="accent1"/>
+          </a:fillRef>
+          <a:effectRef idx="2">
+            <a:schemeClr val="accent1"/>
+          </a:effectRef>
+          <a:fontRef idx="minor">
+            <a:schemeClr val="lt1"/>
+          </a:fontRef>
+        </p:style>
+        <p:txBody>
+          <a:bodyPr rtlCol="0" anchor="ctr"/>
+          <a:lstStyle/>
+          <a:p>
+            <a:pPr algn="ctr"/>
+          </a:p>
+        </p:txBody>
+      </p:sp>
+      <p:sp>
+        <p:nvSpPr>
+          <p:cNvPr id="17" name="Oval 16"/>
+          <p:cNvSpPr/>
+          <p:nvPr/>
+        </p:nvSpPr>
+        <p:spPr>
+          <a:xfrm>
+            <a:off x="5029200" y="2971800"/>
+            <a:ext cx="640080" cy="640080"/>
+          </a:xfrm>
+          <a:prstGeom prst="ellipse">
+            <a:avLst/>
+          </a:prstGeom>
+          <a:solidFill>
+            <a:srgbClr val="22C55E"/>
+          </a:solidFill>
+          <a:ln>
+            <a:noFill/>
+          </a:ln>
+        </p:spPr>
+        <p:style>
+          <a:lnRef idx="1">
+            <a:schemeClr val="accent1"/>
+          </a:lnRef>
+          <a:fillRef idx="3">
+            <a:schemeClr val="accent1"/>
+          </a:fillRef>
+          <a:effectRef idx="2">
+            <a:schemeClr val="accent1"/>
+          </a:effectRef>
+          <a:fontRef idx="minor">
+            <a:schemeClr val="lt1"/>
+          </a:fontRef>
+        </p:style>
+        <p:txBody>
+          <a:bodyPr rtlCol="0" anchor="ctr"/>
+          <a:lstStyle/>
+          <a:p>
+            <a:pPr algn="ctr"/>
+          </a:p>
+        </p:txBody>
+      </p:sp>
+      <p:sp>
+        <p:nvSpPr>
+          <p:cNvPr id="18" name="TextBox 17"/>
+          <p:cNvSpPr txBox="1"/>
+          <p:nvPr/>
+        </p:nvSpPr>
+        <p:spPr>
+          <a:xfrm>
+            <a:off x="5852160" y="2926080"/>
+            <a:ext cx="2651760" cy="411480"/>
+          </a:xfrm>
+          <a:prstGeom prst="rect">
+            <a:avLst/>
+          </a:prstGeom>
+          <a:noFill/>
+        </p:spPr>
+        <p:txBody>
+          <a:bodyPr wrap="none">
+            <a:spAutoFit/>
+          </a:bodyPr>
+          <a:lstStyle/>
+          <a:p>
+            <a:pPr>
+              <a:defRPr sz="1800" b="1">
+                <a:solidFill>
+                  <a:srgbClr val="22C55E"/>
+                </a:solidFill>
+              </a:defRPr>
+            </a:pPr>
+            <a:r>
+              <a:t>Aprendizes</a:t>
+            </a:r>
+          </a:p>
+        </p:txBody>
+      </p:sp>
+      <p:sp>
+        <p:nvSpPr>
+          <p:cNvPr id="19" name="TextBox 18"/>
+          <p:cNvSpPr txBox="1"/>
+          <p:nvPr/>
+        </p:nvSpPr>
+        <p:spPr>
+          <a:xfrm>
+            <a:off x="5852160" y="3337560"/>
+            <a:ext cx="2651760" cy="548640"/>
+          </a:xfrm>
+          <a:prstGeom prst="rect">
+            <a:avLst/>
+          </a:prstGeom>
+          <a:noFill/>
+        </p:spPr>
+        <p:txBody>
+          <a:bodyPr wrap="square">
+            <a:spAutoFit/>
+          </a:bodyPr>
+          <a:lstStyle/>
+          <a:p>
+            <a:pPr>
+              <a:defRPr sz="1300">
+                <a:solidFill>
+                  <a:srgbClr val="9CA3AF"/>
+                </a:solidFill>
+              </a:defRPr>
+            </a:pPr>
+            <a:r>
+              <a:t>De qualquer nível, do iniciante ao avançado</a:t>
+            </a:r>
+          </a:p>
+        </p:txBody>
+      </p:sp>
+      <p:sp>
+        <p:nvSpPr>
+          <p:cNvPr id="20" name="TextBox 19"/>
+          <p:cNvSpPr txBox="1"/>
+          <p:nvPr/>
+        </p:nvSpPr>
+        <p:spPr>
+          <a:xfrm>
+            <a:off x="8412480" y="4823460"/>
+            <a:ext cx="548640" cy="274320"/>
+          </a:xfrm>
+          <a:prstGeom prst="rect">
+            <a:avLst/>
+          </a:prstGeom>
+          <a:noFill/>
+        </p:spPr>
+        <p:txBody>
+          <a:bodyPr wrap="none">
+            <a:spAutoFit/>
+          </a:bodyPr>
+          <a:lstStyle/>
+          <a:p>
+            <a:pPr algn="r">
+              <a:defRPr sz="1000">
+                <a:solidFill>
+                  <a:srgbClr val="9CA3AF"/>
+                </a:solidFill>
+              </a:defRPr>
+            </a:pPr>
+            <a:r>
+              <a:t>16</a:t>
+            </a:r>
+          </a:p>
+        </p:txBody>
+      </p:sp>
+    </p:spTree>
+  </p:cSld>
+  <p:clrMapOvr>
+    <a:masterClrMapping/>
+  </p:clrMapOvr>
+</p:sld>
+</file>
+
+<file path=ppt/slides/slide17.xml><?xml version="1.0" encoding="utf-8"?>
+<p:sld xmlns:a="http://schemas.openxmlformats.org/drawingml/2006/main" xmlns:p="http://schemas.openxmlformats.org/presentationml/2006/main" xmlns:r="http://schemas.openxmlformats.org/officeDocument/2006/relationships">
+  <p:cSld>
+    <p:spTree>
+      <p:nvGrpSpPr>
+        <p:cNvPr id="1" name=""/>
+        <p:cNvGrpSpPr/>
+        <p:nvPr/>
+      </p:nvGrpSpPr>
+      <p:grpSpPr/>
+      <p:sp>
+        <p:nvSpPr>
+          <p:cNvPr id="2" name="Rectangle 1"/>
+          <p:cNvSpPr/>
+          <p:nvPr/>
+        </p:nvSpPr>
+        <p:spPr>
+          <a:xfrm>
+            <a:off x="0" y="0"/>
+            <a:ext cx="9144000" cy="5143500"/>
+          </a:xfrm>
+          <a:prstGeom prst="rect">
+            <a:avLst/>
+          </a:prstGeom>
+          <a:solidFill>
+            <a:srgbClr val="0F0A1F"/>
+          </a:solidFill>
+          <a:ln>
+            <a:noFill/>
+          </a:ln>
+        </p:spPr>
+        <p:style>
+          <a:lnRef idx="1">
+            <a:schemeClr val="accent1"/>
+          </a:lnRef>
+          <a:fillRef idx="3">
+            <a:schemeClr val="accent1"/>
+          </a:fillRef>
+          <a:effectRef idx="2">
+            <a:schemeClr val="accent1"/>
+          </a:effectRef>
+          <a:fontRef idx="minor">
+            <a:schemeClr val="lt1"/>
+          </a:fontRef>
+        </p:style>
+        <p:txBody>
+          <a:bodyPr rtlCol="0" anchor="ctr"/>
+          <a:lstStyle/>
+          <a:p>
+            <a:pPr algn="ctr"/>
+          </a:p>
+        </p:txBody>
+      </p:sp>
+      <p:sp>
+        <p:nvSpPr>
+          <p:cNvPr id="3" name="Rectangle 2"/>
+          <p:cNvSpPr/>
+          <p:nvPr/>
+        </p:nvSpPr>
+        <p:spPr>
+          <a:xfrm>
+            <a:off x="0" y="0"/>
+            <a:ext cx="9144000" cy="91440"/>
+          </a:xfrm>
+          <a:prstGeom prst="rect">
+            <a:avLst/>
+          </a:prstGeom>
+          <a:solidFill>
+            <a:srgbClr val="A855F7"/>
+          </a:solidFill>
+          <a:ln>
+            <a:noFill/>
+          </a:ln>
+        </p:spPr>
+        <p:style>
+          <a:lnRef idx="1">
+            <a:schemeClr val="accent1"/>
+          </a:lnRef>
+          <a:fillRef idx="3">
+            <a:schemeClr val="accent1"/>
+          </a:fillRef>
+          <a:effectRef idx="2">
+            <a:schemeClr val="accent1"/>
+          </a:effectRef>
+          <a:fontRef idx="minor">
+            <a:schemeClr val="lt1"/>
+          </a:fontRef>
+        </p:style>
+        <p:txBody>
+          <a:bodyPr rtlCol="0" anchor="ctr"/>
+          <a:lstStyle/>
+          <a:p>
+            <a:pPr algn="ctr"/>
+          </a:p>
+        </p:txBody>
+      </p:sp>
+      <p:pic>
+        <p:nvPicPr>
+          <p:cNvPr id="4" name="Picture 3" descr="LogobrancofundoTransparentev1.png"/>
+          <p:cNvPicPr>
+            <a:picLocks noChangeAspect="1"/>
+          </p:cNvPicPr>
+          <p:nvPr/>
+        </p:nvPicPr>
+        <p:blipFill>
+          <a:blip r:embed="rId2"/>
+          <a:stretch>
+            <a:fillRect/>
+          </a:stretch>
+        </p:blipFill>
+        <p:spPr>
+          <a:xfrm>
+            <a:off x="3474720" y="457200"/>
+            <a:ext cx="2133600" cy="1280160"/>
+          </a:xfrm>
+          <a:prstGeom prst="rect">
+            <a:avLst/>
+          </a:prstGeom>
+        </p:spPr>
+      </p:pic>
+      <p:sp>
+        <p:nvSpPr>
+          <p:cNvPr id="5" name="TextBox 4"/>
+          <p:cNvSpPr txBox="1"/>
+          <p:nvPr/>
+        </p:nvSpPr>
+        <p:spPr>
+          <a:xfrm>
+            <a:off x="457200" y="1920240"/>
+            <a:ext cx="8229600" cy="914400"/>
+          </a:xfrm>
+          <a:prstGeom prst="rect">
+            <a:avLst/>
+          </a:prstGeom>
+          <a:noFill/>
+        </p:spPr>
+        <p:txBody>
+          <a:bodyPr wrap="none">
+            <a:spAutoFit/>
+          </a:bodyPr>
+          <a:lstStyle/>
+          <a:p>
+            <a:pPr algn="ctr">
+              <a:defRPr sz="4000" b="1">
+                <a:solidFill>
+                  <a:srgbClr val="FFFFFF"/>
+                </a:solidFill>
+              </a:defRPr>
+            </a:pPr>
+            <a:r>
+              <a:t>Comece a dominar o alemão hoje!</a:t>
+            </a:r>
+          </a:p>
+        </p:txBody>
+      </p:sp>
+      <p:sp>
+        <p:nvSpPr>
+          <p:cNvPr id="6" name="TextBox 5"/>
+          <p:cNvSpPr txBox="1"/>
+          <p:nvPr/>
+        </p:nvSpPr>
+        <p:spPr>
+          <a:xfrm>
+            <a:off x="457200" y="2743200"/>
+            <a:ext cx="8229600" cy="548640"/>
+          </a:xfrm>
+          <a:prstGeom prst="rect">
+            <a:avLst/>
+          </a:prstGeom>
+          <a:noFill/>
+        </p:spPr>
+        <p:txBody>
+          <a:bodyPr wrap="none">
+            <a:spAutoFit/>
+          </a:bodyPr>
+          <a:lstStyle/>
+          <a:p>
+            <a:pPr algn="ctr">
+              <a:defRPr sz="2000">
+                <a:solidFill>
+                  <a:srgbClr val="A855F7"/>
+                </a:solidFill>
+              </a:defRPr>
+            </a:pPr>
+            <a:r>
+              <a:t>Experimente grátis - 100 créditos para novos usuários</a:t>
+            </a:r>
+          </a:p>
+        </p:txBody>
+      </p:sp>
+      <p:sp>
+        <p:nvSpPr>
+          <p:cNvPr id="7" name="Rounded Rectangle 6"/>
+          <p:cNvSpPr/>
+          <p:nvPr/>
+        </p:nvSpPr>
+        <p:spPr>
+          <a:xfrm>
+            <a:off x="2286000" y="3383280"/>
+            <a:ext cx="4572000" cy="731520"/>
+          </a:xfrm>
+          <a:prstGeom prst="roundRect">
+            <a:avLst/>
+          </a:prstGeom>
+          <a:solidFill>
+            <a:srgbClr val="251C45"/>
+          </a:solidFill>
+          <a:ln w="25400">
+            <a:solidFill>
+              <a:srgbClr val="EC4899"/>
+            </a:solidFill>
+          </a:ln>
+        </p:spPr>
+        <p:style>
+          <a:lnRef idx="1">
+            <a:schemeClr val="accent1"/>
+          </a:lnRef>
+          <a:fillRef idx="3">
+            <a:schemeClr val="accent1"/>
+          </a:fillRef>
+          <a:effectRef idx="2">
+            <a:schemeClr val="accent1"/>
+          </a:effectRef>
+          <a:fontRef idx="minor">
+            <a:schemeClr val="lt1"/>
+          </a:fontRef>
+        </p:style>
+        <p:txBody>
+          <a:bodyPr rtlCol="0" anchor="ctr"/>
+          <a:lstStyle/>
+          <a:p>
+            <a:pPr algn="ctr"/>
+          </a:p>
+        </p:txBody>
+      </p:sp>
+      <p:sp>
+        <p:nvSpPr>
           <p:cNvPr id="8" name="TextBox 7"/>
           <p:cNvSpPr txBox="1"/>
           <p:nvPr/>
@@ -9204,7 +10905,7 @@
               </a:defRPr>
             </a:pPr>
             <a:r>
-              <a:t>15</a:t>
+              <a:t>17</a:t>
             </a:r>
           </a:p>
         </p:txBody>
@@ -9763,7 +11464,7 @@
               </a:defRPr>
             </a:pPr>
             <a:r>
-              <a:t>Como Funciona</a:t>
+              <a:t>Chatbot e Ferramentas IA</a:t>
             </a:r>
           </a:p>
         </p:txBody>
@@ -9868,7 +11569,7 @@
               </a:defRPr>
             </a:pPr>
             <a:r>
-              <a:t>Análise de Custo</a:t>
+              <a:t>Como Funciona</a:t>
             </a:r>
           </a:p>
         </p:txBody>
@@ -9973,7 +11674,7 @@
               </a:defRPr>
             </a:pPr>
             <a:r>
-              <a:t>Comparativo com Concorrentes</a:t>
+              <a:t>Análise de Custo</a:t>
             </a:r>
           </a:p>
         </p:txBody>
@@ -10078,7 +11779,7 @@
               </a:defRPr>
             </a:pPr>
             <a:r>
-              <a:t>Público Alvo</a:t>
+              <a:t>Comparativo e Público Alvo</a:t>
             </a:r>
           </a:p>
         </p:txBody>

--- a/CorrectMe_Apresentacao.pptx
+++ b/CorrectMe_Apresentacao.pptx
@@ -4427,89 +4427,33 @@
           </a:p>
         </p:txBody>
       </p:sp>
-      <p:sp>
-        <p:nvSpPr>
-          <p:cNvPr id="18" name="Rounded Rectangle 17"/>
-          <p:cNvSpPr/>
-          <p:nvPr/>
-        </p:nvSpPr>
+      <p:pic>
+        <p:nvPicPr>
+          <p:cNvPr id="18" name="Picture 17" descr="Parafrasear.png"/>
+          <p:cNvPicPr>
+            <a:picLocks noChangeAspect="1"/>
+          </p:cNvPicPr>
+          <p:nvPr/>
+        </p:nvPicPr>
+        <p:blipFill>
+          <a:blip r:embed="rId2"/>
+          <a:stretch>
+            <a:fillRect/>
+          </a:stretch>
+        </p:blipFill>
         <p:spPr>
           <a:xfrm>
             <a:off x="4572000" y="457200"/>
-            <a:ext cx="4297680" cy="3931920"/>
-          </a:xfrm>
-          <a:prstGeom prst="roundRect">
-            <a:avLst/>
-          </a:prstGeom>
-          <a:solidFill>
-            <a:srgbClr val="372A5C"/>
-          </a:solidFill>
-          <a:ln w="25400">
-            <a:solidFill>
-              <a:srgbClr val="F97316"/>
-            </a:solidFill>
-          </a:ln>
-        </p:spPr>
-        <p:style>
-          <a:lnRef idx="1">
-            <a:schemeClr val="accent1"/>
-          </a:lnRef>
-          <a:fillRef idx="3">
-            <a:schemeClr val="accent1"/>
-          </a:fillRef>
-          <a:effectRef idx="2">
-            <a:schemeClr val="accent1"/>
-          </a:effectRef>
-          <a:fontRef idx="minor">
-            <a:schemeClr val="lt1"/>
-          </a:fontRef>
-        </p:style>
-        <p:txBody>
-          <a:bodyPr rtlCol="0" anchor="ctr"/>
-          <a:lstStyle/>
-          <a:p>
-            <a:pPr algn="ctr"/>
-          </a:p>
-        </p:txBody>
-      </p:sp>
+            <a:ext cx="4297680" cy="2111420"/>
+          </a:xfrm>
+          <a:prstGeom prst="rect">
+            <a:avLst/>
+          </a:prstGeom>
+        </p:spPr>
+      </p:pic>
       <p:sp>
         <p:nvSpPr>
           <p:cNvPr id="19" name="TextBox 18"/>
-          <p:cNvSpPr txBox="1"/>
-          <p:nvPr/>
-        </p:nvSpPr>
-        <p:spPr>
-          <a:xfrm>
-            <a:off x="5029200" y="2103120"/>
-            <a:ext cx="3383280" cy="457200"/>
-          </a:xfrm>
-          <a:prstGeom prst="rect">
-            <a:avLst/>
-          </a:prstGeom>
-          <a:noFill/>
-        </p:spPr>
-        <p:txBody>
-          <a:bodyPr wrap="none">
-            <a:spAutoFit/>
-          </a:bodyPr>
-          <a:lstStyle/>
-          <a:p>
-            <a:pPr algn="ctr">
-              <a:defRPr sz="1400">
-                <a:solidFill>
-                  <a:srgbClr val="9CA3AF"/>
-                </a:solidFill>
-              </a:defRPr>
-            </a:pPr>
-            <a:r>
-              <a:t>[parafrasear.png]</a:t>
-            </a:r>
-          </a:p>
-        </p:txBody>
-      </p:sp>
-      <p:sp>
-        <p:nvSpPr>
-          <p:cNvPr id="20" name="TextBox 19"/>
           <p:cNvSpPr txBox="1"/>
           <p:nvPr/>
         </p:nvSpPr>
@@ -5192,89 +5136,33 @@
           </a:p>
         </p:txBody>
       </p:sp>
-      <p:sp>
-        <p:nvSpPr>
-          <p:cNvPr id="18" name="Rounded Rectangle 17"/>
-          <p:cNvSpPr/>
-          <p:nvPr/>
-        </p:nvSpPr>
+      <p:pic>
+        <p:nvPicPr>
+          <p:cNvPr id="18" name="Picture 17" descr="Screenshot_chatbot_correcaoconversa.png"/>
+          <p:cNvPicPr>
+            <a:picLocks noChangeAspect="1"/>
+          </p:cNvPicPr>
+          <p:nvPr/>
+        </p:nvPicPr>
+        <p:blipFill>
+          <a:blip r:embed="rId2"/>
+          <a:stretch>
+            <a:fillRect/>
+          </a:stretch>
+        </p:blipFill>
         <p:spPr>
           <a:xfrm>
             <a:off x="4572000" y="457200"/>
-            <a:ext cx="4297680" cy="3931920"/>
-          </a:xfrm>
-          <a:prstGeom prst="roundRect">
-            <a:avLst/>
-          </a:prstGeom>
-          <a:solidFill>
-            <a:srgbClr val="372A5C"/>
-          </a:solidFill>
-          <a:ln w="25400">
-            <a:solidFill>
-              <a:srgbClr val="EC4899"/>
-            </a:solidFill>
-          </a:ln>
-        </p:spPr>
-        <p:style>
-          <a:lnRef idx="1">
-            <a:schemeClr val="accent1"/>
-          </a:lnRef>
-          <a:fillRef idx="3">
-            <a:schemeClr val="accent1"/>
-          </a:fillRef>
-          <a:effectRef idx="2">
-            <a:schemeClr val="accent1"/>
-          </a:effectRef>
-          <a:fontRef idx="minor">
-            <a:schemeClr val="lt1"/>
-          </a:fontRef>
-        </p:style>
-        <p:txBody>
-          <a:bodyPr rtlCol="0" anchor="ctr"/>
-          <a:lstStyle/>
-          <a:p>
-            <a:pPr algn="ctr"/>
-          </a:p>
-        </p:txBody>
-      </p:sp>
+            <a:ext cx="4297680" cy="5353889"/>
+          </a:xfrm>
+          <a:prstGeom prst="rect">
+            <a:avLst/>
+          </a:prstGeom>
+        </p:spPr>
+      </p:pic>
       <p:sp>
         <p:nvSpPr>
           <p:cNvPr id="19" name="TextBox 18"/>
-          <p:cNvSpPr txBox="1"/>
-          <p:nvPr/>
-        </p:nvSpPr>
-        <p:spPr>
-          <a:xfrm>
-            <a:off x="5029200" y="2103120"/>
-            <a:ext cx="3383280" cy="457200"/>
-          </a:xfrm>
-          <a:prstGeom prst="rect">
-            <a:avLst/>
-          </a:prstGeom>
-          <a:noFill/>
-        </p:spPr>
-        <p:txBody>
-          <a:bodyPr wrap="none">
-            <a:spAutoFit/>
-          </a:bodyPr>
-          <a:lstStyle/>
-          <a:p>
-            <a:pPr algn="ctr">
-              <a:defRPr sz="1400">
-                <a:solidFill>
-                  <a:srgbClr val="9CA3AF"/>
-                </a:solidFill>
-              </a:defRPr>
-            </a:pPr>
-            <a:r>
-              <a:t>[Screenshot_chatbot_correcaoconversa.png]</a:t>
-            </a:r>
-          </a:p>
-        </p:txBody>
-      </p:sp>
-      <p:sp>
-        <p:nvSpPr>
-          <p:cNvPr id="20" name="TextBox 19"/>
           <p:cNvSpPr txBox="1"/>
           <p:nvPr/>
         </p:nvSpPr>
@@ -5957,89 +5845,33 @@
           </a:p>
         </p:txBody>
       </p:sp>
-      <p:sp>
-        <p:nvSpPr>
-          <p:cNvPr id="18" name="Rounded Rectangle 17"/>
-          <p:cNvSpPr/>
-          <p:nvPr/>
-        </p:nvSpPr>
+      <p:pic>
+        <p:nvPicPr>
+          <p:cNvPr id="18" name="Picture 17" descr="Screenshot_chatbot_explicacaogramatica.png"/>
+          <p:cNvPicPr>
+            <a:picLocks noChangeAspect="1"/>
+          </p:cNvPicPr>
+          <p:nvPr/>
+        </p:nvPicPr>
+        <p:blipFill>
+          <a:blip r:embed="rId2"/>
+          <a:stretch>
+            <a:fillRect/>
+          </a:stretch>
+        </p:blipFill>
         <p:spPr>
           <a:xfrm>
             <a:off x="4572000" y="457200"/>
-            <a:ext cx="4297680" cy="3931920"/>
-          </a:xfrm>
-          <a:prstGeom prst="roundRect">
-            <a:avLst/>
-          </a:prstGeom>
-          <a:solidFill>
-            <a:srgbClr val="372A5C"/>
-          </a:solidFill>
-          <a:ln w="25400">
-            <a:solidFill>
-              <a:srgbClr val="A855F7"/>
-            </a:solidFill>
-          </a:ln>
-        </p:spPr>
-        <p:style>
-          <a:lnRef idx="1">
-            <a:schemeClr val="accent1"/>
-          </a:lnRef>
-          <a:fillRef idx="3">
-            <a:schemeClr val="accent1"/>
-          </a:fillRef>
-          <a:effectRef idx="2">
-            <a:schemeClr val="accent1"/>
-          </a:effectRef>
-          <a:fontRef idx="minor">
-            <a:schemeClr val="lt1"/>
-          </a:fontRef>
-        </p:style>
-        <p:txBody>
-          <a:bodyPr rtlCol="0" anchor="ctr"/>
-          <a:lstStyle/>
-          <a:p>
-            <a:pPr algn="ctr"/>
-          </a:p>
-        </p:txBody>
-      </p:sp>
+            <a:ext cx="4297680" cy="5436382"/>
+          </a:xfrm>
+          <a:prstGeom prst="rect">
+            <a:avLst/>
+          </a:prstGeom>
+        </p:spPr>
+      </p:pic>
       <p:sp>
         <p:nvSpPr>
           <p:cNvPr id="19" name="TextBox 18"/>
-          <p:cNvSpPr txBox="1"/>
-          <p:nvPr/>
-        </p:nvSpPr>
-        <p:spPr>
-          <a:xfrm>
-            <a:off x="5029200" y="2103120"/>
-            <a:ext cx="3383280" cy="457200"/>
-          </a:xfrm>
-          <a:prstGeom prst="rect">
-            <a:avLst/>
-          </a:prstGeom>
-          <a:noFill/>
-        </p:spPr>
-        <p:txBody>
-          <a:bodyPr wrap="none">
-            <a:spAutoFit/>
-          </a:bodyPr>
-          <a:lstStyle/>
-          <a:p>
-            <a:pPr algn="ctr">
-              <a:defRPr sz="1400">
-                <a:solidFill>
-                  <a:srgbClr val="9CA3AF"/>
-                </a:solidFill>
-              </a:defRPr>
-            </a:pPr>
-            <a:r>
-              <a:t>[Screenshot_chatbot_explicacaogramatica.png]</a:t>
-            </a:r>
-          </a:p>
-        </p:txBody>
-      </p:sp>
-      <p:sp>
-        <p:nvSpPr>
-          <p:cNvPr id="20" name="TextBox 19"/>
           <p:cNvSpPr txBox="1"/>
           <p:nvPr/>
         </p:nvSpPr>

--- a/CorrectMe_Apresentacao.pptx
+++ b/CorrectMe_Apresentacao.pptx
@@ -5152,8 +5152,8 @@
         </p:blipFill>
         <p:spPr>
           <a:xfrm>
-            <a:off x="4572000" y="457200"/>
-            <a:ext cx="4297680" cy="5353889"/>
+            <a:off x="5646420" y="457200"/>
+            <a:ext cx="2148840" cy="2676945"/>
           </a:xfrm>
           <a:prstGeom prst="rect">
             <a:avLst/>
@@ -5861,8 +5861,8 @@
         </p:blipFill>
         <p:spPr>
           <a:xfrm>
-            <a:off x="4572000" y="457200"/>
-            <a:ext cx="4297680" cy="5436382"/>
+            <a:off x="5646420" y="457200"/>
+            <a:ext cx="2148840" cy="2718191"/>
           </a:xfrm>
           <a:prstGeom prst="rect">
             <a:avLst/>
